--- a/CST Logic_Nicolas.pptx
+++ b/CST Logic_Nicolas.pptx
@@ -5,16 +5,18 @@
     <p:sldMasterId id="2147483648" r:id="rId4"/>
   </p:sldMasterIdLst>
   <p:notesMasterIdLst>
-    <p:notesMasterId r:id="rId9"/>
+    <p:notesMasterId r:id="rId11"/>
   </p:notesMasterIdLst>
   <p:handoutMasterIdLst>
-    <p:handoutMasterId r:id="rId10"/>
+    <p:handoutMasterId r:id="rId12"/>
   </p:handoutMasterIdLst>
   <p:sldIdLst>
     <p:sldId id="257" r:id="rId5"/>
     <p:sldId id="258" r:id="rId6"/>
     <p:sldId id="259" r:id="rId7"/>
     <p:sldId id="260" r:id="rId8"/>
+    <p:sldId id="261" r:id="rId9"/>
+    <p:sldId id="262" r:id="rId10"/>
   </p:sldIdLst>
   <p:sldSz cx="9144000" cy="5143500" type="screen16x9"/>
   <p:notesSz cx="7099300" cy="10234613"/>
@@ -179,7 +181,7 @@
 <file path=ppt/revisionInfo.xml><?xml version="1.0" encoding="utf-8"?>
 <p1510:revInfo xmlns:a="http://schemas.openxmlformats.org/drawingml/2006/main" xmlns:r="http://schemas.openxmlformats.org/officeDocument/2006/relationships" xmlns:p1510="http://schemas.microsoft.com/office/powerpoint/2015/10/main">
   <p1510:revLst>
-    <p1510:client id="{2FDD96F3-A351-4EED-A098-41AB839BD8D2}" v="5" dt="2026-03-10T08:03:04.554"/>
+    <p1510:client id="{B0DE12A9-E9D6-4299-A7BF-3E91FE730240}" v="329" dt="2026-07-24T01:29:37.118"/>
   </p1510:revLst>
 </p1510:revInfo>
 </file>
@@ -188,113 +190,480 @@
 <pc:chgInfo xmlns:a="http://schemas.openxmlformats.org/drawingml/2006/main" xmlns:r="http://schemas.openxmlformats.org/officeDocument/2006/relationships" xmlns:ac="http://schemas.microsoft.com/office/drawing/2013/main/command" xmlns:pc="http://schemas.microsoft.com/office/powerpoint/2013/main/command">
   <pc:docChgLst>
     <pc:chgData name="Yang Zhen SGH CDAY223" userId="58c6818a-3577-4ae3-8238-bcb4cc81b368" providerId="ADAL" clId="{BEBCD458-1472-443B-8616-221ED4FCAD17}"/>
-    <pc:docChg chg="addSld modSld">
-      <pc:chgData name="Yang Zhen SGH CDAY223" userId="58c6818a-3577-4ae3-8238-bcb4cc81b368" providerId="ADAL" clId="{BEBCD458-1472-443B-8616-221ED4FCAD17}" dt="2026-03-10T08:05:46.249" v="589" actId="20577"/>
+    <pc:docChg chg="undo custSel addSld modSld">
+      <pc:chgData name="Yang Zhen SGH CDAY223" userId="58c6818a-3577-4ae3-8238-bcb4cc81b368" providerId="ADAL" clId="{BEBCD458-1472-443B-8616-221ED4FCAD17}" dt="2026-07-24T01:30:01.336" v="2300" actId="20577"/>
       <pc:docMkLst>
         <pc:docMk/>
       </pc:docMkLst>
-      <pc:sldChg chg="modSp add mod">
-        <pc:chgData name="Yang Zhen SGH CDAY223" userId="58c6818a-3577-4ae3-8238-bcb4cc81b368" providerId="ADAL" clId="{BEBCD458-1472-443B-8616-221ED4FCAD17}" dt="2026-03-10T08:05:46.249" v="589" actId="20577"/>
+      <pc:sldChg chg="addSp delSp modSp add mod">
+        <pc:chgData name="Yang Zhen SGH CDAY223" userId="58c6818a-3577-4ae3-8238-bcb4cc81b368" providerId="ADAL" clId="{BEBCD458-1472-443B-8616-221ED4FCAD17}" dt="2026-07-23T06:33:29.827" v="1846" actId="208"/>
         <pc:sldMkLst>
           <pc:docMk/>
-          <pc:sldMk cId="1248162188" sldId="260"/>
+          <pc:sldMk cId="3466089900" sldId="261"/>
         </pc:sldMkLst>
         <pc:spChg chg="mod">
-          <ac:chgData name="Yang Zhen SGH CDAY223" userId="58c6818a-3577-4ae3-8238-bcb4cc81b368" providerId="ADAL" clId="{BEBCD458-1472-443B-8616-221ED4FCAD17}" dt="2026-03-10T08:05:15.262" v="520" actId="20577"/>
+          <ac:chgData name="Yang Zhen SGH CDAY223" userId="58c6818a-3577-4ae3-8238-bcb4cc81b368" providerId="ADAL" clId="{BEBCD458-1472-443B-8616-221ED4FCAD17}" dt="2026-07-23T05:24:57.978" v="771" actId="1076"/>
           <ac:spMkLst>
             <pc:docMk/>
-            <pc:sldMk cId="1248162188" sldId="260"/>
-            <ac:spMk id="11" creationId="{2F1DF634-30C5-65B6-CB3E-87A578A78CF3}"/>
+            <pc:sldMk cId="3466089900" sldId="261"/>
+            <ac:spMk id="11" creationId="{0BCD895D-D44A-A9B4-F145-0FC41E02AAD5}"/>
           </ac:spMkLst>
         </pc:spChg>
         <pc:spChg chg="mod">
-          <ac:chgData name="Yang Zhen SGH CDAY223" userId="58c6818a-3577-4ae3-8238-bcb4cc81b368" providerId="ADAL" clId="{BEBCD458-1472-443B-8616-221ED4FCAD17}" dt="2026-03-10T08:05:46.249" v="589" actId="20577"/>
+          <ac:chgData name="Yang Zhen SGH CDAY223" userId="58c6818a-3577-4ae3-8238-bcb4cc81b368" providerId="ADAL" clId="{BEBCD458-1472-443B-8616-221ED4FCAD17}" dt="2026-07-23T06:03:22.974" v="1807"/>
           <ac:spMkLst>
             <pc:docMk/>
-            <pc:sldMk cId="1248162188" sldId="260"/>
-            <ac:spMk id="18" creationId="{E58ED813-0ABC-55F8-F883-DBC1C31945D4}"/>
+            <pc:sldMk cId="3466089900" sldId="261"/>
+            <ac:spMk id="35" creationId="{2A24E38B-3F4A-EFF2-0C04-5D4020572949}"/>
+          </ac:spMkLst>
+        </pc:spChg>
+        <pc:spChg chg="add mod">
+          <ac:chgData name="Yang Zhen SGH CDAY223" userId="58c6818a-3577-4ae3-8238-bcb4cc81b368" providerId="ADAL" clId="{BEBCD458-1472-443B-8616-221ED4FCAD17}" dt="2026-07-23T05:22:33.489" v="658" actId="1036"/>
+          <ac:spMkLst>
+            <pc:docMk/>
+            <pc:sldMk cId="3466089900" sldId="261"/>
+            <ac:spMk id="38" creationId="{B53A3EA2-133A-A66B-1488-8CC86F956644}"/>
           </ac:spMkLst>
         </pc:spChg>
         <pc:spChg chg="mod">
-          <ac:chgData name="Yang Zhen SGH CDAY223" userId="58c6818a-3577-4ae3-8238-bcb4cc81b368" providerId="ADAL" clId="{BEBCD458-1472-443B-8616-221ED4FCAD17}" dt="2026-03-10T08:02:26.507" v="299" actId="20577"/>
+          <ac:chgData name="Yang Zhen SGH CDAY223" userId="58c6818a-3577-4ae3-8238-bcb4cc81b368" providerId="ADAL" clId="{BEBCD458-1472-443B-8616-221ED4FCAD17}" dt="2026-07-23T05:23:20.913" v="679" actId="1076"/>
           <ac:spMkLst>
             <pc:docMk/>
-            <pc:sldMk cId="1248162188" sldId="260"/>
-            <ac:spMk id="23" creationId="{F2929FFE-3DC5-9A91-BC8B-B96DBCA9C9AC}"/>
+            <pc:sldMk cId="3466089900" sldId="261"/>
+            <ac:spMk id="40" creationId="{47246910-195C-8252-ADE8-12ADF3F8CA80}"/>
           </ac:spMkLst>
         </pc:spChg>
         <pc:spChg chg="mod">
-          <ac:chgData name="Yang Zhen SGH CDAY223" userId="58c6818a-3577-4ae3-8238-bcb4cc81b368" providerId="ADAL" clId="{BEBCD458-1472-443B-8616-221ED4FCAD17}" dt="2026-03-10T08:04:54.605" v="514" actId="14100"/>
+          <ac:chgData name="Yang Zhen SGH CDAY223" userId="58c6818a-3577-4ae3-8238-bcb4cc81b368" providerId="ADAL" clId="{BEBCD458-1472-443B-8616-221ED4FCAD17}" dt="2026-07-23T05:52:16.869" v="1548" actId="20577"/>
           <ac:spMkLst>
             <pc:docMk/>
-            <pc:sldMk cId="1248162188" sldId="260"/>
-            <ac:spMk id="30" creationId="{33881ABB-DDF1-81BB-529B-812ABAD7F825}"/>
+            <pc:sldMk cId="3466089900" sldId="261"/>
+            <ac:spMk id="41" creationId="{06151FA6-B28C-FE24-16F8-B4F32AF29735}"/>
           </ac:spMkLst>
         </pc:spChg>
         <pc:spChg chg="mod">
-          <ac:chgData name="Yang Zhen SGH CDAY223" userId="58c6818a-3577-4ae3-8238-bcb4cc81b368" providerId="ADAL" clId="{BEBCD458-1472-443B-8616-221ED4FCAD17}" dt="2026-03-10T08:03:11.855" v="353" actId="20577"/>
+          <ac:chgData name="Yang Zhen SGH CDAY223" userId="58c6818a-3577-4ae3-8238-bcb4cc81b368" providerId="ADAL" clId="{BEBCD458-1472-443B-8616-221ED4FCAD17}" dt="2026-07-23T05:52:24.754" v="1558" actId="20577"/>
           <ac:spMkLst>
             <pc:docMk/>
-            <pc:sldMk cId="1248162188" sldId="260"/>
-            <ac:spMk id="34" creationId="{23435069-C46B-EB8B-143F-F3939656B4C9}"/>
+            <pc:sldMk cId="3466089900" sldId="261"/>
+            <ac:spMk id="44" creationId="{C283D3E5-1932-2552-BD6A-9B14FE96A428}"/>
           </ac:spMkLst>
         </pc:spChg>
         <pc:spChg chg="mod">
-          <ac:chgData name="Yang Zhen SGH CDAY223" userId="58c6818a-3577-4ae3-8238-bcb4cc81b368" providerId="ADAL" clId="{BEBCD458-1472-443B-8616-221ED4FCAD17}" dt="2026-03-10T08:05:24.808" v="546" actId="20577"/>
+          <ac:chgData name="Yang Zhen SGH CDAY223" userId="58c6818a-3577-4ae3-8238-bcb4cc81b368" providerId="ADAL" clId="{BEBCD458-1472-443B-8616-221ED4FCAD17}" dt="2026-07-23T05:52:02.534" v="1544" actId="13926"/>
           <ac:spMkLst>
             <pc:docMk/>
-            <pc:sldMk cId="1248162188" sldId="260"/>
-            <ac:spMk id="40" creationId="{944F8F31-7068-3568-9EE8-6FA670C25B6E}"/>
+            <pc:sldMk cId="3466089900" sldId="261"/>
+            <ac:spMk id="45" creationId="{AA3D03A3-153F-23E1-F037-221849F2B7EE}"/>
           </ac:spMkLst>
         </pc:spChg>
         <pc:spChg chg="mod">
-          <ac:chgData name="Yang Zhen SGH CDAY223" userId="58c6818a-3577-4ae3-8238-bcb4cc81b368" providerId="ADAL" clId="{BEBCD458-1472-443B-8616-221ED4FCAD17}" dt="2026-03-10T07:58:48.162" v="39" actId="20577"/>
+          <ac:chgData name="Yang Zhen SGH CDAY223" userId="58c6818a-3577-4ae3-8238-bcb4cc81b368" providerId="ADAL" clId="{BEBCD458-1472-443B-8616-221ED4FCAD17}" dt="2026-07-23T06:04:05.517" v="1824" actId="14100"/>
           <ac:spMkLst>
             <pc:docMk/>
-            <pc:sldMk cId="1248162188" sldId="260"/>
-            <ac:spMk id="41" creationId="{3EA7B7D6-FE72-F2F8-65A2-CFA5B95AE19B}"/>
+            <pc:sldMk cId="3466089900" sldId="261"/>
+            <ac:spMk id="46" creationId="{9211907B-969C-529C-27AC-729EB130D02E}"/>
           </ac:spMkLst>
         </pc:spChg>
         <pc:spChg chg="mod">
-          <ac:chgData name="Yang Zhen SGH CDAY223" userId="58c6818a-3577-4ae3-8238-bcb4cc81b368" providerId="ADAL" clId="{BEBCD458-1472-443B-8616-221ED4FCAD17}" dt="2026-03-10T07:59:03.250" v="71" actId="1076"/>
+          <ac:chgData name="Yang Zhen SGH CDAY223" userId="58c6818a-3577-4ae3-8238-bcb4cc81b368" providerId="ADAL" clId="{BEBCD458-1472-443B-8616-221ED4FCAD17}" dt="2026-07-23T06:04:29.203" v="1828" actId="20577"/>
           <ac:spMkLst>
             <pc:docMk/>
-            <pc:sldMk cId="1248162188" sldId="260"/>
-            <ac:spMk id="44" creationId="{FD70D49B-A297-1B4D-67C9-F0625B9390A2}"/>
+            <pc:sldMk cId="3466089900" sldId="261"/>
+            <ac:spMk id="47" creationId="{5AF8FA28-13DE-59B5-1E91-AC5142294AAB}"/>
+          </ac:spMkLst>
+        </pc:spChg>
+        <pc:spChg chg="del mod">
+          <ac:chgData name="Yang Zhen SGH CDAY223" userId="58c6818a-3577-4ae3-8238-bcb4cc81b368" providerId="ADAL" clId="{BEBCD458-1472-443B-8616-221ED4FCAD17}" dt="2026-07-23T05:50:11.164" v="1507" actId="478"/>
+          <ac:spMkLst>
+            <pc:docMk/>
+            <pc:sldMk cId="3466089900" sldId="261"/>
+            <ac:spMk id="48" creationId="{F27520B2-5975-0FE1-8CA7-55AEB225C562}"/>
           </ac:spMkLst>
         </pc:spChg>
         <pc:spChg chg="mod">
-          <ac:chgData name="Yang Zhen SGH CDAY223" userId="58c6818a-3577-4ae3-8238-bcb4cc81b368" providerId="ADAL" clId="{BEBCD458-1472-443B-8616-221ED4FCAD17}" dt="2026-03-10T07:59:14.579" v="97" actId="1076"/>
+          <ac:chgData name="Yang Zhen SGH CDAY223" userId="58c6818a-3577-4ae3-8238-bcb4cc81b368" providerId="ADAL" clId="{BEBCD458-1472-443B-8616-221ED4FCAD17}" dt="2026-07-23T05:53:26.762" v="1562" actId="20577"/>
           <ac:spMkLst>
             <pc:docMk/>
-            <pc:sldMk cId="1248162188" sldId="260"/>
-            <ac:spMk id="45" creationId="{FB75632D-A74D-DA7A-6220-18E06D3AC245}"/>
+            <pc:sldMk cId="3466089900" sldId="261"/>
+            <ac:spMk id="49" creationId="{C0A0D570-DB5C-D209-B9E1-038BF71A0CD8}"/>
+          </ac:spMkLst>
+        </pc:spChg>
+        <pc:spChg chg="add mod">
+          <ac:chgData name="Yang Zhen SGH CDAY223" userId="58c6818a-3577-4ae3-8238-bcb4cc81b368" providerId="ADAL" clId="{BEBCD458-1472-443B-8616-221ED4FCAD17}" dt="2026-07-23T05:22:53.657" v="661" actId="14100"/>
+          <ac:spMkLst>
+            <pc:docMk/>
+            <pc:sldMk cId="3466089900" sldId="261"/>
+            <ac:spMk id="52" creationId="{8F0898D3-3F99-94CB-B91C-22A19935BF04}"/>
+          </ac:spMkLst>
+        </pc:spChg>
+        <pc:spChg chg="add mod ord">
+          <ac:chgData name="Yang Zhen SGH CDAY223" userId="58c6818a-3577-4ae3-8238-bcb4cc81b368" providerId="ADAL" clId="{BEBCD458-1472-443B-8616-221ED4FCAD17}" dt="2026-07-23T05:44:00.767" v="1180" actId="167"/>
+          <ac:spMkLst>
+            <pc:docMk/>
+            <pc:sldMk cId="3466089900" sldId="261"/>
+            <ac:spMk id="53" creationId="{2E757C8D-F8C6-C384-281F-4793CE0C6908}"/>
+          </ac:spMkLst>
+        </pc:spChg>
+        <pc:spChg chg="add mod">
+          <ac:chgData name="Yang Zhen SGH CDAY223" userId="58c6818a-3577-4ae3-8238-bcb4cc81b368" providerId="ADAL" clId="{BEBCD458-1472-443B-8616-221ED4FCAD17}" dt="2026-07-23T05:35:47.754" v="877" actId="1076"/>
+          <ac:spMkLst>
+            <pc:docMk/>
+            <pc:sldMk cId="3466089900" sldId="261"/>
+            <ac:spMk id="54" creationId="{CBA4E754-9973-7F4E-512F-23D204CFB3FD}"/>
+          </ac:spMkLst>
+        </pc:spChg>
+        <pc:spChg chg="add mod">
+          <ac:chgData name="Yang Zhen SGH CDAY223" userId="58c6818a-3577-4ae3-8238-bcb4cc81b368" providerId="ADAL" clId="{BEBCD458-1472-443B-8616-221ED4FCAD17}" dt="2026-07-23T05:36:12.237" v="941"/>
+          <ac:spMkLst>
+            <pc:docMk/>
+            <pc:sldMk cId="3466089900" sldId="261"/>
+            <ac:spMk id="55" creationId="{7A93CE4E-C202-B3CD-CA45-A5364D460C26}"/>
+          </ac:spMkLst>
+        </pc:spChg>
+        <pc:spChg chg="add mod ord">
+          <ac:chgData name="Yang Zhen SGH CDAY223" userId="58c6818a-3577-4ae3-8238-bcb4cc81b368" providerId="ADAL" clId="{BEBCD458-1472-443B-8616-221ED4FCAD17}" dt="2026-07-23T05:44:02.536" v="1181" actId="167"/>
+          <ac:spMkLst>
+            <pc:docMk/>
+            <pc:sldMk cId="3466089900" sldId="261"/>
+            <ac:spMk id="56" creationId="{C0FFF644-CB7F-A6C8-12E1-91BD31BAA89F}"/>
+          </ac:spMkLst>
+        </pc:spChg>
+        <pc:spChg chg="add del mod">
+          <ac:chgData name="Yang Zhen SGH CDAY223" userId="58c6818a-3577-4ae3-8238-bcb4cc81b368" providerId="ADAL" clId="{BEBCD458-1472-443B-8616-221ED4FCAD17}" dt="2026-07-23T05:33:51.799" v="869" actId="478"/>
+          <ac:spMkLst>
+            <pc:docMk/>
+            <pc:sldMk cId="3466089900" sldId="261"/>
+            <ac:spMk id="57" creationId="{B1D33DD4-C073-3CF0-0102-08BE1FAE84F9}"/>
+          </ac:spMkLst>
+        </pc:spChg>
+        <pc:spChg chg="add mod">
+          <ac:chgData name="Yang Zhen SGH CDAY223" userId="58c6818a-3577-4ae3-8238-bcb4cc81b368" providerId="ADAL" clId="{BEBCD458-1472-443B-8616-221ED4FCAD17}" dt="2026-07-23T05:35:40.013" v="876" actId="207"/>
+          <ac:spMkLst>
+            <pc:docMk/>
+            <pc:sldMk cId="3466089900" sldId="261"/>
+            <ac:spMk id="58" creationId="{BC6096C1-29A3-A507-6277-C04A2EDB4222}"/>
+          </ac:spMkLst>
+        </pc:spChg>
+        <pc:spChg chg="add mod">
+          <ac:chgData name="Yang Zhen SGH CDAY223" userId="58c6818a-3577-4ae3-8238-bcb4cc81b368" providerId="ADAL" clId="{BEBCD458-1472-443B-8616-221ED4FCAD17}" dt="2026-07-23T05:36:42.789" v="945" actId="207"/>
+          <ac:spMkLst>
+            <pc:docMk/>
+            <pc:sldMk cId="3466089900" sldId="261"/>
+            <ac:spMk id="61" creationId="{F23A59DA-857F-6686-C75A-23B541E8A25D}"/>
+          </ac:spMkLst>
+        </pc:spChg>
+        <pc:spChg chg="add mod">
+          <ac:chgData name="Yang Zhen SGH CDAY223" userId="58c6818a-3577-4ae3-8238-bcb4cc81b368" providerId="ADAL" clId="{BEBCD458-1472-443B-8616-221ED4FCAD17}" dt="2026-07-23T05:40:12.336" v="1075" actId="1076"/>
+          <ac:spMkLst>
+            <pc:docMk/>
+            <pc:sldMk cId="3466089900" sldId="261"/>
+            <ac:spMk id="63" creationId="{D3740B67-4928-8C8C-CEC4-BB56D543734E}"/>
+          </ac:spMkLst>
+        </pc:spChg>
+        <pc:spChg chg="add mod">
+          <ac:chgData name="Yang Zhen SGH CDAY223" userId="58c6818a-3577-4ae3-8238-bcb4cc81b368" providerId="ADAL" clId="{BEBCD458-1472-443B-8616-221ED4FCAD17}" dt="2026-07-23T05:42:30.546" v="1171" actId="1076"/>
+          <ac:spMkLst>
+            <pc:docMk/>
+            <pc:sldMk cId="3466089900" sldId="261"/>
+            <ac:spMk id="67" creationId="{91286DF9-684F-D9BE-E668-4CAB5CE1B313}"/>
+          </ac:spMkLst>
+        </pc:spChg>
+        <pc:spChg chg="add mod ord">
+          <ac:chgData name="Yang Zhen SGH CDAY223" userId="58c6818a-3577-4ae3-8238-bcb4cc81b368" providerId="ADAL" clId="{BEBCD458-1472-443B-8616-221ED4FCAD17}" dt="2026-07-23T05:43:38.632" v="1177" actId="167"/>
+          <ac:spMkLst>
+            <pc:docMk/>
+            <pc:sldMk cId="3466089900" sldId="261"/>
+            <ac:spMk id="68" creationId="{37073895-C328-AD2B-CBEB-F879562F66FF}"/>
+          </ac:spMkLst>
+        </pc:spChg>
+        <pc:spChg chg="add mod">
+          <ac:chgData name="Yang Zhen SGH CDAY223" userId="58c6818a-3577-4ae3-8238-bcb4cc81b368" providerId="ADAL" clId="{BEBCD458-1472-443B-8616-221ED4FCAD17}" dt="2026-07-23T06:03:06.416" v="1797" actId="1076"/>
+          <ac:spMkLst>
+            <pc:docMk/>
+            <pc:sldMk cId="3466089900" sldId="261"/>
+            <ac:spMk id="81" creationId="{89CCE5C2-4CCF-5592-092A-DA60711FA514}"/>
+          </ac:spMkLst>
+        </pc:spChg>
+        <pc:spChg chg="add mod">
+          <ac:chgData name="Yang Zhen SGH CDAY223" userId="58c6818a-3577-4ae3-8238-bcb4cc81b368" providerId="ADAL" clId="{BEBCD458-1472-443B-8616-221ED4FCAD17}" dt="2026-07-23T06:05:07.158" v="1842" actId="1076"/>
+          <ac:spMkLst>
+            <pc:docMk/>
+            <pc:sldMk cId="3466089900" sldId="261"/>
+            <ac:spMk id="87" creationId="{05DD48FA-C4D7-80F1-CE3E-3A0E59C0001F}"/>
+          </ac:spMkLst>
+        </pc:spChg>
+        <pc:cxnChg chg="add mod">
+          <ac:chgData name="Yang Zhen SGH CDAY223" userId="58c6818a-3577-4ae3-8238-bcb4cc81b368" providerId="ADAL" clId="{BEBCD458-1472-443B-8616-221ED4FCAD17}" dt="2026-07-23T05:20:30.753" v="627" actId="1037"/>
+          <ac:cxnSpMkLst>
+            <pc:docMk/>
+            <pc:sldMk cId="3466089900" sldId="261"/>
+            <ac:cxnSpMk id="10" creationId="{98C46430-E7F0-A873-AD20-845A4B725896}"/>
+          </ac:cxnSpMkLst>
+        </pc:cxnChg>
+        <pc:cxnChg chg="mod">
+          <ac:chgData name="Yang Zhen SGH CDAY223" userId="58c6818a-3577-4ae3-8238-bcb4cc81b368" providerId="ADAL" clId="{BEBCD458-1472-443B-8616-221ED4FCAD17}" dt="2026-07-23T05:52:08.434" v="1545" actId="14100"/>
+          <ac:cxnSpMkLst>
+            <pc:docMk/>
+            <pc:sldMk cId="3466089900" sldId="261"/>
+            <ac:cxnSpMk id="14" creationId="{281F298B-D0AA-C4B5-0782-F7F4D6D3BB7B}"/>
+          </ac:cxnSpMkLst>
+        </pc:cxnChg>
+        <pc:cxnChg chg="mod">
+          <ac:chgData name="Yang Zhen SGH CDAY223" userId="58c6818a-3577-4ae3-8238-bcb4cc81b368" providerId="ADAL" clId="{BEBCD458-1472-443B-8616-221ED4FCAD17}" dt="2026-07-23T05:44:46.174" v="1188" actId="14100"/>
+          <ac:cxnSpMkLst>
+            <pc:docMk/>
+            <pc:sldMk cId="3466089900" sldId="261"/>
+            <ac:cxnSpMk id="15" creationId="{A0B702AA-7CED-DD25-21C7-8505DD58DFAC}"/>
+          </ac:cxnSpMkLst>
+        </pc:cxnChg>
+        <pc:cxnChg chg="add mod">
+          <ac:chgData name="Yang Zhen SGH CDAY223" userId="58c6818a-3577-4ae3-8238-bcb4cc81b368" providerId="ADAL" clId="{BEBCD458-1472-443B-8616-221ED4FCAD17}" dt="2026-07-23T05:20:44.993" v="629" actId="1076"/>
+          <ac:cxnSpMkLst>
+            <pc:docMk/>
+            <pc:sldMk cId="3466089900" sldId="261"/>
+            <ac:cxnSpMk id="16" creationId="{9BFE056F-8EF7-18AE-63B5-9A62F06A38AE}"/>
+          </ac:cxnSpMkLst>
+        </pc:cxnChg>
+        <pc:cxnChg chg="add mod">
+          <ac:chgData name="Yang Zhen SGH CDAY223" userId="58c6818a-3577-4ae3-8238-bcb4cc81b368" providerId="ADAL" clId="{BEBCD458-1472-443B-8616-221ED4FCAD17}" dt="2026-07-23T05:21:10.754" v="635" actId="1038"/>
+          <ac:cxnSpMkLst>
+            <pc:docMk/>
+            <pc:sldMk cId="3466089900" sldId="261"/>
+            <ac:cxnSpMk id="21" creationId="{2B55EA21-37E2-39AE-A8AC-3CF153D171B1}"/>
+          </ac:cxnSpMkLst>
+        </pc:cxnChg>
+        <pc:cxnChg chg="add mod">
+          <ac:chgData name="Yang Zhen SGH CDAY223" userId="58c6818a-3577-4ae3-8238-bcb4cc81b368" providerId="ADAL" clId="{BEBCD458-1472-443B-8616-221ED4FCAD17}" dt="2026-07-23T05:21:22.481" v="641" actId="1035"/>
+          <ac:cxnSpMkLst>
+            <pc:docMk/>
+            <pc:sldMk cId="3466089900" sldId="261"/>
+            <ac:cxnSpMk id="24" creationId="{4AF03F23-4402-B6D7-6C76-D4B064BBF4C8}"/>
+          </ac:cxnSpMkLst>
+        </pc:cxnChg>
+        <pc:cxnChg chg="mod">
+          <ac:chgData name="Yang Zhen SGH CDAY223" userId="58c6818a-3577-4ae3-8238-bcb4cc81b368" providerId="ADAL" clId="{BEBCD458-1472-443B-8616-221ED4FCAD17}" dt="2026-07-23T06:02:06.422" v="1785" actId="14100"/>
+          <ac:cxnSpMkLst>
+            <pc:docMk/>
+            <pc:sldMk cId="3466089900" sldId="261"/>
+            <ac:cxnSpMk id="31" creationId="{36F13E7E-29DF-FCB8-5BC7-3C3DAEA74537}"/>
+          </ac:cxnSpMkLst>
+        </pc:cxnChg>
+        <pc:cxnChg chg="add mod">
+          <ac:chgData name="Yang Zhen SGH CDAY223" userId="58c6818a-3577-4ae3-8238-bcb4cc81b368" providerId="ADAL" clId="{BEBCD458-1472-443B-8616-221ED4FCAD17}" dt="2026-07-23T05:21:37.087" v="643" actId="1076"/>
+          <ac:cxnSpMkLst>
+            <pc:docMk/>
+            <pc:sldMk cId="3466089900" sldId="261"/>
+            <ac:cxnSpMk id="32" creationId="{B26DAFB7-E24C-6EB0-47A0-611573DFE34F}"/>
+          </ac:cxnSpMkLst>
+        </pc:cxnChg>
+        <pc:cxnChg chg="add mod">
+          <ac:chgData name="Yang Zhen SGH CDAY223" userId="58c6818a-3577-4ae3-8238-bcb4cc81b368" providerId="ADAL" clId="{BEBCD458-1472-443B-8616-221ED4FCAD17}" dt="2026-07-23T05:21:48.305" v="647" actId="1038"/>
+          <ac:cxnSpMkLst>
+            <pc:docMk/>
+            <pc:sldMk cId="3466089900" sldId="261"/>
+            <ac:cxnSpMk id="36" creationId="{E49777AA-0F8F-E555-A6D1-957F45DCF5B4}"/>
+          </ac:cxnSpMkLst>
+        </pc:cxnChg>
+        <pc:cxnChg chg="mod">
+          <ac:chgData name="Yang Zhen SGH CDAY223" userId="58c6818a-3577-4ae3-8238-bcb4cc81b368" providerId="ADAL" clId="{BEBCD458-1472-443B-8616-221ED4FCAD17}" dt="2026-07-23T06:33:29.827" v="1846" actId="208"/>
+          <ac:cxnSpMkLst>
+            <pc:docMk/>
+            <pc:sldMk cId="3466089900" sldId="261"/>
+            <ac:cxnSpMk id="59" creationId="{B3DA0F87-508A-20EF-3477-B130851F53BD}"/>
+          </ac:cxnSpMkLst>
+        </pc:cxnChg>
+        <pc:cxnChg chg="mod">
+          <ac:chgData name="Yang Zhen SGH CDAY223" userId="58c6818a-3577-4ae3-8238-bcb4cc81b368" providerId="ADAL" clId="{BEBCD458-1472-443B-8616-221ED4FCAD17}" dt="2026-07-23T05:44:49.482" v="1189" actId="14100"/>
+          <ac:cxnSpMkLst>
+            <pc:docMk/>
+            <pc:sldMk cId="3466089900" sldId="261"/>
+            <ac:cxnSpMk id="60" creationId="{FB4D7C05-38BC-CA32-15CA-DB26CEE587C5}"/>
+          </ac:cxnSpMkLst>
+        </pc:cxnChg>
+        <pc:cxnChg chg="mod">
+          <ac:chgData name="Yang Zhen SGH CDAY223" userId="58c6818a-3577-4ae3-8238-bcb4cc81b368" providerId="ADAL" clId="{BEBCD458-1472-443B-8616-221ED4FCAD17}" dt="2026-07-23T05:31:50" v="843" actId="1076"/>
+          <ac:cxnSpMkLst>
+            <pc:docMk/>
+            <pc:sldMk cId="3466089900" sldId="261"/>
+            <ac:cxnSpMk id="62" creationId="{C485E875-2745-F13B-A4F2-1B17CFD39C00}"/>
+          </ac:cxnSpMkLst>
+        </pc:cxnChg>
+        <pc:cxnChg chg="add mod">
+          <ac:chgData name="Yang Zhen SGH CDAY223" userId="58c6818a-3577-4ae3-8238-bcb4cc81b368" providerId="ADAL" clId="{BEBCD458-1472-443B-8616-221ED4FCAD17}" dt="2026-07-23T05:44:33.934" v="1187" actId="14100"/>
+          <ac:cxnSpMkLst>
+            <pc:docMk/>
+            <pc:sldMk cId="3466089900" sldId="261"/>
+            <ac:cxnSpMk id="65" creationId="{2FAF935C-B688-3982-E010-A2C1F898AFEB}"/>
+          </ac:cxnSpMkLst>
+        </pc:cxnChg>
+        <pc:cxnChg chg="add mod">
+          <ac:chgData name="Yang Zhen SGH CDAY223" userId="58c6818a-3577-4ae3-8238-bcb4cc81b368" providerId="ADAL" clId="{BEBCD458-1472-443B-8616-221ED4FCAD17}" dt="2026-07-23T05:40:58.878" v="1082" actId="1035"/>
+          <ac:cxnSpMkLst>
+            <pc:docMk/>
+            <pc:sldMk cId="3466089900" sldId="261"/>
+            <ac:cxnSpMk id="66" creationId="{2EF40D64-D6C7-9724-B12F-BE783E2A4E1F}"/>
+          </ac:cxnSpMkLst>
+        </pc:cxnChg>
+        <pc:cxnChg chg="add del mod">
+          <ac:chgData name="Yang Zhen SGH CDAY223" userId="58c6818a-3577-4ae3-8238-bcb4cc81b368" providerId="ADAL" clId="{BEBCD458-1472-443B-8616-221ED4FCAD17}" dt="2026-07-23T06:02:26.144" v="1787" actId="478"/>
+          <ac:cxnSpMkLst>
+            <pc:docMk/>
+            <pc:sldMk cId="3466089900" sldId="261"/>
+            <ac:cxnSpMk id="71" creationId="{7EF73952-D4D1-6429-030E-6B0A4E774C5D}"/>
+          </ac:cxnSpMkLst>
+        </pc:cxnChg>
+        <pc:cxnChg chg="add mod">
+          <ac:chgData name="Yang Zhen SGH CDAY223" userId="58c6818a-3577-4ae3-8238-bcb4cc81b368" providerId="ADAL" clId="{BEBCD458-1472-443B-8616-221ED4FCAD17}" dt="2026-07-23T06:00:31.487" v="1757" actId="1076"/>
+          <ac:cxnSpMkLst>
+            <pc:docMk/>
+            <pc:sldMk cId="3466089900" sldId="261"/>
+            <ac:cxnSpMk id="77" creationId="{2BB23030-5B90-6B60-0803-B5D1380F7B24}"/>
+          </ac:cxnSpMkLst>
+        </pc:cxnChg>
+        <pc:cxnChg chg="add mod">
+          <ac:chgData name="Yang Zhen SGH CDAY223" userId="58c6818a-3577-4ae3-8238-bcb4cc81b368" providerId="ADAL" clId="{BEBCD458-1472-443B-8616-221ED4FCAD17}" dt="2026-07-23T06:01:09.102" v="1761" actId="1037"/>
+          <ac:cxnSpMkLst>
+            <pc:docMk/>
+            <pc:sldMk cId="3466089900" sldId="261"/>
+            <ac:cxnSpMk id="78" creationId="{9D1644DF-6346-E32B-2171-B5E15086C3C8}"/>
+          </ac:cxnSpMkLst>
+        </pc:cxnChg>
+        <pc:cxnChg chg="add mod">
+          <ac:chgData name="Yang Zhen SGH CDAY223" userId="58c6818a-3577-4ae3-8238-bcb4cc81b368" providerId="ADAL" clId="{BEBCD458-1472-443B-8616-221ED4FCAD17}" dt="2026-07-23T06:02:01.218" v="1784" actId="14100"/>
+          <ac:cxnSpMkLst>
+            <pc:docMk/>
+            <pc:sldMk cId="3466089900" sldId="261"/>
+            <ac:cxnSpMk id="82" creationId="{8AF61131-0D6E-EC5E-4188-D2E0CC455C02}"/>
+          </ac:cxnSpMkLst>
+        </pc:cxnChg>
+      </pc:sldChg>
+      <pc:sldChg chg="addSp delSp modSp add mod">
+        <pc:chgData name="Yang Zhen SGH CDAY223" userId="58c6818a-3577-4ae3-8238-bcb4cc81b368" providerId="ADAL" clId="{BEBCD458-1472-443B-8616-221ED4FCAD17}" dt="2026-07-24T01:30:01.336" v="2300" actId="20577"/>
+        <pc:sldMkLst>
+          <pc:docMk/>
+          <pc:sldMk cId="797498013" sldId="262"/>
+        </pc:sldMkLst>
+        <pc:spChg chg="del mod">
+          <ac:chgData name="Yang Zhen SGH CDAY223" userId="58c6818a-3577-4ae3-8238-bcb4cc81b368" providerId="ADAL" clId="{BEBCD458-1472-443B-8616-221ED4FCAD17}" dt="2026-07-23T07:59:32.204" v="2189" actId="478"/>
+          <ac:spMkLst>
+            <pc:docMk/>
+            <pc:sldMk cId="797498013" sldId="262"/>
+            <ac:spMk id="30" creationId="{7FA0EEA0-AD43-E298-F888-86DEA72C17CB}"/>
           </ac:spMkLst>
         </pc:spChg>
         <pc:spChg chg="mod">
-          <ac:chgData name="Yang Zhen SGH CDAY223" userId="58c6818a-3577-4ae3-8238-bcb4cc81b368" providerId="ADAL" clId="{BEBCD458-1472-443B-8616-221ED4FCAD17}" dt="2026-03-10T08:04:03.226" v="448" actId="20577"/>
+          <ac:chgData name="Yang Zhen SGH CDAY223" userId="58c6818a-3577-4ae3-8238-bcb4cc81b368" providerId="ADAL" clId="{BEBCD458-1472-443B-8616-221ED4FCAD17}" dt="2026-07-23T07:59:39.242" v="2191" actId="1076"/>
           <ac:spMkLst>
             <pc:docMk/>
-            <pc:sldMk cId="1248162188" sldId="260"/>
-            <ac:spMk id="48" creationId="{F33462F3-3C88-20F0-79FB-4406EE1D6BA3}"/>
+            <pc:sldMk cId="797498013" sldId="262"/>
+            <ac:spMk id="34" creationId="{A6FF1DC2-9178-A76A-E278-BE627DCA8692}"/>
           </ac:spMkLst>
         </pc:spChg>
         <pc:spChg chg="mod">
-          <ac:chgData name="Yang Zhen SGH CDAY223" userId="58c6818a-3577-4ae3-8238-bcb4cc81b368" providerId="ADAL" clId="{BEBCD458-1472-443B-8616-221ED4FCAD17}" dt="2026-03-10T08:00:33.539" v="237" actId="20577"/>
+          <ac:chgData name="Yang Zhen SGH CDAY223" userId="58c6818a-3577-4ae3-8238-bcb4cc81b368" providerId="ADAL" clId="{BEBCD458-1472-443B-8616-221ED4FCAD17}" dt="2026-07-23T07:53:05.509" v="1867" actId="14100"/>
           <ac:spMkLst>
             <pc:docMk/>
-            <pc:sldMk cId="1248162188" sldId="260"/>
-            <ac:spMk id="49" creationId="{2B6C7DE8-6107-2F5A-1C71-782518EE70BA}"/>
+            <pc:sldMk cId="797498013" sldId="262"/>
+            <ac:spMk id="35" creationId="{3C18B90B-99A4-9B8D-CDEA-51E45EE5E2AF}"/>
           </ac:spMkLst>
         </pc:spChg>
         <pc:spChg chg="mod">
-          <ac:chgData name="Yang Zhen SGH CDAY223" userId="58c6818a-3577-4ae3-8238-bcb4cc81b368" providerId="ADAL" clId="{BEBCD458-1472-443B-8616-221ED4FCAD17}" dt="2026-03-10T08:04:35.720" v="482" actId="20577"/>
+          <ac:chgData name="Yang Zhen SGH CDAY223" userId="58c6818a-3577-4ae3-8238-bcb4cc81b368" providerId="ADAL" clId="{BEBCD458-1472-443B-8616-221ED4FCAD17}" dt="2026-07-23T07:53:34.367" v="1883" actId="1076"/>
           <ac:spMkLst>
             <pc:docMk/>
-            <pc:sldMk cId="1248162188" sldId="260"/>
-            <ac:spMk id="51" creationId="{E8C2FC40-430F-9236-955D-E883EAA8492C}"/>
+            <pc:sldMk cId="797498013" sldId="262"/>
+            <ac:spMk id="46" creationId="{63728767-3410-28F7-CB36-831D9DEC87CE}"/>
           </ac:spMkLst>
         </pc:spChg>
+        <pc:spChg chg="mod">
+          <ac:chgData name="Yang Zhen SGH CDAY223" userId="58c6818a-3577-4ae3-8238-bcb4cc81b368" providerId="ADAL" clId="{BEBCD458-1472-443B-8616-221ED4FCAD17}" dt="2026-07-23T07:53:29.059" v="1882" actId="1076"/>
+          <ac:spMkLst>
+            <pc:docMk/>
+            <pc:sldMk cId="797498013" sldId="262"/>
+            <ac:spMk id="47" creationId="{4BCC8D90-1A73-C5D1-C177-F08C45C72780}"/>
+          </ac:spMkLst>
+        </pc:spChg>
+        <pc:spChg chg="mod">
+          <ac:chgData name="Yang Zhen SGH CDAY223" userId="58c6818a-3577-4ae3-8238-bcb4cc81b368" providerId="ADAL" clId="{BEBCD458-1472-443B-8616-221ED4FCAD17}" dt="2026-07-24T01:30:01.336" v="2300" actId="20577"/>
+          <ac:spMkLst>
+            <pc:docMk/>
+            <pc:sldMk cId="797498013" sldId="262"/>
+            <ac:spMk id="49" creationId="{60CF9986-7874-5F79-015D-B0A2000939D5}"/>
+          </ac:spMkLst>
+        </pc:spChg>
+        <pc:spChg chg="del">
+          <ac:chgData name="Yang Zhen SGH CDAY223" userId="58c6818a-3577-4ae3-8238-bcb4cc81b368" providerId="ADAL" clId="{BEBCD458-1472-443B-8616-221ED4FCAD17}" dt="2026-07-23T07:59:33.211" v="2190" actId="478"/>
+          <ac:spMkLst>
+            <pc:docMk/>
+            <pc:sldMk cId="797498013" sldId="262"/>
+            <ac:spMk id="51" creationId="{656CBDF9-FA9E-1725-95C8-FFD7B5396E9F}"/>
+          </ac:spMkLst>
+        </pc:spChg>
+        <pc:spChg chg="mod">
+          <ac:chgData name="Yang Zhen SGH CDAY223" userId="58c6818a-3577-4ae3-8238-bcb4cc81b368" providerId="ADAL" clId="{BEBCD458-1472-443B-8616-221ED4FCAD17}" dt="2026-07-23T08:03:21.837" v="2192" actId="14100"/>
+          <ac:spMkLst>
+            <pc:docMk/>
+            <pc:sldMk cId="797498013" sldId="262"/>
+            <ac:spMk id="56" creationId="{4F0DEF16-81FA-A6D8-EBCC-B4A4D25E0779}"/>
+          </ac:spMkLst>
+        </pc:spChg>
+        <pc:spChg chg="add mod">
+          <ac:chgData name="Yang Zhen SGH CDAY223" userId="58c6818a-3577-4ae3-8238-bcb4cc81b368" providerId="ADAL" clId="{BEBCD458-1472-443B-8616-221ED4FCAD17}" dt="2026-07-24T01:28:17.241" v="2212"/>
+          <ac:spMkLst>
+            <pc:docMk/>
+            <pc:sldMk cId="797498013" sldId="262"/>
+            <ac:spMk id="57" creationId="{287D229E-3701-E755-0109-F8F5B574E105}"/>
+          </ac:spMkLst>
+        </pc:spChg>
+        <pc:spChg chg="add mod">
+          <ac:chgData name="Yang Zhen SGH CDAY223" userId="58c6818a-3577-4ae3-8238-bcb4cc81b368" providerId="ADAL" clId="{BEBCD458-1472-443B-8616-221ED4FCAD17}" dt="2026-07-24T01:28:37.702" v="2216" actId="20577"/>
+          <ac:spMkLst>
+            <pc:docMk/>
+            <pc:sldMk cId="797498013" sldId="262"/>
+            <ac:spMk id="64" creationId="{87D98079-3399-563B-D913-2952B24F5C07}"/>
+          </ac:spMkLst>
+        </pc:spChg>
+        <pc:cxnChg chg="mod">
+          <ac:chgData name="Yang Zhen SGH CDAY223" userId="58c6818a-3577-4ae3-8238-bcb4cc81b368" providerId="ADAL" clId="{BEBCD458-1472-443B-8616-221ED4FCAD17}" dt="2026-07-23T06:32:50.941" v="1845" actId="1076"/>
+          <ac:cxnSpMkLst>
+            <pc:docMk/>
+            <pc:sldMk cId="797498013" sldId="262"/>
+            <ac:cxnSpMk id="8" creationId="{30240FED-FF2E-435F-3E72-8253DA242F75}"/>
+          </ac:cxnSpMkLst>
+        </pc:cxnChg>
+        <pc:cxnChg chg="mod">
+          <ac:chgData name="Yang Zhen SGH CDAY223" userId="58c6818a-3577-4ae3-8238-bcb4cc81b368" providerId="ADAL" clId="{BEBCD458-1472-443B-8616-221ED4FCAD17}" dt="2026-07-23T08:25:08.790" v="2197" actId="14100"/>
+          <ac:cxnSpMkLst>
+            <pc:docMk/>
+            <pc:sldMk cId="797498013" sldId="262"/>
+            <ac:cxnSpMk id="50" creationId="{784F9162-0B12-4FA5-C976-50467F4EE5B0}"/>
+          </ac:cxnSpMkLst>
+        </pc:cxnChg>
+        <pc:cxnChg chg="mod">
+          <ac:chgData name="Yang Zhen SGH CDAY223" userId="58c6818a-3577-4ae3-8238-bcb4cc81b368" providerId="ADAL" clId="{BEBCD458-1472-443B-8616-221ED4FCAD17}" dt="2026-07-23T06:44:21.778" v="1849" actId="208"/>
+          <ac:cxnSpMkLst>
+            <pc:docMk/>
+            <pc:sldMk cId="797498013" sldId="262"/>
+            <ac:cxnSpMk id="59" creationId="{A21FB39A-90CD-1702-2D5F-A6AD759673D8}"/>
+          </ac:cxnSpMkLst>
+        </pc:cxnChg>
+        <pc:cxnChg chg="mod">
+          <ac:chgData name="Yang Zhen SGH CDAY223" userId="58c6818a-3577-4ae3-8238-bcb4cc81b368" providerId="ADAL" clId="{BEBCD458-1472-443B-8616-221ED4FCAD17}" dt="2026-07-23T06:27:19.265" v="1843" actId="14100"/>
+          <ac:cxnSpMkLst>
+            <pc:docMk/>
+            <pc:sldMk cId="797498013" sldId="262"/>
+            <ac:cxnSpMk id="66" creationId="{3D3486CD-939E-4139-F9E4-0073D5972DC2}"/>
+          </ac:cxnSpMkLst>
+        </pc:cxnChg>
+        <pc:cxnChg chg="add del mod">
+          <ac:chgData name="Yang Zhen SGH CDAY223" userId="58c6818a-3577-4ae3-8238-bcb4cc81b368" providerId="ADAL" clId="{BEBCD458-1472-443B-8616-221ED4FCAD17}" dt="2026-07-23T08:20:39.123" v="2196" actId="478"/>
+          <ac:cxnSpMkLst>
+            <pc:docMk/>
+            <pc:sldMk cId="797498013" sldId="262"/>
+            <ac:cxnSpMk id="67" creationId="{732CDF7D-CF3C-1C2A-FB6A-B88BFCB7DE27}"/>
+          </ac:cxnSpMkLst>
+        </pc:cxnChg>
       </pc:sldChg>
     </pc:docChg>
   </pc:docChgLst>
@@ -383,7 +752,7 @@
           <a:p>
             <a:fld id="{37581487-DED7-4908-9A01-0A45EDCB1D6C}" type="datetimeFigureOut">
               <a:rPr lang="de-DE" sz="1100"/>
-              <a:t>10.03.2026</a:t>
+              <a:t>24.07.2026</a:t>
             </a:fld>
             <a:endParaRPr lang="de-DE" sz="1100" dirty="0"/>
           </a:p>
@@ -1090,7 +1459,7 @@
             <a:fld id="{CE326E1C-6104-4B1D-A0DF-E3388A3C354E}" type="datetimeFigureOut">
               <a:rPr lang="de-DE" smtClean="0"/>
               <a:pPr/>
-              <a:t>10.03.2026</a:t>
+              <a:t>24.07.2026</a:t>
             </a:fld>
             <a:endParaRPr lang="de-DE" dirty="0"/>
           </a:p>
@@ -1111,13 +1480,13 @@
           <p:nvPr userDrawn="1"/>
         </p:nvPicPr>
         <p:blipFill rotWithShape="1">
-          <a:blip r:embed="rId3" cstate="print">
+          <a:blip cstate="print">
             <a:extLst>
               <a:ext uri="{28A0092B-C50C-407E-A947-70E740481C1C}">
                 <a14:useLocalDpi xmlns:a14="http://schemas.microsoft.com/office/drawing/2010/main" val="0"/>
               </a:ext>
               <a:ext uri="{96DAC541-7B7A-43D3-8B79-37D633B846F1}">
-                <asvg:svgBlip xmlns:asvg="http://schemas.microsoft.com/office/drawing/2016/SVG/main" r:embed="rId4"/>
+                <asvg:svgBlip xmlns:asvg="http://schemas.microsoft.com/office/drawing/2016/SVG/main" r:embed="rId3"/>
               </a:ext>
             </a:extLst>
           </a:blip>
@@ -4194,10 +4563,10 @@
             <a:ext cx="864000" cy="864267"/>
           </a:xfrm>
           <a:blipFill>
-            <a:blip r:embed="rId4">
+            <a:blip>
               <a:extLst>
                 <a:ext uri="{96DAC541-7B7A-43D3-8B79-37D633B846F1}">
-                  <asvg:svgBlip xmlns:asvg="http://schemas.microsoft.com/office/drawing/2016/SVG/main" r:embed="rId5"/>
+                  <asvg:svgBlip xmlns:asvg="http://schemas.microsoft.com/office/drawing/2016/SVG/main" r:embed="rId4"/>
                 </a:ext>
               </a:extLst>
             </a:blip>
@@ -9315,13 +9684,13 @@
           <p:nvPr userDrawn="1"/>
         </p:nvPicPr>
         <p:blipFill rotWithShape="1">
-          <a:blip r:embed="rId2" cstate="print">
+          <a:blip cstate="print">
             <a:extLst>
               <a:ext uri="{28A0092B-C50C-407E-A947-70E740481C1C}">
                 <a14:useLocalDpi xmlns:a14="http://schemas.microsoft.com/office/drawing/2010/main" val="0"/>
               </a:ext>
               <a:ext uri="{96DAC541-7B7A-43D3-8B79-37D633B846F1}">
-                <asvg:svgBlip xmlns:asvg="http://schemas.microsoft.com/office/drawing/2016/SVG/main" r:embed="rId3"/>
+                <asvg:svgBlip xmlns:asvg="http://schemas.microsoft.com/office/drawing/2016/SVG/main" r:embed="rId2"/>
               </a:ext>
             </a:extLst>
           </a:blip>
@@ -9545,13 +9914,13 @@
           <p:nvPr userDrawn="1"/>
         </p:nvPicPr>
         <p:blipFill rotWithShape="1">
-          <a:blip r:embed="rId2" cstate="print">
+          <a:blip cstate="print">
             <a:extLst>
               <a:ext uri="{28A0092B-C50C-407E-A947-70E740481C1C}">
                 <a14:useLocalDpi xmlns:a14="http://schemas.microsoft.com/office/drawing/2010/main" val="0"/>
               </a:ext>
               <a:ext uri="{96DAC541-7B7A-43D3-8B79-37D633B846F1}">
-                <asvg:svgBlip xmlns:asvg="http://schemas.microsoft.com/office/drawing/2016/SVG/main" r:embed="rId3"/>
+                <asvg:svgBlip xmlns:asvg="http://schemas.microsoft.com/office/drawing/2016/SVG/main" r:embed="rId2"/>
               </a:ext>
             </a:extLst>
           </a:blip>
@@ -10026,7 +10395,7 @@
             <a:fld id="{CE326E1C-6104-4B1D-A0DF-E3388A3C354E}" type="datetimeFigureOut">
               <a:rPr lang="de-DE" smtClean="0"/>
               <a:pPr/>
-              <a:t>10.03.2026</a:t>
+              <a:t>24.07.2026</a:t>
             </a:fld>
             <a:endParaRPr lang="de-DE" dirty="0"/>
           </a:p>
@@ -10347,13 +10716,13 @@
           <p:nvPr userDrawn="1"/>
         </p:nvPicPr>
         <p:blipFill rotWithShape="1">
-          <a:blip r:embed="rId37" cstate="print">
+          <a:blip cstate="print">
             <a:extLst>
               <a:ext uri="{28A0092B-C50C-407E-A947-70E740481C1C}">
                 <a14:useLocalDpi xmlns:a14="http://schemas.microsoft.com/office/drawing/2010/main" val="0"/>
               </a:ext>
               <a:ext uri="{96DAC541-7B7A-43D3-8B79-37D633B846F1}">
-                <asvg:svgBlip xmlns:asvg="http://schemas.microsoft.com/office/drawing/2016/SVG/main" r:embed="rId38"/>
+                <asvg:svgBlip xmlns:asvg="http://schemas.microsoft.com/office/drawing/2016/SVG/main" r:embed="rId37"/>
               </a:ext>
             </a:extLst>
           </a:blip>
@@ -18973,6 +19342,7665 @@
     <p:extLst>
       <p:ext uri="{BB962C8B-B14F-4D97-AF65-F5344CB8AC3E}">
         <p14:creationId xmlns:p14="http://schemas.microsoft.com/office/powerpoint/2010/main" val="1248162188"/>
+      </p:ext>
+    </p:extLst>
+  </p:cSld>
+  <p:clrMapOvr>
+    <a:masterClrMapping/>
+  </p:clrMapOvr>
+</p:sld>
+</file>
+
+<file path=ppt/slides/slide5.xml><?xml version="1.0" encoding="utf-8"?>
+<p:sld xmlns:a="http://schemas.openxmlformats.org/drawingml/2006/main" xmlns:r="http://schemas.openxmlformats.org/officeDocument/2006/relationships" xmlns:p="http://schemas.openxmlformats.org/presentationml/2006/main">
+  <p:cSld>
+    <p:spTree>
+      <p:nvGrpSpPr>
+        <p:cNvPr id="1" name="">
+          <a:extLst>
+            <a:ext uri="{FF2B5EF4-FFF2-40B4-BE49-F238E27FC236}">
+              <a16:creationId xmlns:a16="http://schemas.microsoft.com/office/drawing/2014/main" id="{27CC2B8B-370F-4F1B-06AD-A220D2432E88}"/>
+            </a:ext>
+          </a:extLst>
+        </p:cNvPr>
+        <p:cNvGrpSpPr/>
+        <p:nvPr/>
+      </p:nvGrpSpPr>
+      <p:grpSpPr>
+        <a:xfrm>
+          <a:off x="0" y="0"/>
+          <a:ext cx="0" cy="0"/>
+          <a:chOff x="0" y="0"/>
+          <a:chExt cx="0" cy="0"/>
+        </a:xfrm>
+      </p:grpSpPr>
+      <p:sp>
+        <p:nvSpPr>
+          <p:cNvPr id="56" name="矩形 55">
+            <a:extLst>
+              <a:ext uri="{FF2B5EF4-FFF2-40B4-BE49-F238E27FC236}">
+                <a16:creationId xmlns:a16="http://schemas.microsoft.com/office/drawing/2014/main" id="{C0FFF644-CB7F-A6C8-12E1-91BD31BAA89F}"/>
+              </a:ext>
+            </a:extLst>
+          </p:cNvPr>
+          <p:cNvSpPr/>
+          <p:nvPr/>
+        </p:nvSpPr>
+        <p:spPr>
+          <a:xfrm>
+            <a:off x="2869874" y="1010313"/>
+            <a:ext cx="2785749" cy="1493981"/>
+          </a:xfrm>
+          <a:prstGeom prst="rect">
+            <a:avLst/>
+          </a:prstGeom>
+          <a:solidFill>
+            <a:srgbClr val="FF0000">
+              <a:alpha val="34118"/>
+            </a:srgbClr>
+          </a:solidFill>
+          <a:ln w="12700" cap="flat" cmpd="sng" algn="ctr">
+            <a:noFill/>
+            <a:prstDash val="solid"/>
+          </a:ln>
+          <a:effectLst/>
+        </p:spPr>
+        <p:txBody>
+          <a:bodyPr rot="0" spcFirstLastPara="0" vertOverflow="overflow" horzOverflow="overflow" vert="horz" wrap="square" lIns="90000" tIns="90000" rIns="90000" bIns="90000" numCol="1" spcCol="0" rtlCol="0" fromWordArt="0" anchor="ctr" anchorCtr="0" forceAA="0" compatLnSpc="1">
+            <a:prstTxWarp prst="textNoShape">
+              <a:avLst/>
+            </a:prstTxWarp>
+            <a:noAutofit/>
+          </a:bodyPr>
+          <a:lstStyle/>
+          <a:p>
+            <a:pPr marL="0" marR="0" indent="0" algn="ctr" defTabSz="914400" eaLnBrk="1" fontAlgn="base" latinLnBrk="0" hangingPunct="1">
+              <a:lnSpc>
+                <a:spcPct val="100000"/>
+              </a:lnSpc>
+              <a:spcBef>
+                <a:spcPts val="0"/>
+              </a:spcBef>
+              <a:spcAft>
+                <a:spcPct val="0"/>
+              </a:spcAft>
+              <a:buClrTx/>
+              <a:buSzTx/>
+              <a:buFontTx/>
+              <a:buNone/>
+              <a:tabLst/>
+            </a:pPr>
+            <a:endParaRPr kumimoji="0" lang="zh-CN" altLang="en-US" sz="1200" b="0" i="0" u="none" strike="noStrike" kern="0" cap="none" spc="0" normalizeH="0" baseline="0" noProof="0" dirty="0" err="1">
+              <a:ln>
+                <a:noFill/>
+              </a:ln>
+              <a:effectLst/>
+              <a:uLnTx/>
+              <a:uFillTx/>
+              <a:latin typeface="Tahoma"/>
+              <a:ea typeface="+mn-ea"/>
+              <a:cs typeface="Tahoma" pitchFamily="34" charset="0"/>
+            </a:endParaRPr>
+          </a:p>
+        </p:txBody>
+      </p:sp>
+      <p:sp>
+        <p:nvSpPr>
+          <p:cNvPr id="53" name="矩形 52">
+            <a:extLst>
+              <a:ext uri="{FF2B5EF4-FFF2-40B4-BE49-F238E27FC236}">
+                <a16:creationId xmlns:a16="http://schemas.microsoft.com/office/drawing/2014/main" id="{2E757C8D-F8C6-C384-281F-4793CE0C6908}"/>
+              </a:ext>
+            </a:extLst>
+          </p:cNvPr>
+          <p:cNvSpPr/>
+          <p:nvPr/>
+        </p:nvSpPr>
+        <p:spPr>
+          <a:xfrm>
+            <a:off x="568411" y="1010313"/>
+            <a:ext cx="2272648" cy="1491923"/>
+          </a:xfrm>
+          <a:prstGeom prst="rect">
+            <a:avLst/>
+          </a:prstGeom>
+          <a:solidFill>
+            <a:srgbClr val="FF0000">
+              <a:alpha val="34118"/>
+            </a:srgbClr>
+          </a:solidFill>
+          <a:ln w="12700" cap="flat" cmpd="sng" algn="ctr">
+            <a:noFill/>
+            <a:prstDash val="solid"/>
+          </a:ln>
+          <a:effectLst/>
+        </p:spPr>
+        <p:txBody>
+          <a:bodyPr rot="0" spcFirstLastPara="0" vertOverflow="overflow" horzOverflow="overflow" vert="horz" wrap="square" lIns="90000" tIns="90000" rIns="90000" bIns="90000" numCol="1" spcCol="0" rtlCol="0" fromWordArt="0" anchor="ctr" anchorCtr="0" forceAA="0" compatLnSpc="1">
+            <a:prstTxWarp prst="textNoShape">
+              <a:avLst/>
+            </a:prstTxWarp>
+            <a:noAutofit/>
+          </a:bodyPr>
+          <a:lstStyle/>
+          <a:p>
+            <a:pPr marL="0" marR="0" indent="0" algn="ctr" defTabSz="914400" eaLnBrk="1" fontAlgn="base" latinLnBrk="0" hangingPunct="1">
+              <a:lnSpc>
+                <a:spcPct val="100000"/>
+              </a:lnSpc>
+              <a:spcBef>
+                <a:spcPts val="0"/>
+              </a:spcBef>
+              <a:spcAft>
+                <a:spcPct val="0"/>
+              </a:spcAft>
+              <a:buClrTx/>
+              <a:buSzTx/>
+              <a:buFontTx/>
+              <a:buNone/>
+              <a:tabLst/>
+            </a:pPr>
+            <a:endParaRPr kumimoji="0" lang="zh-CN" altLang="en-US" sz="1200" b="0" i="0" u="none" strike="noStrike" kern="0" cap="none" spc="0" normalizeH="0" baseline="0" noProof="0" dirty="0" err="1">
+              <a:ln>
+                <a:noFill/>
+              </a:ln>
+              <a:effectLst/>
+              <a:uLnTx/>
+              <a:uFillTx/>
+              <a:latin typeface="Tahoma"/>
+              <a:ea typeface="+mn-ea"/>
+              <a:cs typeface="Tahoma" pitchFamily="34" charset="0"/>
+            </a:endParaRPr>
+          </a:p>
+        </p:txBody>
+      </p:sp>
+      <p:sp>
+        <p:nvSpPr>
+          <p:cNvPr id="68" name="任意多边形: 形状 67">
+            <a:extLst>
+              <a:ext uri="{FF2B5EF4-FFF2-40B4-BE49-F238E27FC236}">
+                <a16:creationId xmlns:a16="http://schemas.microsoft.com/office/drawing/2014/main" id="{37073895-C328-AD2B-CBEB-F879562F66FF}"/>
+              </a:ext>
+            </a:extLst>
+          </p:cNvPr>
+          <p:cNvSpPr/>
+          <p:nvPr/>
+        </p:nvSpPr>
+        <p:spPr>
+          <a:xfrm>
+            <a:off x="6048103" y="993934"/>
+            <a:ext cx="248194" cy="1514136"/>
+          </a:xfrm>
+          <a:custGeom>
+            <a:avLst/>
+            <a:gdLst>
+              <a:gd name="csX0" fmla="*/ 0 w 248194"/>
+              <a:gd name="csY0" fmla="*/ 1449977 h 1456509"/>
+              <a:gd name="csX1" fmla="*/ 248194 w 248194"/>
+              <a:gd name="csY1" fmla="*/ 1456509 h 1456509"/>
+              <a:gd name="csX2" fmla="*/ 248194 w 248194"/>
+              <a:gd name="csY2" fmla="*/ 0 h 1456509"/>
+              <a:gd name="csX3" fmla="*/ 0 w 248194"/>
+              <a:gd name="csY3" fmla="*/ 1449977 h 1456509"/>
+            </a:gdLst>
+            <a:ahLst/>
+            <a:cxnLst>
+              <a:cxn ang="0">
+                <a:pos x="csX0" y="csY0"/>
+              </a:cxn>
+              <a:cxn ang="0">
+                <a:pos x="csX1" y="csY1"/>
+              </a:cxn>
+              <a:cxn ang="0">
+                <a:pos x="csX2" y="csY2"/>
+              </a:cxn>
+              <a:cxn ang="0">
+                <a:pos x="csX3" y="csY3"/>
+              </a:cxn>
+            </a:cxnLst>
+            <a:rect l="l" t="t" r="r" b="b"/>
+            <a:pathLst>
+              <a:path w="248194" h="1456509">
+                <a:moveTo>
+                  <a:pt x="0" y="1449977"/>
+                </a:moveTo>
+                <a:lnTo>
+                  <a:pt x="248194" y="1456509"/>
+                </a:lnTo>
+                <a:lnTo>
+                  <a:pt x="248194" y="0"/>
+                </a:lnTo>
+                <a:lnTo>
+                  <a:pt x="0" y="1449977"/>
+                </a:lnTo>
+                <a:close/>
+              </a:path>
+            </a:pathLst>
+          </a:custGeom>
+          <a:solidFill>
+            <a:srgbClr val="FFA8A8">
+              <a:alpha val="36078"/>
+            </a:srgbClr>
+          </a:solidFill>
+          <a:ln w="12700" cap="flat" cmpd="sng" algn="ctr">
+            <a:noFill/>
+            <a:prstDash val="solid"/>
+          </a:ln>
+          <a:effectLst/>
+        </p:spPr>
+        <p:txBody>
+          <a:bodyPr rot="0" spcFirstLastPara="0" vertOverflow="overflow" horzOverflow="overflow" vert="horz" wrap="square" lIns="90000" tIns="90000" rIns="90000" bIns="90000" numCol="1" spcCol="0" rtlCol="0" fromWordArt="0" anchor="ctr" anchorCtr="0" forceAA="0" compatLnSpc="1">
+            <a:prstTxWarp prst="textNoShape">
+              <a:avLst/>
+            </a:prstTxWarp>
+            <a:noAutofit/>
+          </a:bodyPr>
+          <a:lstStyle/>
+          <a:p>
+            <a:pPr marL="0" marR="0" indent="0" algn="ctr" defTabSz="914400" eaLnBrk="1" fontAlgn="base" latinLnBrk="0" hangingPunct="1">
+              <a:lnSpc>
+                <a:spcPct val="100000"/>
+              </a:lnSpc>
+              <a:spcBef>
+                <a:spcPts val="0"/>
+              </a:spcBef>
+              <a:spcAft>
+                <a:spcPct val="0"/>
+              </a:spcAft>
+              <a:buClrTx/>
+              <a:buSzTx/>
+              <a:buFontTx/>
+              <a:buNone/>
+              <a:tabLst/>
+            </a:pPr>
+            <a:endParaRPr kumimoji="0" lang="zh-CN" altLang="en-US" sz="1200" b="0" i="0" u="none" strike="noStrike" kern="0" cap="none" spc="0" normalizeH="0" baseline="0" noProof="0" dirty="0" err="1">
+              <a:ln>
+                <a:noFill/>
+              </a:ln>
+              <a:effectLst/>
+              <a:uLnTx/>
+              <a:uFillTx/>
+              <a:latin typeface="Tahoma"/>
+              <a:ea typeface="+mn-ea"/>
+              <a:cs typeface="Tahoma" pitchFamily="34" charset="0"/>
+            </a:endParaRPr>
+          </a:p>
+        </p:txBody>
+      </p:sp>
+      <p:sp>
+        <p:nvSpPr>
+          <p:cNvPr id="2" name="Titel 1">
+            <a:extLst>
+              <a:ext uri="{FF2B5EF4-FFF2-40B4-BE49-F238E27FC236}">
+                <a16:creationId xmlns:a16="http://schemas.microsoft.com/office/drawing/2014/main" id="{BE096441-6592-D45E-462F-44295B498786}"/>
+              </a:ext>
+            </a:extLst>
+          </p:cNvPr>
+          <p:cNvSpPr>
+            <a:spLocks noGrp="1"/>
+          </p:cNvSpPr>
+          <p:nvPr>
+            <p:ph type="title"/>
+          </p:nvPr>
+        </p:nvSpPr>
+        <p:spPr/>
+        <p:txBody>
+          <a:bodyPr/>
+          <a:lstStyle/>
+          <a:p>
+            <a:r>
+              <a:rPr lang="de-DE" dirty="0"/>
+              <a:t>normal CST Scenario</a:t>
+            </a:r>
+          </a:p>
+        </p:txBody>
+      </p:sp>
+      <p:sp>
+        <p:nvSpPr>
+          <p:cNvPr id="3" name="Fußzeilenplatzhalter 2">
+            <a:extLst>
+              <a:ext uri="{FF2B5EF4-FFF2-40B4-BE49-F238E27FC236}">
+                <a16:creationId xmlns:a16="http://schemas.microsoft.com/office/drawing/2014/main" id="{F1BBCB0C-0F08-2EE2-C3A8-D5951E2BB80A}"/>
+              </a:ext>
+            </a:extLst>
+          </p:cNvPr>
+          <p:cNvSpPr>
+            <a:spLocks noGrp="1"/>
+          </p:cNvSpPr>
+          <p:nvPr>
+            <p:ph type="ftr" sz="quarter" idx="11"/>
+          </p:nvPr>
+        </p:nvSpPr>
+        <p:spPr/>
+        <p:txBody>
+          <a:bodyPr/>
+          <a:lstStyle/>
+          <a:p>
+            <a:endParaRPr lang="de-DE" dirty="0"/>
+          </a:p>
+        </p:txBody>
+      </p:sp>
+      <p:sp>
+        <p:nvSpPr>
+          <p:cNvPr id="4" name="Foliennummernplatzhalter 3">
+            <a:extLst>
+              <a:ext uri="{FF2B5EF4-FFF2-40B4-BE49-F238E27FC236}">
+                <a16:creationId xmlns:a16="http://schemas.microsoft.com/office/drawing/2014/main" id="{85B0C714-0A40-F4AA-290F-AC5A28EE3151}"/>
+              </a:ext>
+            </a:extLst>
+          </p:cNvPr>
+          <p:cNvSpPr>
+            <a:spLocks noGrp="1"/>
+          </p:cNvSpPr>
+          <p:nvPr>
+            <p:ph type="sldNum" sz="quarter" idx="12"/>
+          </p:nvPr>
+        </p:nvSpPr>
+        <p:spPr/>
+        <p:txBody>
+          <a:bodyPr/>
+          <a:lstStyle/>
+          <a:p>
+            <a:fld id="{AE839375-43AA-4A5D-B991-4343C4570BCB}" type="slidenum">
+              <a:rPr lang="de-DE" smtClean="0"/>
+              <a:t>5</a:t>
+            </a:fld>
+            <a:endParaRPr lang="de-DE" dirty="0"/>
+          </a:p>
+        </p:txBody>
+      </p:sp>
+      <p:cxnSp>
+        <p:nvCxnSpPr>
+          <p:cNvPr id="6" name="Gerader Verbinder 5">
+            <a:extLst>
+              <a:ext uri="{FF2B5EF4-FFF2-40B4-BE49-F238E27FC236}">
+                <a16:creationId xmlns:a16="http://schemas.microsoft.com/office/drawing/2014/main" id="{53B7331A-19B1-946C-FDAC-B942D470B490}"/>
+              </a:ext>
+            </a:extLst>
+          </p:cNvPr>
+          <p:cNvCxnSpPr>
+            <a:cxnSpLocks/>
+          </p:cNvCxnSpPr>
+          <p:nvPr/>
+        </p:nvCxnSpPr>
+        <p:spPr>
+          <a:xfrm>
+            <a:off x="568411" y="753761"/>
+            <a:ext cx="0" cy="1760838"/>
+          </a:xfrm>
+          <a:prstGeom prst="line">
+            <a:avLst/>
+          </a:prstGeom>
+          <a:noFill/>
+          <a:ln w="6350" cap="rnd" cmpd="sng" algn="ctr">
+            <a:solidFill>
+              <a:schemeClr val="bg2"/>
+            </a:solidFill>
+            <a:prstDash val="solid"/>
+            <a:round/>
+            <a:headEnd type="triangle" w="med" len="med"/>
+            <a:tailEnd type="none" w="med" len="med"/>
+          </a:ln>
+          <a:effectLst/>
+        </p:spPr>
+      </p:cxnSp>
+      <p:cxnSp>
+        <p:nvCxnSpPr>
+          <p:cNvPr id="7" name="Gerader Verbinder 6">
+            <a:extLst>
+              <a:ext uri="{FF2B5EF4-FFF2-40B4-BE49-F238E27FC236}">
+                <a16:creationId xmlns:a16="http://schemas.microsoft.com/office/drawing/2014/main" id="{D4103BC7-0C0B-0EA9-7810-4A87EB89C657}"/>
+              </a:ext>
+            </a:extLst>
+          </p:cNvPr>
+          <p:cNvCxnSpPr>
+            <a:cxnSpLocks/>
+          </p:cNvCxnSpPr>
+          <p:nvPr/>
+        </p:nvCxnSpPr>
+        <p:spPr>
+          <a:xfrm flipH="1">
+            <a:off x="568411" y="2508417"/>
+            <a:ext cx="7963930" cy="0"/>
+          </a:xfrm>
+          <a:prstGeom prst="line">
+            <a:avLst/>
+          </a:prstGeom>
+          <a:noFill/>
+          <a:ln w="6350" cap="rnd" cmpd="sng" algn="ctr">
+            <a:solidFill>
+              <a:schemeClr val="bg2"/>
+            </a:solidFill>
+            <a:prstDash val="solid"/>
+            <a:round/>
+            <a:headEnd type="triangle" w="med" len="med"/>
+            <a:tailEnd type="none" w="med" len="med"/>
+          </a:ln>
+          <a:effectLst/>
+        </p:spPr>
+      </p:cxnSp>
+      <p:sp>
+        <p:nvSpPr>
+          <p:cNvPr id="11" name="Textfeld 10">
+            <a:extLst>
+              <a:ext uri="{FF2B5EF4-FFF2-40B4-BE49-F238E27FC236}">
+                <a16:creationId xmlns:a16="http://schemas.microsoft.com/office/drawing/2014/main" id="{0BCD895D-D44A-A9B4-F145-0FC41E02AAD5}"/>
+              </a:ext>
+            </a:extLst>
+          </p:cNvPr>
+          <p:cNvSpPr txBox="1"/>
+          <p:nvPr/>
+        </p:nvSpPr>
+        <p:spPr>
+          <a:xfrm rot="16200000">
+            <a:off x="208235" y="1752342"/>
+            <a:ext cx="307777" cy="184666"/>
+          </a:xfrm>
+          <a:prstGeom prst="rect">
+            <a:avLst/>
+          </a:prstGeom>
+          <a:noFill/>
+        </p:spPr>
+        <p:txBody>
+          <a:bodyPr wrap="none" lIns="0" tIns="0" rIns="0" bIns="0" rtlCol="0">
+            <a:spAutoFit/>
+          </a:bodyPr>
+          <a:lstStyle/>
+          <a:p>
+            <a:pPr marL="0" marR="0" indent="0" defTabSz="914400" eaLnBrk="1" fontAlgn="base" latinLnBrk="0" hangingPunct="1">
+              <a:lnSpc>
+                <a:spcPct val="100000"/>
+              </a:lnSpc>
+              <a:spcBef>
+                <a:spcPts val="0"/>
+              </a:spcBef>
+              <a:spcAft>
+                <a:spcPct val="0"/>
+              </a:spcAft>
+              <a:buClrTx/>
+              <a:buSzTx/>
+              <a:buFontTx/>
+              <a:buNone/>
+              <a:tabLst/>
+            </a:pPr>
+            <a:r>
+              <a:rPr lang="zh-CN" altLang="en-US" sz="1200" kern="0" dirty="0">
+                <a:solidFill>
+                  <a:srgbClr val="000000"/>
+                </a:solidFill>
+              </a:rPr>
+              <a:t>扭矩</a:t>
+            </a:r>
+            <a:endParaRPr kumimoji="0" lang="de-DE" sz="1200" b="0" i="0" u="none" strike="noStrike" kern="0" cap="none" spc="0" normalizeH="0" baseline="0" noProof="0" dirty="0">
+              <a:ln>
+                <a:noFill/>
+              </a:ln>
+              <a:solidFill>
+                <a:srgbClr val="000000"/>
+              </a:solidFill>
+              <a:effectLst/>
+              <a:uLnTx/>
+              <a:uFillTx/>
+            </a:endParaRPr>
+          </a:p>
+        </p:txBody>
+      </p:sp>
+      <p:sp>
+        <p:nvSpPr>
+          <p:cNvPr id="12" name="Textfeld 11">
+            <a:extLst>
+              <a:ext uri="{FF2B5EF4-FFF2-40B4-BE49-F238E27FC236}">
+                <a16:creationId xmlns:a16="http://schemas.microsoft.com/office/drawing/2014/main" id="{A9A6034B-B812-183A-8BB5-FF4EB4FC0A9B}"/>
+              </a:ext>
+            </a:extLst>
+          </p:cNvPr>
+          <p:cNvSpPr txBox="1"/>
+          <p:nvPr/>
+        </p:nvSpPr>
+        <p:spPr>
+          <a:xfrm>
+            <a:off x="3884328" y="4631724"/>
+            <a:ext cx="298159" cy="184666"/>
+          </a:xfrm>
+          <a:prstGeom prst="rect">
+            <a:avLst/>
+          </a:prstGeom>
+          <a:noFill/>
+        </p:spPr>
+        <p:txBody>
+          <a:bodyPr wrap="none" lIns="0" tIns="0" rIns="0" bIns="0" rtlCol="0">
+            <a:spAutoFit/>
+          </a:bodyPr>
+          <a:lstStyle/>
+          <a:p>
+            <a:pPr marL="0" marR="0" indent="0" defTabSz="914400" eaLnBrk="1" fontAlgn="base" latinLnBrk="0" hangingPunct="1">
+              <a:lnSpc>
+                <a:spcPct val="100000"/>
+              </a:lnSpc>
+              <a:spcBef>
+                <a:spcPts val="0"/>
+              </a:spcBef>
+              <a:spcAft>
+                <a:spcPct val="0"/>
+              </a:spcAft>
+              <a:buClrTx/>
+              <a:buSzTx/>
+              <a:buFontTx/>
+              <a:buNone/>
+              <a:tabLst/>
+            </a:pPr>
+            <a:r>
+              <a:rPr lang="de-DE" sz="1200" kern="0" dirty="0">
+                <a:solidFill>
+                  <a:srgbClr val="000000"/>
+                </a:solidFill>
+              </a:rPr>
+              <a:t>time</a:t>
+            </a:r>
+            <a:endParaRPr kumimoji="0" lang="de-DE" sz="1200" b="0" i="0" u="none" strike="noStrike" kern="0" cap="none" spc="0" normalizeH="0" baseline="0" noProof="0" dirty="0">
+              <a:ln>
+                <a:noFill/>
+              </a:ln>
+              <a:solidFill>
+                <a:srgbClr val="000000"/>
+              </a:solidFill>
+              <a:effectLst/>
+              <a:uLnTx/>
+              <a:uFillTx/>
+            </a:endParaRPr>
+          </a:p>
+        </p:txBody>
+      </p:sp>
+      <p:cxnSp>
+        <p:nvCxnSpPr>
+          <p:cNvPr id="14" name="Gerader Verbinder 13">
+            <a:extLst>
+              <a:ext uri="{FF2B5EF4-FFF2-40B4-BE49-F238E27FC236}">
+                <a16:creationId xmlns:a16="http://schemas.microsoft.com/office/drawing/2014/main" id="{281F298B-D0AA-C4B5-0782-F7F4D6D3BB7B}"/>
+              </a:ext>
+            </a:extLst>
+          </p:cNvPr>
+          <p:cNvCxnSpPr>
+            <a:cxnSpLocks/>
+          </p:cNvCxnSpPr>
+          <p:nvPr/>
+        </p:nvCxnSpPr>
+        <p:spPr>
+          <a:xfrm flipH="1">
+            <a:off x="2842053" y="753761"/>
+            <a:ext cx="7997" cy="3855309"/>
+          </a:xfrm>
+          <a:prstGeom prst="line">
+            <a:avLst/>
+          </a:prstGeom>
+          <a:noFill/>
+          <a:ln w="6350" cap="rnd" cmpd="sng" algn="ctr">
+            <a:solidFill>
+              <a:schemeClr val="bg2"/>
+            </a:solidFill>
+            <a:prstDash val="lgDash"/>
+            <a:round/>
+          </a:ln>
+          <a:effectLst/>
+        </p:spPr>
+      </p:cxnSp>
+      <p:cxnSp>
+        <p:nvCxnSpPr>
+          <p:cNvPr id="15" name="Gerader Verbinder 14">
+            <a:extLst>
+              <a:ext uri="{FF2B5EF4-FFF2-40B4-BE49-F238E27FC236}">
+                <a16:creationId xmlns:a16="http://schemas.microsoft.com/office/drawing/2014/main" id="{A0B702AA-7CED-DD25-21C7-8505DD58DFAC}"/>
+              </a:ext>
+            </a:extLst>
+          </p:cNvPr>
+          <p:cNvCxnSpPr>
+            <a:cxnSpLocks/>
+          </p:cNvCxnSpPr>
+          <p:nvPr/>
+        </p:nvCxnSpPr>
+        <p:spPr>
+          <a:xfrm>
+            <a:off x="5823119" y="675354"/>
+            <a:ext cx="4" cy="3939895"/>
+          </a:xfrm>
+          <a:prstGeom prst="line">
+            <a:avLst/>
+          </a:prstGeom>
+          <a:noFill/>
+          <a:ln w="6350" cap="rnd" cmpd="sng" algn="ctr">
+            <a:solidFill>
+              <a:schemeClr val="bg2"/>
+            </a:solidFill>
+            <a:prstDash val="lgDash"/>
+            <a:round/>
+          </a:ln>
+          <a:effectLst/>
+        </p:spPr>
+      </p:cxnSp>
+      <p:cxnSp>
+        <p:nvCxnSpPr>
+          <p:cNvPr id="17" name="Gerader Verbinder 16">
+            <a:extLst>
+              <a:ext uri="{FF2B5EF4-FFF2-40B4-BE49-F238E27FC236}">
+                <a16:creationId xmlns:a16="http://schemas.microsoft.com/office/drawing/2014/main" id="{369D29E1-AF89-57D5-1477-EF7662E2CB17}"/>
+              </a:ext>
+            </a:extLst>
+          </p:cNvPr>
+          <p:cNvCxnSpPr>
+            <a:cxnSpLocks/>
+          </p:cNvCxnSpPr>
+          <p:nvPr/>
+        </p:nvCxnSpPr>
+        <p:spPr>
+          <a:xfrm>
+            <a:off x="568411" y="4046152"/>
+            <a:ext cx="0" cy="581451"/>
+          </a:xfrm>
+          <a:prstGeom prst="line">
+            <a:avLst/>
+          </a:prstGeom>
+          <a:noFill/>
+          <a:ln w="6350" cap="rnd" cmpd="sng" algn="ctr">
+            <a:solidFill>
+              <a:schemeClr val="bg2"/>
+            </a:solidFill>
+            <a:prstDash val="solid"/>
+            <a:round/>
+            <a:headEnd type="triangle" w="med" len="med"/>
+            <a:tailEnd type="none" w="med" len="med"/>
+          </a:ln>
+          <a:effectLst/>
+        </p:spPr>
+      </p:cxnSp>
+      <p:sp>
+        <p:nvSpPr>
+          <p:cNvPr id="18" name="Textfeld 17">
+            <a:extLst>
+              <a:ext uri="{FF2B5EF4-FFF2-40B4-BE49-F238E27FC236}">
+                <a16:creationId xmlns:a16="http://schemas.microsoft.com/office/drawing/2014/main" id="{5D1C4C24-2FF5-C11D-576A-0CDCA18D241C}"/>
+              </a:ext>
+            </a:extLst>
+          </p:cNvPr>
+          <p:cNvSpPr txBox="1"/>
+          <p:nvPr/>
+        </p:nvSpPr>
+        <p:spPr>
+          <a:xfrm rot="16200000">
+            <a:off x="-101994" y="4155144"/>
+            <a:ext cx="923330" cy="184666"/>
+          </a:xfrm>
+          <a:prstGeom prst="rect">
+            <a:avLst/>
+          </a:prstGeom>
+          <a:noFill/>
+        </p:spPr>
+        <p:txBody>
+          <a:bodyPr wrap="none" lIns="0" tIns="0" rIns="0" bIns="0" rtlCol="0">
+            <a:spAutoFit/>
+          </a:bodyPr>
+          <a:lstStyle/>
+          <a:p>
+            <a:pPr marL="0" marR="0" indent="0" defTabSz="914400" eaLnBrk="1" fontAlgn="base" latinLnBrk="0" hangingPunct="1">
+              <a:lnSpc>
+                <a:spcPct val="100000"/>
+              </a:lnSpc>
+              <a:spcBef>
+                <a:spcPts val="0"/>
+              </a:spcBef>
+              <a:spcAft>
+                <a:spcPct val="0"/>
+              </a:spcAft>
+              <a:buClrTx/>
+              <a:buSzTx/>
+              <a:buFontTx/>
+              <a:buNone/>
+              <a:tabLst/>
+            </a:pPr>
+            <a:r>
+              <a:rPr lang="zh-CN" altLang="en-US" sz="1200" kern="0" dirty="0">
+                <a:solidFill>
+                  <a:srgbClr val="00B050"/>
+                </a:solidFill>
+              </a:rPr>
+              <a:t>电机请求模式</a:t>
+            </a:r>
+            <a:endParaRPr kumimoji="0" lang="de-DE" sz="1200" b="0" i="0" u="none" strike="noStrike" kern="0" cap="none" spc="0" normalizeH="0" baseline="0" noProof="0" dirty="0">
+              <a:ln>
+                <a:noFill/>
+              </a:ln>
+              <a:solidFill>
+                <a:srgbClr val="00B050"/>
+              </a:solidFill>
+              <a:effectLst/>
+              <a:uLnTx/>
+              <a:uFillTx/>
+            </a:endParaRPr>
+          </a:p>
+        </p:txBody>
+      </p:sp>
+      <p:cxnSp>
+        <p:nvCxnSpPr>
+          <p:cNvPr id="22" name="Gerader Verbinder 21">
+            <a:extLst>
+              <a:ext uri="{FF2B5EF4-FFF2-40B4-BE49-F238E27FC236}">
+                <a16:creationId xmlns:a16="http://schemas.microsoft.com/office/drawing/2014/main" id="{52FA1226-87AC-C3B2-34E9-1673BCF7A017}"/>
+              </a:ext>
+            </a:extLst>
+          </p:cNvPr>
+          <p:cNvCxnSpPr>
+            <a:cxnSpLocks/>
+          </p:cNvCxnSpPr>
+          <p:nvPr/>
+        </p:nvCxnSpPr>
+        <p:spPr>
+          <a:xfrm flipH="1">
+            <a:off x="568411" y="4625543"/>
+            <a:ext cx="7963930" cy="0"/>
+          </a:xfrm>
+          <a:prstGeom prst="line">
+            <a:avLst/>
+          </a:prstGeom>
+          <a:noFill/>
+          <a:ln w="6350" cap="rnd" cmpd="sng" algn="ctr">
+            <a:solidFill>
+              <a:schemeClr val="bg2"/>
+            </a:solidFill>
+            <a:prstDash val="solid"/>
+            <a:round/>
+            <a:headEnd type="triangle" w="med" len="med"/>
+            <a:tailEnd type="none" w="med" len="med"/>
+          </a:ln>
+          <a:effectLst/>
+        </p:spPr>
+      </p:cxnSp>
+      <p:cxnSp>
+        <p:nvCxnSpPr>
+          <p:cNvPr id="27" name="Gerader Verbinder 26">
+            <a:extLst>
+              <a:ext uri="{FF2B5EF4-FFF2-40B4-BE49-F238E27FC236}">
+                <a16:creationId xmlns:a16="http://schemas.microsoft.com/office/drawing/2014/main" id="{E1208BC8-DCF9-3AC2-EFD6-6E554DAF093B}"/>
+              </a:ext>
+            </a:extLst>
+          </p:cNvPr>
+          <p:cNvCxnSpPr/>
+          <p:nvPr/>
+        </p:nvCxnSpPr>
+        <p:spPr>
+          <a:xfrm>
+            <a:off x="568411" y="1686697"/>
+            <a:ext cx="2273642" cy="0"/>
+          </a:xfrm>
+          <a:prstGeom prst="line">
+            <a:avLst/>
+          </a:prstGeom>
+          <a:noFill/>
+          <a:ln w="6350" cap="rnd" cmpd="sng" algn="ctr">
+            <a:solidFill>
+              <a:srgbClr val="E52330"/>
+            </a:solidFill>
+            <a:prstDash val="solid"/>
+            <a:round/>
+          </a:ln>
+          <a:effectLst/>
+        </p:spPr>
+      </p:cxnSp>
+      <p:cxnSp>
+        <p:nvCxnSpPr>
+          <p:cNvPr id="28" name="Gerader Verbinder 27">
+            <a:extLst>
+              <a:ext uri="{FF2B5EF4-FFF2-40B4-BE49-F238E27FC236}">
+                <a16:creationId xmlns:a16="http://schemas.microsoft.com/office/drawing/2014/main" id="{92DB91BE-FD8B-914D-BF66-055DC8B790CA}"/>
+              </a:ext>
+            </a:extLst>
+          </p:cNvPr>
+          <p:cNvCxnSpPr>
+            <a:cxnSpLocks/>
+          </p:cNvCxnSpPr>
+          <p:nvPr/>
+        </p:nvCxnSpPr>
+        <p:spPr>
+          <a:xfrm>
+            <a:off x="2850050" y="1686697"/>
+            <a:ext cx="214426" cy="815540"/>
+          </a:xfrm>
+          <a:prstGeom prst="line">
+            <a:avLst/>
+          </a:prstGeom>
+          <a:noFill/>
+          <a:ln w="6350" cap="rnd" cmpd="sng" algn="ctr">
+            <a:solidFill>
+              <a:srgbClr val="E52330"/>
+            </a:solidFill>
+            <a:prstDash val="solid"/>
+            <a:round/>
+          </a:ln>
+          <a:effectLst/>
+        </p:spPr>
+      </p:cxnSp>
+      <p:cxnSp>
+        <p:nvCxnSpPr>
+          <p:cNvPr id="31" name="Gerader Verbinder 30">
+            <a:extLst>
+              <a:ext uri="{FF2B5EF4-FFF2-40B4-BE49-F238E27FC236}">
+                <a16:creationId xmlns:a16="http://schemas.microsoft.com/office/drawing/2014/main" id="{36F13E7E-29DF-FCB8-5BC7-3C3DAEA74537}"/>
+              </a:ext>
+            </a:extLst>
+          </p:cNvPr>
+          <p:cNvCxnSpPr>
+            <a:cxnSpLocks/>
+          </p:cNvCxnSpPr>
+          <p:nvPr/>
+        </p:nvCxnSpPr>
+        <p:spPr>
+          <a:xfrm flipH="1">
+            <a:off x="6051065" y="1366980"/>
+            <a:ext cx="220249" cy="1141918"/>
+          </a:xfrm>
+          <a:prstGeom prst="line">
+            <a:avLst/>
+          </a:prstGeom>
+          <a:noFill/>
+          <a:ln w="6350" cap="rnd" cmpd="sng" algn="ctr">
+            <a:solidFill>
+              <a:srgbClr val="E52330"/>
+            </a:solidFill>
+            <a:prstDash val="solid"/>
+            <a:round/>
+          </a:ln>
+          <a:effectLst/>
+        </p:spPr>
+      </p:cxnSp>
+      <p:cxnSp>
+        <p:nvCxnSpPr>
+          <p:cNvPr id="33" name="Gerader Verbinder 32">
+            <a:extLst>
+              <a:ext uri="{FF2B5EF4-FFF2-40B4-BE49-F238E27FC236}">
+                <a16:creationId xmlns:a16="http://schemas.microsoft.com/office/drawing/2014/main" id="{051E69F4-EDFA-BFF3-CD71-7B67792E807C}"/>
+              </a:ext>
+            </a:extLst>
+          </p:cNvPr>
+          <p:cNvCxnSpPr>
+            <a:cxnSpLocks/>
+          </p:cNvCxnSpPr>
+          <p:nvPr/>
+        </p:nvCxnSpPr>
+        <p:spPr>
+          <a:xfrm>
+            <a:off x="3064476" y="2508898"/>
+            <a:ext cx="2985656" cy="0"/>
+          </a:xfrm>
+          <a:prstGeom prst="line">
+            <a:avLst/>
+          </a:prstGeom>
+          <a:noFill/>
+          <a:ln w="6350" cap="rnd" cmpd="sng" algn="ctr">
+            <a:solidFill>
+              <a:srgbClr val="E52330"/>
+            </a:solidFill>
+            <a:prstDash val="solid"/>
+            <a:round/>
+          </a:ln>
+          <a:effectLst/>
+        </p:spPr>
+      </p:cxnSp>
+      <p:sp>
+        <p:nvSpPr>
+          <p:cNvPr id="35" name="Textfeld 34">
+            <a:extLst>
+              <a:ext uri="{FF2B5EF4-FFF2-40B4-BE49-F238E27FC236}">
+                <a16:creationId xmlns:a16="http://schemas.microsoft.com/office/drawing/2014/main" id="{2A24E38B-3F4A-EFF2-0C04-5D4020572949}"/>
+              </a:ext>
+            </a:extLst>
+          </p:cNvPr>
+          <p:cNvSpPr txBox="1"/>
+          <p:nvPr/>
+        </p:nvSpPr>
+        <p:spPr>
+          <a:xfrm>
+            <a:off x="776459" y="1462830"/>
+            <a:ext cx="900888" cy="215444"/>
+          </a:xfrm>
+          <a:prstGeom prst="rect">
+            <a:avLst/>
+          </a:prstGeom>
+          <a:noFill/>
+        </p:spPr>
+        <p:txBody>
+          <a:bodyPr wrap="none" lIns="0" tIns="0" rIns="0" bIns="0" rtlCol="0">
+            <a:spAutoFit/>
+          </a:bodyPr>
+          <a:lstStyle/>
+          <a:p>
+            <a:pPr marL="0" marR="0" indent="0" defTabSz="914400" eaLnBrk="1" fontAlgn="base" latinLnBrk="0" hangingPunct="1">
+              <a:lnSpc>
+                <a:spcPct val="100000"/>
+              </a:lnSpc>
+              <a:spcBef>
+                <a:spcPts val="0"/>
+              </a:spcBef>
+              <a:spcAft>
+                <a:spcPct val="0"/>
+              </a:spcAft>
+              <a:buClrTx/>
+              <a:buSzTx/>
+              <a:buFontTx/>
+              <a:buNone/>
+              <a:tabLst/>
+            </a:pPr>
+            <a:r>
+              <a:rPr lang="zh-CN" altLang="en-US" sz="700" kern="0" dirty="0">
+                <a:solidFill>
+                  <a:srgbClr val="E52330"/>
+                </a:solidFill>
+              </a:rPr>
+              <a:t>机械制动扭矩请求后轴</a:t>
+            </a:r>
+            <a:endParaRPr lang="en-US" altLang="zh-CN" sz="700" kern="0" dirty="0">
+              <a:solidFill>
+                <a:srgbClr val="E52330"/>
+              </a:solidFill>
+            </a:endParaRPr>
+          </a:p>
+          <a:p>
+            <a:pPr fontAlgn="base">
+              <a:spcAft>
+                <a:spcPct val="0"/>
+              </a:spcAft>
+            </a:pPr>
+            <a:r>
+              <a:rPr lang="en-US" altLang="zh-CN" sz="700" kern="0" dirty="0" err="1">
+                <a:solidFill>
+                  <a:srgbClr val="000000"/>
+                </a:solidFill>
+              </a:rPr>
+              <a:t>DrRqdRearShftBrkTorq</a:t>
+            </a:r>
+            <a:endParaRPr kumimoji="0" lang="de-DE" sz="700" b="0" i="0" u="none" strike="noStrike" kern="0" cap="none" spc="0" normalizeH="0" baseline="0" noProof="0" dirty="0">
+              <a:ln>
+                <a:noFill/>
+              </a:ln>
+              <a:solidFill>
+                <a:srgbClr val="E52330"/>
+              </a:solidFill>
+              <a:effectLst/>
+              <a:uLnTx/>
+              <a:uFillTx/>
+            </a:endParaRPr>
+          </a:p>
+        </p:txBody>
+      </p:sp>
+      <p:cxnSp>
+        <p:nvCxnSpPr>
+          <p:cNvPr id="37" name="Gerader Verbinder 36">
+            <a:extLst>
+              <a:ext uri="{FF2B5EF4-FFF2-40B4-BE49-F238E27FC236}">
+                <a16:creationId xmlns:a16="http://schemas.microsoft.com/office/drawing/2014/main" id="{5B2F52EB-64F3-64FA-D4FA-3B4414B3DE5D}"/>
+              </a:ext>
+            </a:extLst>
+          </p:cNvPr>
+          <p:cNvCxnSpPr>
+            <a:cxnSpLocks/>
+          </p:cNvCxnSpPr>
+          <p:nvPr/>
+        </p:nvCxnSpPr>
+        <p:spPr>
+          <a:xfrm>
+            <a:off x="566352" y="2631989"/>
+            <a:ext cx="0" cy="1087391"/>
+          </a:xfrm>
+          <a:prstGeom prst="line">
+            <a:avLst/>
+          </a:prstGeom>
+          <a:noFill/>
+          <a:ln w="6350" cap="rnd" cmpd="sng" algn="ctr">
+            <a:solidFill>
+              <a:schemeClr val="bg2"/>
+            </a:solidFill>
+            <a:prstDash val="solid"/>
+            <a:round/>
+            <a:headEnd type="triangle" w="med" len="med"/>
+            <a:tailEnd type="none" w="med" len="med"/>
+          </a:ln>
+          <a:effectLst/>
+        </p:spPr>
+      </p:cxnSp>
+      <p:cxnSp>
+        <p:nvCxnSpPr>
+          <p:cNvPr id="39" name="Gerader Verbinder 38">
+            <a:extLst>
+              <a:ext uri="{FF2B5EF4-FFF2-40B4-BE49-F238E27FC236}">
+                <a16:creationId xmlns:a16="http://schemas.microsoft.com/office/drawing/2014/main" id="{178E9F8A-F3B1-BCDB-FFFF-45DEBA80C939}"/>
+              </a:ext>
+            </a:extLst>
+          </p:cNvPr>
+          <p:cNvCxnSpPr>
+            <a:cxnSpLocks/>
+          </p:cNvCxnSpPr>
+          <p:nvPr/>
+        </p:nvCxnSpPr>
+        <p:spPr>
+          <a:xfrm flipH="1">
+            <a:off x="568411" y="3719380"/>
+            <a:ext cx="7963930" cy="0"/>
+          </a:xfrm>
+          <a:prstGeom prst="line">
+            <a:avLst/>
+          </a:prstGeom>
+          <a:noFill/>
+          <a:ln w="6350" cap="rnd" cmpd="sng" algn="ctr">
+            <a:solidFill>
+              <a:schemeClr val="bg2"/>
+            </a:solidFill>
+            <a:prstDash val="solid"/>
+            <a:round/>
+            <a:headEnd type="triangle" w="med" len="med"/>
+            <a:tailEnd type="none" w="med" len="med"/>
+          </a:ln>
+          <a:effectLst/>
+        </p:spPr>
+      </p:cxnSp>
+      <p:sp>
+        <p:nvSpPr>
+          <p:cNvPr id="40" name="Textfeld 39">
+            <a:extLst>
+              <a:ext uri="{FF2B5EF4-FFF2-40B4-BE49-F238E27FC236}">
+                <a16:creationId xmlns:a16="http://schemas.microsoft.com/office/drawing/2014/main" id="{47246910-195C-8252-ADE8-12ADF3F8CA80}"/>
+              </a:ext>
+            </a:extLst>
+          </p:cNvPr>
+          <p:cNvSpPr txBox="1"/>
+          <p:nvPr/>
+        </p:nvSpPr>
+        <p:spPr>
+          <a:xfrm rot="16200000">
+            <a:off x="-371689" y="2917823"/>
+            <a:ext cx="1405730" cy="184666"/>
+          </a:xfrm>
+          <a:prstGeom prst="rect">
+            <a:avLst/>
+          </a:prstGeom>
+          <a:noFill/>
+        </p:spPr>
+        <p:txBody>
+          <a:bodyPr wrap="square" lIns="0" tIns="0" rIns="0" bIns="0" rtlCol="0">
+            <a:spAutoFit/>
+          </a:bodyPr>
+          <a:lstStyle/>
+          <a:p>
+            <a:pPr marL="0" marR="0" indent="0" defTabSz="914400" eaLnBrk="1" fontAlgn="base" latinLnBrk="0" hangingPunct="1">
+              <a:lnSpc>
+                <a:spcPct val="100000"/>
+              </a:lnSpc>
+              <a:spcBef>
+                <a:spcPts val="0"/>
+              </a:spcBef>
+              <a:spcAft>
+                <a:spcPct val="0"/>
+              </a:spcAft>
+              <a:buClrTx/>
+              <a:buSzTx/>
+              <a:buFontTx/>
+              <a:buNone/>
+              <a:tabLst/>
+            </a:pPr>
+            <a:r>
+              <a:rPr lang="en-US" altLang="zh-CN" sz="1200" kern="0" dirty="0"/>
+              <a:t>VMC</a:t>
+            </a:r>
+            <a:r>
+              <a:rPr lang="zh-CN" altLang="en-US" sz="1200" kern="0" dirty="0"/>
+              <a:t> 制动</a:t>
+            </a:r>
+            <a:r>
+              <a:rPr kumimoji="0" lang="zh-CN" altLang="en-US" sz="1200" b="0" i="0" u="none" strike="noStrike" kern="0" cap="none" spc="0" normalizeH="0" baseline="0" noProof="0" dirty="0">
+                <a:ln>
+                  <a:noFill/>
+                </a:ln>
+                <a:effectLst/>
+                <a:uLnTx/>
+                <a:uFillTx/>
+              </a:rPr>
+              <a:t>扭矩请求</a:t>
+            </a:r>
+            <a:endParaRPr kumimoji="0" lang="de-DE" sz="1200" b="0" i="0" u="none" strike="noStrike" kern="0" cap="none" spc="0" normalizeH="0" baseline="0" noProof="0" dirty="0">
+              <a:ln>
+                <a:noFill/>
+              </a:ln>
+              <a:effectLst/>
+              <a:uLnTx/>
+              <a:uFillTx/>
+            </a:endParaRPr>
+          </a:p>
+        </p:txBody>
+      </p:sp>
+      <p:cxnSp>
+        <p:nvCxnSpPr>
+          <p:cNvPr id="42" name="Gerader Verbinder 41">
+            <a:extLst>
+              <a:ext uri="{FF2B5EF4-FFF2-40B4-BE49-F238E27FC236}">
+                <a16:creationId xmlns:a16="http://schemas.microsoft.com/office/drawing/2014/main" id="{C59E5BBE-CA9F-74C1-92E1-1BB8A3F496A7}"/>
+              </a:ext>
+            </a:extLst>
+          </p:cNvPr>
+          <p:cNvCxnSpPr/>
+          <p:nvPr/>
+        </p:nvCxnSpPr>
+        <p:spPr>
+          <a:xfrm>
+            <a:off x="568411" y="1952368"/>
+            <a:ext cx="2273642" cy="0"/>
+          </a:xfrm>
+          <a:prstGeom prst="line">
+            <a:avLst/>
+          </a:prstGeom>
+          <a:noFill/>
+          <a:ln w="6350" cap="rnd" cmpd="sng" algn="ctr">
+            <a:solidFill>
+              <a:srgbClr val="2EBEEF"/>
+            </a:solidFill>
+            <a:prstDash val="solid"/>
+            <a:round/>
+          </a:ln>
+          <a:effectLst/>
+        </p:spPr>
+      </p:cxnSp>
+      <p:cxnSp>
+        <p:nvCxnSpPr>
+          <p:cNvPr id="43" name="Gerader Verbinder 42">
+            <a:extLst>
+              <a:ext uri="{FF2B5EF4-FFF2-40B4-BE49-F238E27FC236}">
+                <a16:creationId xmlns:a16="http://schemas.microsoft.com/office/drawing/2014/main" id="{D642B71D-9D00-DCF1-77AB-42ACBE510FDE}"/>
+              </a:ext>
+            </a:extLst>
+          </p:cNvPr>
+          <p:cNvCxnSpPr/>
+          <p:nvPr/>
+        </p:nvCxnSpPr>
+        <p:spPr>
+          <a:xfrm>
+            <a:off x="566352" y="2209801"/>
+            <a:ext cx="2273642" cy="0"/>
+          </a:xfrm>
+          <a:prstGeom prst="line">
+            <a:avLst/>
+          </a:prstGeom>
+          <a:noFill/>
+          <a:ln w="6350" cap="rnd" cmpd="sng" algn="ctr">
+            <a:solidFill>
+              <a:srgbClr val="0057B7"/>
+            </a:solidFill>
+            <a:prstDash val="solid"/>
+            <a:round/>
+          </a:ln>
+          <a:effectLst/>
+        </p:spPr>
+      </p:cxnSp>
+      <p:sp>
+        <p:nvSpPr>
+          <p:cNvPr id="46" name="Textfeld 45">
+            <a:extLst>
+              <a:ext uri="{FF2B5EF4-FFF2-40B4-BE49-F238E27FC236}">
+                <a16:creationId xmlns:a16="http://schemas.microsoft.com/office/drawing/2014/main" id="{9211907B-969C-529C-27AC-729EB130D02E}"/>
+              </a:ext>
+            </a:extLst>
+          </p:cNvPr>
+          <p:cNvSpPr txBox="1"/>
+          <p:nvPr/>
+        </p:nvSpPr>
+        <p:spPr>
+          <a:xfrm>
+            <a:off x="776459" y="1743672"/>
+            <a:ext cx="1341184" cy="215444"/>
+          </a:xfrm>
+          <a:prstGeom prst="rect">
+            <a:avLst/>
+          </a:prstGeom>
+          <a:noFill/>
+        </p:spPr>
+        <p:txBody>
+          <a:bodyPr wrap="square" lIns="0" tIns="0" rIns="0" bIns="0" rtlCol="0">
+            <a:spAutoFit/>
+          </a:bodyPr>
+          <a:lstStyle/>
+          <a:p>
+            <a:pPr marL="0" marR="0" indent="0" defTabSz="914400" eaLnBrk="1" fontAlgn="base" latinLnBrk="0" hangingPunct="1">
+              <a:lnSpc>
+                <a:spcPct val="100000"/>
+              </a:lnSpc>
+              <a:spcBef>
+                <a:spcPts val="0"/>
+              </a:spcBef>
+              <a:spcAft>
+                <a:spcPct val="0"/>
+              </a:spcAft>
+              <a:buClrTx/>
+              <a:buSzTx/>
+              <a:buFontTx/>
+              <a:buNone/>
+              <a:tabLst/>
+            </a:pPr>
+            <a:r>
+              <a:rPr lang="zh-CN" altLang="en-US" sz="700" kern="0" dirty="0">
+                <a:solidFill>
+                  <a:srgbClr val="2EBEEF"/>
+                </a:solidFill>
+              </a:rPr>
+              <a:t>电制动扭矩请求前轴</a:t>
+            </a:r>
+            <a:endParaRPr lang="en-US" altLang="zh-CN" sz="700" kern="0" dirty="0">
+              <a:solidFill>
+                <a:srgbClr val="2EBEEF"/>
+              </a:solidFill>
+            </a:endParaRPr>
+          </a:p>
+          <a:p>
+            <a:pPr fontAlgn="base">
+              <a:spcAft>
+                <a:spcPct val="0"/>
+              </a:spcAft>
+            </a:pPr>
+            <a:r>
+              <a:rPr lang="en-US" altLang="zh-CN" sz="700" kern="0" dirty="0" err="1">
+                <a:solidFill>
+                  <a:srgbClr val="000000"/>
+                </a:solidFill>
+              </a:rPr>
+              <a:t>PrDrvShftDrRqstdTorqDff_FD</a:t>
+            </a:r>
+            <a:endParaRPr lang="en-US" altLang="zh-CN" sz="700" kern="0" dirty="0">
+              <a:solidFill>
+                <a:srgbClr val="000000"/>
+              </a:solidFill>
+            </a:endParaRPr>
+          </a:p>
+        </p:txBody>
+      </p:sp>
+      <p:sp>
+        <p:nvSpPr>
+          <p:cNvPr id="47" name="Textfeld 46">
+            <a:extLst>
+              <a:ext uri="{FF2B5EF4-FFF2-40B4-BE49-F238E27FC236}">
+                <a16:creationId xmlns:a16="http://schemas.microsoft.com/office/drawing/2014/main" id="{5AF8FA28-13DE-59B5-1E91-AC5142294AAB}"/>
+              </a:ext>
+            </a:extLst>
+          </p:cNvPr>
+          <p:cNvSpPr txBox="1"/>
+          <p:nvPr/>
+        </p:nvSpPr>
+        <p:spPr>
+          <a:xfrm>
+            <a:off x="788924" y="2006066"/>
+            <a:ext cx="1492396" cy="215444"/>
+          </a:xfrm>
+          <a:prstGeom prst="rect">
+            <a:avLst/>
+          </a:prstGeom>
+          <a:noFill/>
+        </p:spPr>
+        <p:txBody>
+          <a:bodyPr wrap="none" lIns="0" tIns="0" rIns="0" bIns="0" rtlCol="0">
+            <a:spAutoFit/>
+          </a:bodyPr>
+          <a:lstStyle/>
+          <a:p>
+            <a:pPr marL="0" marR="0" indent="0" defTabSz="914400" eaLnBrk="1" fontAlgn="base" latinLnBrk="0" hangingPunct="1">
+              <a:lnSpc>
+                <a:spcPct val="100000"/>
+              </a:lnSpc>
+              <a:spcBef>
+                <a:spcPts val="0"/>
+              </a:spcBef>
+              <a:spcAft>
+                <a:spcPct val="0"/>
+              </a:spcAft>
+              <a:buClrTx/>
+              <a:buSzTx/>
+              <a:buFontTx/>
+              <a:buNone/>
+              <a:tabLst/>
+            </a:pPr>
+            <a:r>
+              <a:rPr lang="zh-CN" altLang="en-US" sz="700" kern="0" dirty="0">
+                <a:solidFill>
+                  <a:srgbClr val="00265F"/>
+                </a:solidFill>
+              </a:rPr>
+              <a:t>电制动扭矩请求后轴</a:t>
+            </a:r>
+            <a:endParaRPr lang="en-US" altLang="zh-CN" sz="700" kern="0" dirty="0">
+              <a:solidFill>
+                <a:srgbClr val="00265F"/>
+              </a:solidFill>
+            </a:endParaRPr>
+          </a:p>
+          <a:p>
+            <a:pPr fontAlgn="base">
+              <a:spcAft>
+                <a:spcPct val="0"/>
+              </a:spcAft>
+            </a:pPr>
+            <a:r>
+              <a:rPr lang="en-US" altLang="zh-CN" sz="700" kern="0" dirty="0" err="1">
+                <a:solidFill>
+                  <a:srgbClr val="000000"/>
+                </a:solidFill>
+              </a:rPr>
+              <a:t>ThScdDrvShftDrRqstdTorqDffHCU_FD</a:t>
+            </a:r>
+            <a:endParaRPr lang="zh-CN" altLang="en-US" sz="700" kern="0" dirty="0">
+              <a:solidFill>
+                <a:srgbClr val="000000"/>
+              </a:solidFill>
+            </a:endParaRPr>
+          </a:p>
+        </p:txBody>
+      </p:sp>
+      <p:cxnSp>
+        <p:nvCxnSpPr>
+          <p:cNvPr id="5" name="Gerader Verbinder 4">
+            <a:extLst>
+              <a:ext uri="{FF2B5EF4-FFF2-40B4-BE49-F238E27FC236}">
+                <a16:creationId xmlns:a16="http://schemas.microsoft.com/office/drawing/2014/main" id="{230A4468-7C44-96E9-1EB6-5332BB8D7392}"/>
+              </a:ext>
+            </a:extLst>
+          </p:cNvPr>
+          <p:cNvCxnSpPr>
+            <a:cxnSpLocks/>
+          </p:cNvCxnSpPr>
+          <p:nvPr/>
+        </p:nvCxnSpPr>
+        <p:spPr>
+          <a:xfrm flipV="1">
+            <a:off x="2839994" y="1217141"/>
+            <a:ext cx="224482" cy="1000365"/>
+          </a:xfrm>
+          <a:prstGeom prst="line">
+            <a:avLst/>
+          </a:prstGeom>
+          <a:noFill/>
+          <a:ln w="6350" cap="rnd" cmpd="sng" algn="ctr">
+            <a:solidFill>
+              <a:srgbClr val="0057B7"/>
+            </a:solidFill>
+            <a:prstDash val="solid"/>
+            <a:round/>
+          </a:ln>
+          <a:effectLst/>
+        </p:spPr>
+      </p:cxnSp>
+      <p:cxnSp>
+        <p:nvCxnSpPr>
+          <p:cNvPr id="9" name="Gerader Verbinder 8">
+            <a:extLst>
+              <a:ext uri="{FF2B5EF4-FFF2-40B4-BE49-F238E27FC236}">
+                <a16:creationId xmlns:a16="http://schemas.microsoft.com/office/drawing/2014/main" id="{B457D431-7AFD-BD68-A3E3-5FF048171CEF}"/>
+              </a:ext>
+            </a:extLst>
+          </p:cNvPr>
+          <p:cNvCxnSpPr>
+            <a:cxnSpLocks/>
+          </p:cNvCxnSpPr>
+          <p:nvPr/>
+        </p:nvCxnSpPr>
+        <p:spPr>
+          <a:xfrm>
+            <a:off x="3064476" y="1208904"/>
+            <a:ext cx="2594919" cy="0"/>
+          </a:xfrm>
+          <a:prstGeom prst="line">
+            <a:avLst/>
+          </a:prstGeom>
+          <a:noFill/>
+          <a:ln w="6350" cap="rnd" cmpd="sng" algn="ctr">
+            <a:solidFill>
+              <a:srgbClr val="0057B7"/>
+            </a:solidFill>
+            <a:prstDash val="solid"/>
+            <a:round/>
+          </a:ln>
+          <a:effectLst/>
+        </p:spPr>
+      </p:cxnSp>
+      <p:cxnSp>
+        <p:nvCxnSpPr>
+          <p:cNvPr id="13" name="Gerader Verbinder 12">
+            <a:extLst>
+              <a:ext uri="{FF2B5EF4-FFF2-40B4-BE49-F238E27FC236}">
+                <a16:creationId xmlns:a16="http://schemas.microsoft.com/office/drawing/2014/main" id="{F276CA38-9463-3105-5EE2-91EE5F2048ED}"/>
+              </a:ext>
+            </a:extLst>
+          </p:cNvPr>
+          <p:cNvCxnSpPr>
+            <a:cxnSpLocks/>
+          </p:cNvCxnSpPr>
+          <p:nvPr/>
+        </p:nvCxnSpPr>
+        <p:spPr>
+          <a:xfrm>
+            <a:off x="2839994" y="1952368"/>
+            <a:ext cx="224482" cy="257433"/>
+          </a:xfrm>
+          <a:prstGeom prst="line">
+            <a:avLst/>
+          </a:prstGeom>
+          <a:noFill/>
+          <a:ln w="6350" cap="rnd" cmpd="sng" algn="ctr">
+            <a:solidFill>
+              <a:srgbClr val="2EBEEF"/>
+            </a:solidFill>
+            <a:prstDash val="solid"/>
+            <a:round/>
+          </a:ln>
+          <a:effectLst/>
+        </p:spPr>
+      </p:cxnSp>
+      <p:cxnSp>
+        <p:nvCxnSpPr>
+          <p:cNvPr id="19" name="Gerader Verbinder 18">
+            <a:extLst>
+              <a:ext uri="{FF2B5EF4-FFF2-40B4-BE49-F238E27FC236}">
+                <a16:creationId xmlns:a16="http://schemas.microsoft.com/office/drawing/2014/main" id="{66262B9C-41AA-CE0D-3AE7-011F76004C77}"/>
+              </a:ext>
+            </a:extLst>
+          </p:cNvPr>
+          <p:cNvCxnSpPr>
+            <a:cxnSpLocks/>
+          </p:cNvCxnSpPr>
+          <p:nvPr/>
+        </p:nvCxnSpPr>
+        <p:spPr>
+          <a:xfrm>
+            <a:off x="3064476" y="2209801"/>
+            <a:ext cx="2570205" cy="0"/>
+          </a:xfrm>
+          <a:prstGeom prst="line">
+            <a:avLst/>
+          </a:prstGeom>
+          <a:noFill/>
+          <a:ln w="6350" cap="rnd" cmpd="sng" algn="ctr">
+            <a:solidFill>
+              <a:srgbClr val="2EBEEF"/>
+            </a:solidFill>
+            <a:prstDash val="solid"/>
+            <a:round/>
+          </a:ln>
+          <a:effectLst/>
+        </p:spPr>
+      </p:cxnSp>
+      <p:sp>
+        <p:nvSpPr>
+          <p:cNvPr id="25" name="Bogen 24">
+            <a:extLst>
+              <a:ext uri="{FF2B5EF4-FFF2-40B4-BE49-F238E27FC236}">
+                <a16:creationId xmlns:a16="http://schemas.microsoft.com/office/drawing/2014/main" id="{5067B452-D451-3151-CD70-7D609325E625}"/>
+              </a:ext>
+            </a:extLst>
+          </p:cNvPr>
+          <p:cNvSpPr/>
+          <p:nvPr/>
+        </p:nvSpPr>
+        <p:spPr>
+          <a:xfrm rot="10800000">
+            <a:off x="5659393" y="-49429"/>
+            <a:ext cx="327453" cy="2543627"/>
+          </a:xfrm>
+          <a:prstGeom prst="arc">
+            <a:avLst/>
+          </a:prstGeom>
+          <a:noFill/>
+          <a:ln w="6350" cap="rnd" cmpd="sng" algn="ctr">
+            <a:solidFill>
+              <a:srgbClr val="00265F"/>
+            </a:solidFill>
+            <a:prstDash val="solid"/>
+            <a:round/>
+          </a:ln>
+          <a:effectLst/>
+        </p:spPr>
+        <p:txBody>
+          <a:bodyPr rtlCol="0" anchor="ctr"/>
+          <a:lstStyle/>
+          <a:p>
+            <a:pPr algn="ctr"/>
+            <a:endParaRPr lang="de-DE"/>
+          </a:p>
+        </p:txBody>
+      </p:sp>
+      <p:sp>
+        <p:nvSpPr>
+          <p:cNvPr id="26" name="Bogen 25">
+            <a:extLst>
+              <a:ext uri="{FF2B5EF4-FFF2-40B4-BE49-F238E27FC236}">
+                <a16:creationId xmlns:a16="http://schemas.microsoft.com/office/drawing/2014/main" id="{DA83081E-F5F4-5538-6421-5B34C3D77628}"/>
+              </a:ext>
+            </a:extLst>
+          </p:cNvPr>
+          <p:cNvSpPr/>
+          <p:nvPr/>
+        </p:nvSpPr>
+        <p:spPr>
+          <a:xfrm rot="10800000">
+            <a:off x="5638793" y="1928336"/>
+            <a:ext cx="440717" cy="575447"/>
+          </a:xfrm>
+          <a:prstGeom prst="arc">
+            <a:avLst/>
+          </a:prstGeom>
+          <a:noFill/>
+          <a:ln w="6350" cap="rnd" cmpd="sng" algn="ctr">
+            <a:solidFill>
+              <a:srgbClr val="93D5F6"/>
+            </a:solidFill>
+            <a:prstDash val="solid"/>
+            <a:round/>
+          </a:ln>
+          <a:effectLst/>
+        </p:spPr>
+        <p:txBody>
+          <a:bodyPr rtlCol="0" anchor="ctr"/>
+          <a:lstStyle/>
+          <a:p>
+            <a:pPr algn="ctr"/>
+            <a:endParaRPr lang="de-DE"/>
+          </a:p>
+        </p:txBody>
+      </p:sp>
+      <p:cxnSp>
+        <p:nvCxnSpPr>
+          <p:cNvPr id="29" name="Gerader Verbinder 28">
+            <a:extLst>
+              <a:ext uri="{FF2B5EF4-FFF2-40B4-BE49-F238E27FC236}">
+                <a16:creationId xmlns:a16="http://schemas.microsoft.com/office/drawing/2014/main" id="{D9A469FC-C09D-5283-F19B-64225D2BFEA3}"/>
+              </a:ext>
+            </a:extLst>
+          </p:cNvPr>
+          <p:cNvCxnSpPr>
+            <a:cxnSpLocks/>
+          </p:cNvCxnSpPr>
+          <p:nvPr/>
+        </p:nvCxnSpPr>
+        <p:spPr>
+          <a:xfrm flipV="1">
+            <a:off x="5823123" y="3715909"/>
+            <a:ext cx="227942" cy="3471"/>
+          </a:xfrm>
+          <a:prstGeom prst="line">
+            <a:avLst/>
+          </a:prstGeom>
+          <a:noFill/>
+          <a:ln w="6350" cap="rnd" cmpd="sng" algn="ctr">
+            <a:solidFill>
+              <a:srgbClr val="0057B7"/>
+            </a:solidFill>
+            <a:prstDash val="solid"/>
+            <a:round/>
+          </a:ln>
+          <a:effectLst/>
+        </p:spPr>
+      </p:cxnSp>
+      <p:sp>
+        <p:nvSpPr>
+          <p:cNvPr id="41" name="Textfeld 40">
+            <a:extLst>
+              <a:ext uri="{FF2B5EF4-FFF2-40B4-BE49-F238E27FC236}">
+                <a16:creationId xmlns:a16="http://schemas.microsoft.com/office/drawing/2014/main" id="{06151FA6-B28C-FE24-16F8-B4F32AF29735}"/>
+              </a:ext>
+            </a:extLst>
+          </p:cNvPr>
+          <p:cNvSpPr txBox="1"/>
+          <p:nvPr/>
+        </p:nvSpPr>
+        <p:spPr>
+          <a:xfrm>
+            <a:off x="932386" y="718461"/>
+            <a:ext cx="1037143" cy="184666"/>
+          </a:xfrm>
+          <a:prstGeom prst="rect">
+            <a:avLst/>
+          </a:prstGeom>
+          <a:noFill/>
+        </p:spPr>
+        <p:txBody>
+          <a:bodyPr wrap="none" lIns="0" tIns="0" rIns="0" bIns="0" rtlCol="0">
+            <a:spAutoFit/>
+          </a:bodyPr>
+          <a:lstStyle/>
+          <a:p>
+            <a:pPr marL="0" marR="0" indent="0" defTabSz="914400" eaLnBrk="1" fontAlgn="base" latinLnBrk="0" hangingPunct="1">
+              <a:lnSpc>
+                <a:spcPct val="100000"/>
+              </a:lnSpc>
+              <a:spcBef>
+                <a:spcPts val="0"/>
+              </a:spcBef>
+              <a:spcAft>
+                <a:spcPct val="0"/>
+              </a:spcAft>
+              <a:buClrTx/>
+              <a:buSzTx/>
+              <a:buFontTx/>
+              <a:buNone/>
+              <a:tabLst/>
+            </a:pPr>
+            <a:r>
+              <a:rPr lang="en-US" altLang="zh-CN" sz="1200" kern="0" dirty="0">
+                <a:solidFill>
+                  <a:srgbClr val="000000"/>
+                </a:solidFill>
+                <a:highlight>
+                  <a:srgbClr val="FFFF00"/>
+                </a:highlight>
+              </a:rPr>
+              <a:t>CST</a:t>
+            </a:r>
+            <a:r>
+              <a:rPr lang="zh-CN" altLang="en-US" sz="1200" kern="0" dirty="0">
+                <a:solidFill>
+                  <a:srgbClr val="000000"/>
+                </a:solidFill>
+                <a:highlight>
+                  <a:srgbClr val="FFFF00"/>
+                </a:highlight>
+              </a:rPr>
+              <a:t>功能未激活</a:t>
+            </a:r>
+            <a:endParaRPr kumimoji="0" lang="de-DE" sz="1200" b="0" i="0" u="none" strike="noStrike" kern="0" cap="none" spc="0" normalizeH="0" baseline="0" noProof="0" dirty="0">
+              <a:ln>
+                <a:noFill/>
+              </a:ln>
+              <a:solidFill>
+                <a:srgbClr val="000000"/>
+              </a:solidFill>
+              <a:effectLst/>
+              <a:highlight>
+                <a:srgbClr val="FFFF00"/>
+              </a:highlight>
+              <a:uLnTx/>
+              <a:uFillTx/>
+            </a:endParaRPr>
+          </a:p>
+        </p:txBody>
+      </p:sp>
+      <p:sp>
+        <p:nvSpPr>
+          <p:cNvPr id="44" name="Textfeld 43">
+            <a:extLst>
+              <a:ext uri="{FF2B5EF4-FFF2-40B4-BE49-F238E27FC236}">
+                <a16:creationId xmlns:a16="http://schemas.microsoft.com/office/drawing/2014/main" id="{C283D3E5-1932-2552-BD6A-9B14FE96A428}"/>
+              </a:ext>
+            </a:extLst>
+          </p:cNvPr>
+          <p:cNvSpPr txBox="1"/>
+          <p:nvPr/>
+        </p:nvSpPr>
+        <p:spPr>
+          <a:xfrm>
+            <a:off x="3566934" y="675354"/>
+            <a:ext cx="883255" cy="184666"/>
+          </a:xfrm>
+          <a:prstGeom prst="rect">
+            <a:avLst/>
+          </a:prstGeom>
+          <a:noFill/>
+        </p:spPr>
+        <p:txBody>
+          <a:bodyPr wrap="none" lIns="0" tIns="0" rIns="0" bIns="0" rtlCol="0">
+            <a:spAutoFit/>
+          </a:bodyPr>
+          <a:lstStyle/>
+          <a:p>
+            <a:pPr marL="0" marR="0" indent="0" defTabSz="914400" eaLnBrk="1" fontAlgn="base" latinLnBrk="0" hangingPunct="1">
+              <a:lnSpc>
+                <a:spcPct val="100000"/>
+              </a:lnSpc>
+              <a:spcBef>
+                <a:spcPts val="0"/>
+              </a:spcBef>
+              <a:spcAft>
+                <a:spcPct val="0"/>
+              </a:spcAft>
+              <a:buClrTx/>
+              <a:buSzTx/>
+              <a:buFontTx/>
+              <a:buNone/>
+              <a:tabLst/>
+            </a:pPr>
+            <a:r>
+              <a:rPr lang="en-US" altLang="zh-CN" sz="1200" kern="0" dirty="0">
+                <a:solidFill>
+                  <a:srgbClr val="000000"/>
+                </a:solidFill>
+                <a:highlight>
+                  <a:srgbClr val="FFFF00"/>
+                </a:highlight>
+              </a:rPr>
+              <a:t>CST</a:t>
+            </a:r>
+            <a:r>
+              <a:rPr lang="zh-CN" altLang="en-US" sz="1200" kern="0" dirty="0">
+                <a:solidFill>
+                  <a:srgbClr val="000000"/>
+                </a:solidFill>
+                <a:highlight>
+                  <a:srgbClr val="FFFF00"/>
+                </a:highlight>
+              </a:rPr>
+              <a:t>功能激活</a:t>
+            </a:r>
+            <a:endParaRPr kumimoji="0" lang="de-DE" sz="1200" b="0" i="0" u="none" strike="noStrike" kern="0" cap="none" spc="0" normalizeH="0" baseline="0" noProof="0" dirty="0">
+              <a:ln>
+                <a:noFill/>
+              </a:ln>
+              <a:solidFill>
+                <a:srgbClr val="000000"/>
+              </a:solidFill>
+              <a:effectLst/>
+              <a:highlight>
+                <a:srgbClr val="FFFF00"/>
+              </a:highlight>
+              <a:uLnTx/>
+              <a:uFillTx/>
+            </a:endParaRPr>
+          </a:p>
+        </p:txBody>
+      </p:sp>
+      <p:sp>
+        <p:nvSpPr>
+          <p:cNvPr id="45" name="Textfeld 44">
+            <a:extLst>
+              <a:ext uri="{FF2B5EF4-FFF2-40B4-BE49-F238E27FC236}">
+                <a16:creationId xmlns:a16="http://schemas.microsoft.com/office/drawing/2014/main" id="{AA3D03A3-153F-23E1-F037-221849F2B7EE}"/>
+              </a:ext>
+            </a:extLst>
+          </p:cNvPr>
+          <p:cNvSpPr txBox="1"/>
+          <p:nvPr/>
+        </p:nvSpPr>
+        <p:spPr>
+          <a:xfrm>
+            <a:off x="6047295" y="651304"/>
+            <a:ext cx="923330" cy="184666"/>
+          </a:xfrm>
+          <a:prstGeom prst="rect">
+            <a:avLst/>
+          </a:prstGeom>
+          <a:noFill/>
+        </p:spPr>
+        <p:txBody>
+          <a:bodyPr wrap="none" lIns="0" tIns="0" rIns="0" bIns="0" rtlCol="0">
+            <a:spAutoFit/>
+          </a:bodyPr>
+          <a:lstStyle/>
+          <a:p>
+            <a:pPr marL="0" marR="0" indent="0" defTabSz="914400" eaLnBrk="1" fontAlgn="base" latinLnBrk="0" hangingPunct="1">
+              <a:lnSpc>
+                <a:spcPct val="100000"/>
+              </a:lnSpc>
+              <a:spcBef>
+                <a:spcPts val="0"/>
+              </a:spcBef>
+              <a:spcAft>
+                <a:spcPct val="0"/>
+              </a:spcAft>
+              <a:buClrTx/>
+              <a:buSzTx/>
+              <a:buFontTx/>
+              <a:buNone/>
+              <a:tabLst/>
+            </a:pPr>
+            <a:r>
+              <a:rPr lang="zh-CN" altLang="en-US" sz="1200" kern="0" dirty="0">
+                <a:solidFill>
+                  <a:srgbClr val="000000"/>
+                </a:solidFill>
+                <a:highlight>
+                  <a:srgbClr val="FFFF00"/>
+                </a:highlight>
+              </a:rPr>
+              <a:t>车辆静止停车</a:t>
+            </a:r>
+            <a:endParaRPr kumimoji="0" lang="de-DE" sz="1200" b="0" i="0" u="none" strike="noStrike" kern="0" cap="none" spc="0" normalizeH="0" baseline="0" noProof="0" dirty="0">
+              <a:ln>
+                <a:noFill/>
+              </a:ln>
+              <a:solidFill>
+                <a:srgbClr val="000000"/>
+              </a:solidFill>
+              <a:effectLst/>
+              <a:highlight>
+                <a:srgbClr val="FFFF00"/>
+              </a:highlight>
+              <a:uLnTx/>
+              <a:uFillTx/>
+            </a:endParaRPr>
+          </a:p>
+        </p:txBody>
+      </p:sp>
+      <p:cxnSp>
+        <p:nvCxnSpPr>
+          <p:cNvPr id="8" name="Gerader Verbinder 7">
+            <a:extLst>
+              <a:ext uri="{FF2B5EF4-FFF2-40B4-BE49-F238E27FC236}">
+                <a16:creationId xmlns:a16="http://schemas.microsoft.com/office/drawing/2014/main" id="{5B886857-E2BD-ADC6-5408-4E88F34027AC}"/>
+              </a:ext>
+            </a:extLst>
+          </p:cNvPr>
+          <p:cNvCxnSpPr>
+            <a:cxnSpLocks/>
+          </p:cNvCxnSpPr>
+          <p:nvPr/>
+        </p:nvCxnSpPr>
+        <p:spPr>
+          <a:xfrm>
+            <a:off x="6047295" y="1047565"/>
+            <a:ext cx="0" cy="3567684"/>
+          </a:xfrm>
+          <a:prstGeom prst="line">
+            <a:avLst/>
+          </a:prstGeom>
+          <a:noFill/>
+          <a:ln w="6350" cap="rnd" cmpd="sng" algn="ctr">
+            <a:solidFill>
+              <a:schemeClr val="bg2"/>
+            </a:solidFill>
+            <a:prstDash val="lgDash"/>
+            <a:round/>
+          </a:ln>
+          <a:effectLst/>
+        </p:spPr>
+      </p:cxnSp>
+      <p:sp>
+        <p:nvSpPr>
+          <p:cNvPr id="30" name="Sprechblase: rechteckig 29">
+            <a:extLst>
+              <a:ext uri="{FF2B5EF4-FFF2-40B4-BE49-F238E27FC236}">
+                <a16:creationId xmlns:a16="http://schemas.microsoft.com/office/drawing/2014/main" id="{4CB5698F-7F2D-3B17-D82A-8385A5A2C79C}"/>
+              </a:ext>
+            </a:extLst>
+          </p:cNvPr>
+          <p:cNvSpPr/>
+          <p:nvPr/>
+        </p:nvSpPr>
+        <p:spPr>
+          <a:xfrm>
+            <a:off x="6701499" y="3713198"/>
+            <a:ext cx="2344529" cy="323359"/>
+          </a:xfrm>
+          <a:prstGeom prst="wedgeRectCallout">
+            <a:avLst>
+              <a:gd name="adj1" fmla="val -33934"/>
+              <a:gd name="adj2" fmla="val 122875"/>
+            </a:avLst>
+          </a:prstGeom>
+          <a:solidFill>
+            <a:schemeClr val="bg2"/>
+          </a:solidFill>
+          <a:ln w="12700" cap="flat" cmpd="sng" algn="ctr">
+            <a:noFill/>
+            <a:prstDash val="solid"/>
+          </a:ln>
+          <a:effectLst/>
+        </p:spPr>
+        <p:txBody>
+          <a:bodyPr rot="0" spcFirstLastPara="0" vertOverflow="overflow" horzOverflow="overflow" vert="horz" wrap="square" lIns="90000" tIns="90000" rIns="90000" bIns="90000" numCol="1" spcCol="0" rtlCol="0" fromWordArt="0" anchor="ctr" anchorCtr="0" forceAA="0" compatLnSpc="1">
+            <a:prstTxWarp prst="textNoShape">
+              <a:avLst/>
+            </a:prstTxWarp>
+            <a:noAutofit/>
+          </a:bodyPr>
+          <a:lstStyle/>
+          <a:p>
+            <a:pPr marL="0" marR="0" indent="0" algn="ctr" defTabSz="914400" eaLnBrk="1" fontAlgn="base" latinLnBrk="0" hangingPunct="1">
+              <a:lnSpc>
+                <a:spcPct val="100000"/>
+              </a:lnSpc>
+              <a:spcBef>
+                <a:spcPts val="0"/>
+              </a:spcBef>
+              <a:spcAft>
+                <a:spcPct val="0"/>
+              </a:spcAft>
+              <a:buClrTx/>
+              <a:buSzTx/>
+              <a:buFontTx/>
+              <a:buNone/>
+              <a:tabLst/>
+            </a:pPr>
+            <a:r>
+              <a:rPr kumimoji="0" lang="zh-CN" altLang="en-US" sz="1200" b="0" i="0" u="none" strike="noStrike" kern="0" cap="none" spc="0" normalizeH="0" baseline="0" noProof="0" dirty="0">
+                <a:ln>
+                  <a:noFill/>
+                </a:ln>
+                <a:effectLst/>
+                <a:uLnTx/>
+                <a:uFillTx/>
+                <a:latin typeface="Tahoma"/>
+                <a:ea typeface="+mn-ea"/>
+                <a:cs typeface="Tahoma" pitchFamily="34" charset="0"/>
+              </a:rPr>
+              <a:t>此时转速请求有效</a:t>
+            </a:r>
+            <a:endParaRPr kumimoji="0" lang="de-DE" sz="1200" b="0" i="0" u="none" strike="noStrike" kern="0" cap="none" spc="0" normalizeH="0" baseline="0" noProof="0" dirty="0">
+              <a:ln>
+                <a:noFill/>
+              </a:ln>
+              <a:effectLst/>
+              <a:uLnTx/>
+              <a:uFillTx/>
+              <a:latin typeface="Tahoma"/>
+              <a:ea typeface="+mn-ea"/>
+              <a:cs typeface="Tahoma" pitchFamily="34" charset="0"/>
+            </a:endParaRPr>
+          </a:p>
+        </p:txBody>
+      </p:sp>
+      <p:sp>
+        <p:nvSpPr>
+          <p:cNvPr id="49" name="Sprechblase: rechteckig 48">
+            <a:extLst>
+              <a:ext uri="{FF2B5EF4-FFF2-40B4-BE49-F238E27FC236}">
+                <a16:creationId xmlns:a16="http://schemas.microsoft.com/office/drawing/2014/main" id="{C0A0D570-DB5C-D209-B9E1-038BF71A0CD8}"/>
+              </a:ext>
+            </a:extLst>
+          </p:cNvPr>
+          <p:cNvSpPr/>
+          <p:nvPr/>
+        </p:nvSpPr>
+        <p:spPr>
+          <a:xfrm>
+            <a:off x="6891655" y="1051914"/>
+            <a:ext cx="2168919" cy="1456155"/>
+          </a:xfrm>
+          <a:prstGeom prst="wedgeRectCallout">
+            <a:avLst>
+              <a:gd name="adj1" fmla="val -82015"/>
+              <a:gd name="adj2" fmla="val 40108"/>
+            </a:avLst>
+          </a:prstGeom>
+          <a:solidFill>
+            <a:schemeClr val="bg2"/>
+          </a:solidFill>
+          <a:ln w="12700" cap="flat" cmpd="sng" algn="ctr">
+            <a:noFill/>
+            <a:prstDash val="solid"/>
+          </a:ln>
+          <a:effectLst/>
+        </p:spPr>
+        <p:txBody>
+          <a:bodyPr rot="0" spcFirstLastPara="0" vertOverflow="overflow" horzOverflow="overflow" vert="horz" wrap="square" lIns="90000" tIns="90000" rIns="90000" bIns="90000" numCol="1" spcCol="0" rtlCol="0" fromWordArt="0" anchor="ctr" anchorCtr="0" forceAA="0" compatLnSpc="1">
+            <a:prstTxWarp prst="textNoShape">
+              <a:avLst/>
+            </a:prstTxWarp>
+            <a:noAutofit/>
+          </a:bodyPr>
+          <a:lstStyle/>
+          <a:p>
+            <a:pPr marL="0" marR="0" indent="0" defTabSz="914400" eaLnBrk="1" fontAlgn="base" latinLnBrk="0" hangingPunct="1">
+              <a:lnSpc>
+                <a:spcPct val="100000"/>
+              </a:lnSpc>
+              <a:spcBef>
+                <a:spcPts val="0"/>
+              </a:spcBef>
+              <a:spcAft>
+                <a:spcPct val="0"/>
+              </a:spcAft>
+              <a:buClrTx/>
+              <a:buSzTx/>
+              <a:buFontTx/>
+              <a:buNone/>
+              <a:tabLst/>
+            </a:pPr>
+            <a:r>
+              <a:rPr kumimoji="0" lang="zh-CN" altLang="en-US" sz="1200" b="0" i="0" u="none" strike="noStrike" kern="0" cap="none" spc="0" normalizeH="0" baseline="0" noProof="0" dirty="0">
+                <a:ln>
+                  <a:noFill/>
+                </a:ln>
+                <a:effectLst/>
+                <a:uLnTx/>
+                <a:uFillTx/>
+                <a:latin typeface="Tahoma"/>
+                <a:ea typeface="+mn-ea"/>
+                <a:cs typeface="Tahoma" pitchFamily="34" charset="0"/>
+              </a:rPr>
+              <a:t>方案</a:t>
+            </a:r>
+            <a:r>
+              <a:rPr kumimoji="0" lang="en-US" altLang="zh-CN" sz="1200" b="0" i="0" u="none" strike="noStrike" kern="0" cap="none" spc="0" normalizeH="0" baseline="0" noProof="0" dirty="0">
+                <a:ln>
+                  <a:noFill/>
+                </a:ln>
+                <a:effectLst/>
+                <a:uLnTx/>
+                <a:uFillTx/>
+                <a:latin typeface="Tahoma"/>
+                <a:ea typeface="+mn-ea"/>
+                <a:cs typeface="Tahoma" pitchFamily="34" charset="0"/>
+              </a:rPr>
+              <a:t>1</a:t>
+            </a:r>
+            <a:r>
+              <a:rPr kumimoji="0" lang="zh-CN" altLang="en-US" sz="1200" b="0" i="0" u="none" strike="noStrike" kern="0" cap="none" spc="0" normalizeH="0" baseline="0" noProof="0" dirty="0">
+                <a:ln>
+                  <a:noFill/>
+                </a:ln>
+                <a:effectLst/>
+                <a:uLnTx/>
+                <a:uFillTx/>
+                <a:latin typeface="Tahoma"/>
+                <a:ea typeface="+mn-ea"/>
+                <a:cs typeface="Tahoma" pitchFamily="34" charset="0"/>
+              </a:rPr>
+              <a:t>：</a:t>
+            </a:r>
+            <a:r>
+              <a:rPr kumimoji="0" lang="en-US" sz="1200" b="0" i="0" u="none" strike="noStrike" kern="0" cap="none" spc="0" normalizeH="0" baseline="0" noProof="0" dirty="0">
+                <a:ln>
+                  <a:noFill/>
+                </a:ln>
+                <a:effectLst/>
+                <a:uLnTx/>
+                <a:uFillTx/>
+                <a:latin typeface="Tahoma"/>
+                <a:ea typeface="+mn-ea"/>
+                <a:cs typeface="Tahoma" pitchFamily="34" charset="0"/>
+              </a:rPr>
+              <a:t>VMC</a:t>
+            </a:r>
+            <a:r>
+              <a:rPr kumimoji="0" lang="zh-CN" altLang="en-US" sz="1200" b="0" i="0" u="none" strike="noStrike" kern="0" cap="none" spc="0" normalizeH="0" baseline="0" noProof="0" dirty="0">
+                <a:ln>
+                  <a:noFill/>
+                </a:ln>
+                <a:effectLst/>
+                <a:uLnTx/>
+                <a:uFillTx/>
+                <a:latin typeface="Tahoma"/>
+                <a:ea typeface="+mn-ea"/>
+                <a:cs typeface="Tahoma" pitchFamily="34" charset="0"/>
+              </a:rPr>
+              <a:t> </a:t>
+            </a:r>
+            <a:r>
+              <a:rPr kumimoji="0" lang="en-US" altLang="zh-CN" sz="1200" b="0" i="0" u="none" strike="noStrike" kern="0" cap="none" spc="0" normalizeH="0" baseline="0" noProof="0" dirty="0">
+                <a:ln>
+                  <a:noFill/>
+                </a:ln>
+                <a:effectLst/>
+                <a:uLnTx/>
+                <a:uFillTx/>
+                <a:latin typeface="Tahoma"/>
+                <a:ea typeface="+mn-ea"/>
+                <a:cs typeface="Tahoma" pitchFamily="34" charset="0"/>
+              </a:rPr>
+              <a:t>CST</a:t>
+            </a:r>
+            <a:r>
+              <a:rPr lang="zh-CN" altLang="en-US" sz="1200" kern="0" dirty="0">
+                <a:latin typeface="Tahoma"/>
+                <a:cs typeface="Tahoma" pitchFamily="34" charset="0"/>
+              </a:rPr>
+              <a:t>功能负责，这个请求目标：</a:t>
+            </a:r>
+            <a:endParaRPr lang="en-US" altLang="zh-CN" sz="1200" kern="0" dirty="0">
+              <a:latin typeface="Tahoma"/>
+              <a:cs typeface="Tahoma" pitchFamily="34" charset="0"/>
+            </a:endParaRPr>
+          </a:p>
+          <a:p>
+            <a:pPr fontAlgn="base">
+              <a:spcAft>
+                <a:spcPct val="0"/>
+              </a:spcAft>
+            </a:pPr>
+            <a:r>
+              <a:rPr lang="en-US" altLang="zh-CN" sz="800" kern="0" dirty="0" err="1">
+                <a:solidFill>
+                  <a:srgbClr val="000000"/>
+                </a:solidFill>
+              </a:rPr>
+              <a:t>VMCTarBrkTqFrnt</a:t>
+            </a:r>
+            <a:r>
+              <a:rPr lang="en-US" altLang="zh-CN" sz="800" kern="0" dirty="0">
+                <a:solidFill>
+                  <a:srgbClr val="000000"/>
+                </a:solidFill>
+              </a:rPr>
+              <a:t>=</a:t>
+            </a:r>
+            <a:r>
+              <a:rPr lang="en-US" altLang="zh-CN" sz="800" kern="0" dirty="0" err="1">
+                <a:solidFill>
+                  <a:srgbClr val="000000"/>
+                </a:solidFill>
+              </a:rPr>
+              <a:t>DrRqdFrntShftBrkTorq</a:t>
+            </a:r>
+            <a:endParaRPr lang="en-US" altLang="zh-CN" sz="800" kern="0" dirty="0">
+              <a:solidFill>
+                <a:srgbClr val="000000"/>
+              </a:solidFill>
+            </a:endParaRPr>
+          </a:p>
+          <a:p>
+            <a:pPr fontAlgn="base">
+              <a:spcAft>
+                <a:spcPct val="0"/>
+              </a:spcAft>
+            </a:pPr>
+            <a:r>
+              <a:rPr lang="en-US" altLang="zh-CN" sz="800" kern="0" dirty="0" err="1">
+                <a:solidFill>
+                  <a:srgbClr val="000000"/>
+                </a:solidFill>
+              </a:rPr>
+              <a:t>VMCTarBrkTqRear</a:t>
+            </a:r>
+            <a:r>
+              <a:rPr lang="en-US" altLang="zh-CN" sz="800" kern="0" dirty="0">
+                <a:solidFill>
+                  <a:srgbClr val="000000"/>
+                </a:solidFill>
+              </a:rPr>
+              <a:t>= </a:t>
+            </a:r>
+            <a:r>
+              <a:rPr lang="en-US" altLang="zh-CN" sz="800" kern="0" dirty="0" err="1">
+                <a:solidFill>
+                  <a:srgbClr val="000000"/>
+                </a:solidFill>
+              </a:rPr>
+              <a:t>DrRqdRearShftBrkTorq</a:t>
+            </a:r>
+            <a:endParaRPr lang="en-US" altLang="zh-CN" sz="800" kern="0" dirty="0">
+              <a:solidFill>
+                <a:srgbClr val="000000"/>
+              </a:solidFill>
+            </a:endParaRPr>
+          </a:p>
+          <a:p>
+            <a:pPr fontAlgn="base">
+              <a:spcAft>
+                <a:spcPct val="0"/>
+              </a:spcAft>
+            </a:pPr>
+            <a:endParaRPr lang="en-US" altLang="zh-CN" sz="800" kern="0" dirty="0">
+              <a:solidFill>
+                <a:srgbClr val="000000"/>
+              </a:solidFill>
+            </a:endParaRPr>
+          </a:p>
+          <a:p>
+            <a:pPr fontAlgn="base">
+              <a:spcAft>
+                <a:spcPct val="0"/>
+              </a:spcAft>
+            </a:pPr>
+            <a:r>
+              <a:rPr lang="zh-CN" altLang="en-US" sz="800" kern="0" dirty="0">
+                <a:solidFill>
+                  <a:srgbClr val="000000"/>
+                </a:solidFill>
+              </a:rPr>
+              <a:t>因为</a:t>
+            </a:r>
+            <a:r>
+              <a:rPr lang="en-US" altLang="zh-CN" sz="800" kern="0" dirty="0">
+                <a:solidFill>
+                  <a:srgbClr val="000000"/>
+                </a:solidFill>
+              </a:rPr>
+              <a:t>VMC</a:t>
+            </a:r>
+            <a:r>
+              <a:rPr lang="zh-CN" altLang="en-US" sz="800" kern="0" dirty="0">
+                <a:solidFill>
+                  <a:srgbClr val="000000"/>
+                </a:solidFill>
+              </a:rPr>
+              <a:t>只能通过这两个信号获悉驾驶员制动扭矩目标。所以请求也只能区分前后轴无法单轮请求。</a:t>
+            </a:r>
+            <a:endParaRPr lang="en-US" altLang="zh-CN" sz="800" kern="0" dirty="0">
+              <a:solidFill>
+                <a:srgbClr val="000000"/>
+              </a:solidFill>
+            </a:endParaRPr>
+          </a:p>
+          <a:p>
+            <a:pPr algn="ctr" fontAlgn="base">
+              <a:spcAft>
+                <a:spcPct val="0"/>
+              </a:spcAft>
+            </a:pPr>
+            <a:endParaRPr lang="en-US" altLang="zh-CN" sz="800" kern="0" dirty="0">
+              <a:solidFill>
+                <a:srgbClr val="000000"/>
+              </a:solidFill>
+            </a:endParaRPr>
+          </a:p>
+          <a:p>
+            <a:pPr algn="ctr" fontAlgn="base">
+              <a:spcAft>
+                <a:spcPct val="0"/>
+              </a:spcAft>
+            </a:pPr>
+            <a:endParaRPr kumimoji="0" lang="de-DE" sz="1200" b="0" i="0" u="none" strike="noStrike" kern="0" cap="none" spc="0" normalizeH="0" baseline="0" noProof="0" dirty="0">
+              <a:ln>
+                <a:noFill/>
+              </a:ln>
+              <a:effectLst/>
+              <a:uLnTx/>
+              <a:uFillTx/>
+              <a:latin typeface="Tahoma"/>
+              <a:ea typeface="+mn-ea"/>
+              <a:cs typeface="Tahoma" pitchFamily="34" charset="0"/>
+            </a:endParaRPr>
+          </a:p>
+        </p:txBody>
+      </p:sp>
+      <p:cxnSp>
+        <p:nvCxnSpPr>
+          <p:cNvPr id="50" name="Gerader Verbinder 49">
+            <a:extLst>
+              <a:ext uri="{FF2B5EF4-FFF2-40B4-BE49-F238E27FC236}">
+                <a16:creationId xmlns:a16="http://schemas.microsoft.com/office/drawing/2014/main" id="{73084A73-10D0-5E07-DE92-8469D6743223}"/>
+              </a:ext>
+            </a:extLst>
+          </p:cNvPr>
+          <p:cNvCxnSpPr>
+            <a:cxnSpLocks/>
+          </p:cNvCxnSpPr>
+          <p:nvPr/>
+        </p:nvCxnSpPr>
+        <p:spPr>
+          <a:xfrm flipH="1" flipV="1">
+            <a:off x="5823123" y="4324521"/>
+            <a:ext cx="224172" cy="6179"/>
+          </a:xfrm>
+          <a:prstGeom prst="line">
+            <a:avLst/>
+          </a:prstGeom>
+          <a:noFill/>
+          <a:ln w="6350" cap="rnd" cmpd="sng" algn="ctr">
+            <a:solidFill>
+              <a:srgbClr val="00B050"/>
+            </a:solidFill>
+            <a:prstDash val="solid"/>
+            <a:round/>
+          </a:ln>
+          <a:effectLst/>
+        </p:spPr>
+      </p:cxnSp>
+      <p:cxnSp>
+        <p:nvCxnSpPr>
+          <p:cNvPr id="59" name="Gerade Verbindung mit Pfeil 58">
+            <a:extLst>
+              <a:ext uri="{FF2B5EF4-FFF2-40B4-BE49-F238E27FC236}">
+                <a16:creationId xmlns:a16="http://schemas.microsoft.com/office/drawing/2014/main" id="{B3DA0F87-508A-20EF-3477-B130851F53BD}"/>
+              </a:ext>
+            </a:extLst>
+          </p:cNvPr>
+          <p:cNvCxnSpPr>
+            <a:cxnSpLocks/>
+          </p:cNvCxnSpPr>
+          <p:nvPr/>
+        </p:nvCxnSpPr>
+        <p:spPr>
+          <a:xfrm>
+            <a:off x="2850050" y="909831"/>
+            <a:ext cx="3450209" cy="2074"/>
+          </a:xfrm>
+          <a:prstGeom prst="straightConnector1">
+            <a:avLst/>
+          </a:prstGeom>
+          <a:noFill/>
+          <a:ln w="6350" cap="rnd" cmpd="sng" algn="ctr">
+            <a:solidFill>
+              <a:srgbClr val="FF0000"/>
+            </a:solidFill>
+            <a:prstDash val="solid"/>
+            <a:round/>
+            <a:headEnd type="triangle" w="med" len="med"/>
+            <a:tailEnd type="triangle" w="med" len="med"/>
+          </a:ln>
+          <a:effectLst/>
+        </p:spPr>
+      </p:cxnSp>
+      <p:cxnSp>
+        <p:nvCxnSpPr>
+          <p:cNvPr id="60" name="Gerade Verbindung mit Pfeil 59">
+            <a:extLst>
+              <a:ext uri="{FF2B5EF4-FFF2-40B4-BE49-F238E27FC236}">
+                <a16:creationId xmlns:a16="http://schemas.microsoft.com/office/drawing/2014/main" id="{FB4D7C05-38BC-CA32-15CA-DB26CEE587C5}"/>
+              </a:ext>
+            </a:extLst>
+          </p:cNvPr>
+          <p:cNvCxnSpPr>
+            <a:cxnSpLocks/>
+          </p:cNvCxnSpPr>
+          <p:nvPr/>
+        </p:nvCxnSpPr>
+        <p:spPr>
+          <a:xfrm>
+            <a:off x="5854646" y="860020"/>
+            <a:ext cx="2505113" cy="0"/>
+          </a:xfrm>
+          <a:prstGeom prst="straightConnector1">
+            <a:avLst/>
+          </a:prstGeom>
+          <a:noFill/>
+          <a:ln w="6350" cap="rnd" cmpd="sng" algn="ctr">
+            <a:solidFill>
+              <a:schemeClr val="bg2"/>
+            </a:solidFill>
+            <a:prstDash val="solid"/>
+            <a:round/>
+            <a:headEnd type="triangle" w="med" len="med"/>
+            <a:tailEnd type="triangle" w="med" len="med"/>
+          </a:ln>
+          <a:effectLst/>
+        </p:spPr>
+      </p:cxnSp>
+      <p:cxnSp>
+        <p:nvCxnSpPr>
+          <p:cNvPr id="62" name="Gerade Verbindung mit Pfeil 61">
+            <a:extLst>
+              <a:ext uri="{FF2B5EF4-FFF2-40B4-BE49-F238E27FC236}">
+                <a16:creationId xmlns:a16="http://schemas.microsoft.com/office/drawing/2014/main" id="{C485E875-2745-F13B-A4F2-1B17CFD39C00}"/>
+              </a:ext>
+            </a:extLst>
+          </p:cNvPr>
+          <p:cNvCxnSpPr>
+            <a:cxnSpLocks/>
+          </p:cNvCxnSpPr>
+          <p:nvPr/>
+        </p:nvCxnSpPr>
+        <p:spPr>
+          <a:xfrm>
+            <a:off x="597301" y="911905"/>
+            <a:ext cx="2272573" cy="0"/>
+          </a:xfrm>
+          <a:prstGeom prst="straightConnector1">
+            <a:avLst/>
+          </a:prstGeom>
+          <a:noFill/>
+          <a:ln w="6350" cap="rnd" cmpd="sng" algn="ctr">
+            <a:solidFill>
+              <a:schemeClr val="bg2"/>
+            </a:solidFill>
+            <a:prstDash val="solid"/>
+            <a:round/>
+            <a:headEnd type="triangle" w="med" len="med"/>
+            <a:tailEnd type="triangle" w="med" len="med"/>
+          </a:ln>
+          <a:effectLst/>
+        </p:spPr>
+      </p:cxnSp>
+      <p:cxnSp>
+        <p:nvCxnSpPr>
+          <p:cNvPr id="20" name="Gerader Verbinder 49">
+            <a:extLst>
+              <a:ext uri="{FF2B5EF4-FFF2-40B4-BE49-F238E27FC236}">
+                <a16:creationId xmlns:a16="http://schemas.microsoft.com/office/drawing/2014/main" id="{126D6749-E0B6-10EE-19D9-9DD827AAA3F6}"/>
+              </a:ext>
+            </a:extLst>
+          </p:cNvPr>
+          <p:cNvCxnSpPr>
+            <a:cxnSpLocks/>
+          </p:cNvCxnSpPr>
+          <p:nvPr/>
+        </p:nvCxnSpPr>
+        <p:spPr>
+          <a:xfrm flipH="1" flipV="1">
+            <a:off x="2841059" y="4036558"/>
+            <a:ext cx="2988000" cy="9594"/>
+          </a:xfrm>
+          <a:prstGeom prst="line">
+            <a:avLst/>
+          </a:prstGeom>
+          <a:noFill/>
+          <a:ln w="6350" cap="rnd" cmpd="sng" algn="ctr">
+            <a:solidFill>
+              <a:srgbClr val="00B050"/>
+            </a:solidFill>
+            <a:prstDash val="solid"/>
+            <a:round/>
+          </a:ln>
+          <a:effectLst/>
+        </p:spPr>
+      </p:cxnSp>
+      <p:sp>
+        <p:nvSpPr>
+          <p:cNvPr id="23" name="文本框 22">
+            <a:extLst>
+              <a:ext uri="{FF2B5EF4-FFF2-40B4-BE49-F238E27FC236}">
+                <a16:creationId xmlns:a16="http://schemas.microsoft.com/office/drawing/2014/main" id="{5371654F-96A2-740F-31F7-9DDF76AB0C3C}"/>
+              </a:ext>
+            </a:extLst>
+          </p:cNvPr>
+          <p:cNvSpPr txBox="1"/>
+          <p:nvPr/>
+        </p:nvSpPr>
+        <p:spPr>
+          <a:xfrm>
+            <a:off x="3134670" y="3836957"/>
+            <a:ext cx="2403981" cy="123111"/>
+          </a:xfrm>
+          <a:prstGeom prst="rect">
+            <a:avLst/>
+          </a:prstGeom>
+          <a:noFill/>
+        </p:spPr>
+        <p:txBody>
+          <a:bodyPr wrap="square" lIns="0" tIns="0" rIns="0" bIns="0" rtlCol="0">
+            <a:spAutoFit/>
+          </a:bodyPr>
+          <a:lstStyle/>
+          <a:p>
+            <a:pPr marL="0" marR="0" indent="0" defTabSz="914400" eaLnBrk="1" fontAlgn="base" latinLnBrk="0" hangingPunct="1">
+              <a:lnSpc>
+                <a:spcPct val="100000"/>
+              </a:lnSpc>
+              <a:spcBef>
+                <a:spcPts val="0"/>
+              </a:spcBef>
+              <a:spcAft>
+                <a:spcPct val="0"/>
+              </a:spcAft>
+              <a:buClrTx/>
+              <a:buSzTx/>
+              <a:buFontTx/>
+              <a:buNone/>
+              <a:tabLst/>
+            </a:pPr>
+            <a:r>
+              <a:rPr kumimoji="0" lang="zh-CN" altLang="en-US" sz="800" b="0" i="0" u="none" strike="noStrike" kern="0" cap="none" spc="0" normalizeH="0" baseline="0" noProof="0" dirty="0">
+                <a:ln>
+                  <a:noFill/>
+                </a:ln>
+                <a:solidFill>
+                  <a:srgbClr val="000000"/>
+                </a:solidFill>
+                <a:effectLst/>
+                <a:uLnTx/>
+                <a:uFillTx/>
+              </a:rPr>
+              <a:t>扭矩控制模式 </a:t>
+            </a:r>
+            <a:r>
+              <a:rPr kumimoji="0" lang="en-US" altLang="zh-CN" sz="800" b="0" i="0" u="none" strike="noStrike" kern="0" cap="none" spc="0" normalizeH="0" baseline="0" noProof="0" dirty="0" err="1">
+                <a:ln>
+                  <a:noFill/>
+                </a:ln>
+                <a:solidFill>
+                  <a:srgbClr val="000000"/>
+                </a:solidFill>
+                <a:effectLst/>
+                <a:uLnTx/>
+                <a:uFillTx/>
+              </a:rPr>
+              <a:t>TarRegTrqCtrlRqst</a:t>
+            </a:r>
+            <a:r>
+              <a:rPr kumimoji="0" lang="en-US" altLang="zh-CN" sz="800" b="0" i="0" u="none" strike="noStrike" kern="0" cap="none" spc="0" normalizeH="0" baseline="0" noProof="0" dirty="0">
+                <a:ln>
+                  <a:noFill/>
+                </a:ln>
+                <a:solidFill>
+                  <a:srgbClr val="000000"/>
+                </a:solidFill>
+                <a:effectLst/>
+                <a:uLnTx/>
+                <a:uFillTx/>
+              </a:rPr>
+              <a:t> = Request</a:t>
+            </a:r>
+            <a:endParaRPr kumimoji="0" lang="zh-CN" altLang="en-US" sz="800" b="0" i="0" u="none" strike="noStrike" kern="0" cap="none" spc="0" normalizeH="0" baseline="0" noProof="0" dirty="0">
+              <a:ln>
+                <a:noFill/>
+              </a:ln>
+              <a:solidFill>
+                <a:srgbClr val="000000"/>
+              </a:solidFill>
+              <a:effectLst/>
+              <a:uLnTx/>
+              <a:uFillTx/>
+            </a:endParaRPr>
+          </a:p>
+        </p:txBody>
+      </p:sp>
+      <p:sp>
+        <p:nvSpPr>
+          <p:cNvPr id="34" name="文本框 33">
+            <a:extLst>
+              <a:ext uri="{FF2B5EF4-FFF2-40B4-BE49-F238E27FC236}">
+                <a16:creationId xmlns:a16="http://schemas.microsoft.com/office/drawing/2014/main" id="{D895AC05-E60C-3627-D049-7D95271B9B51}"/>
+              </a:ext>
+            </a:extLst>
+          </p:cNvPr>
+          <p:cNvSpPr txBox="1"/>
+          <p:nvPr/>
+        </p:nvSpPr>
+        <p:spPr>
+          <a:xfrm>
+            <a:off x="6149391" y="4275321"/>
+            <a:ext cx="2027958" cy="123111"/>
+          </a:xfrm>
+          <a:prstGeom prst="rect">
+            <a:avLst/>
+          </a:prstGeom>
+          <a:noFill/>
+        </p:spPr>
+        <p:txBody>
+          <a:bodyPr wrap="square" lIns="0" tIns="0" rIns="0" bIns="0" rtlCol="0">
+            <a:spAutoFit/>
+          </a:bodyPr>
+          <a:lstStyle/>
+          <a:p>
+            <a:pPr marL="0" marR="0" indent="0" defTabSz="914400" eaLnBrk="1" fontAlgn="base" latinLnBrk="0" hangingPunct="1">
+              <a:lnSpc>
+                <a:spcPct val="100000"/>
+              </a:lnSpc>
+              <a:spcBef>
+                <a:spcPts val="0"/>
+              </a:spcBef>
+              <a:spcAft>
+                <a:spcPct val="0"/>
+              </a:spcAft>
+              <a:buClrTx/>
+              <a:buSzTx/>
+              <a:buFontTx/>
+              <a:buNone/>
+              <a:tabLst/>
+            </a:pPr>
+            <a:r>
+              <a:rPr kumimoji="0" lang="zh-CN" altLang="en-US" sz="800" b="0" i="0" u="none" strike="noStrike" kern="0" cap="none" spc="0" normalizeH="0" baseline="0" noProof="0" dirty="0">
+                <a:ln>
+                  <a:noFill/>
+                </a:ln>
+                <a:solidFill>
+                  <a:srgbClr val="000000"/>
+                </a:solidFill>
+                <a:effectLst/>
+                <a:uLnTx/>
+                <a:uFillTx/>
+              </a:rPr>
+              <a:t>转速控制模式 </a:t>
+            </a:r>
+            <a:r>
+              <a:rPr kumimoji="0" lang="en-US" altLang="zh-CN" sz="800" b="0" i="0" u="none" strike="noStrike" kern="0" cap="none" spc="0" normalizeH="0" baseline="0" noProof="0" dirty="0" err="1">
+                <a:ln>
+                  <a:noFill/>
+                </a:ln>
+                <a:solidFill>
+                  <a:srgbClr val="000000"/>
+                </a:solidFill>
+                <a:effectLst/>
+                <a:uLnTx/>
+                <a:uFillTx/>
+              </a:rPr>
+              <a:t>TarRpmCtrlRqst</a:t>
+            </a:r>
+            <a:r>
+              <a:rPr kumimoji="0" lang="en-US" altLang="zh-CN" sz="800" b="0" i="0" u="none" strike="noStrike" kern="0" cap="none" spc="0" normalizeH="0" baseline="0" noProof="0" dirty="0">
+                <a:ln>
+                  <a:noFill/>
+                </a:ln>
+                <a:solidFill>
+                  <a:srgbClr val="000000"/>
+                </a:solidFill>
+                <a:effectLst/>
+                <a:uLnTx/>
+                <a:uFillTx/>
+              </a:rPr>
+              <a:t> = Request</a:t>
+            </a:r>
+            <a:endParaRPr kumimoji="0" lang="zh-CN" altLang="en-US" sz="800" b="0" i="0" u="none" strike="noStrike" kern="0" cap="none" spc="0" normalizeH="0" baseline="0" noProof="0" dirty="0">
+              <a:ln>
+                <a:noFill/>
+              </a:ln>
+              <a:solidFill>
+                <a:srgbClr val="000000"/>
+              </a:solidFill>
+              <a:effectLst/>
+              <a:uLnTx/>
+              <a:uFillTx/>
+            </a:endParaRPr>
+          </a:p>
+        </p:txBody>
+      </p:sp>
+      <p:sp>
+        <p:nvSpPr>
+          <p:cNvPr id="51" name="Sprechblase: rechteckig 29">
+            <a:extLst>
+              <a:ext uri="{FF2B5EF4-FFF2-40B4-BE49-F238E27FC236}">
+                <a16:creationId xmlns:a16="http://schemas.microsoft.com/office/drawing/2014/main" id="{EC86C270-33A8-4069-E85D-7D4849C917AB}"/>
+              </a:ext>
+            </a:extLst>
+          </p:cNvPr>
+          <p:cNvSpPr/>
+          <p:nvPr/>
+        </p:nvSpPr>
+        <p:spPr>
+          <a:xfrm>
+            <a:off x="1769563" y="4155011"/>
+            <a:ext cx="2933065" cy="332487"/>
+          </a:xfrm>
+          <a:prstGeom prst="wedgeRectCallout">
+            <a:avLst>
+              <a:gd name="adj1" fmla="val 28986"/>
+              <a:gd name="adj2" fmla="val -95232"/>
+            </a:avLst>
+          </a:prstGeom>
+          <a:solidFill>
+            <a:schemeClr val="bg2"/>
+          </a:solidFill>
+          <a:ln w="12700" cap="flat" cmpd="sng" algn="ctr">
+            <a:noFill/>
+            <a:prstDash val="solid"/>
+          </a:ln>
+          <a:effectLst/>
+        </p:spPr>
+        <p:txBody>
+          <a:bodyPr rot="0" spcFirstLastPara="0" vertOverflow="overflow" horzOverflow="overflow" vert="horz" wrap="square" lIns="90000" tIns="90000" rIns="90000" bIns="90000" numCol="1" spcCol="0" rtlCol="0" fromWordArt="0" anchor="ctr" anchorCtr="0" forceAA="0" compatLnSpc="1">
+            <a:prstTxWarp prst="textNoShape">
+              <a:avLst/>
+            </a:prstTxWarp>
+            <a:noAutofit/>
+          </a:bodyPr>
+          <a:lstStyle/>
+          <a:p>
+            <a:pPr marL="0" marR="0" indent="0" algn="ctr" defTabSz="914400" eaLnBrk="1" fontAlgn="base" latinLnBrk="0" hangingPunct="1">
+              <a:lnSpc>
+                <a:spcPct val="100000"/>
+              </a:lnSpc>
+              <a:spcBef>
+                <a:spcPts val="0"/>
+              </a:spcBef>
+              <a:spcAft>
+                <a:spcPct val="0"/>
+              </a:spcAft>
+              <a:buClrTx/>
+              <a:buSzTx/>
+              <a:buFontTx/>
+              <a:buNone/>
+              <a:tabLst/>
+            </a:pPr>
+            <a:r>
+              <a:rPr kumimoji="0" lang="zh-CN" altLang="en-US" sz="1200" b="0" i="0" u="none" strike="noStrike" kern="0" cap="none" spc="0" normalizeH="0" baseline="0" noProof="0" dirty="0">
+                <a:ln>
+                  <a:noFill/>
+                </a:ln>
+                <a:effectLst/>
+                <a:uLnTx/>
+                <a:uFillTx/>
+                <a:latin typeface="Tahoma"/>
+                <a:ea typeface="+mn-ea"/>
+                <a:cs typeface="Tahoma" pitchFamily="34" charset="0"/>
+              </a:rPr>
+              <a:t>此时电制动请求有效</a:t>
+            </a:r>
+            <a:endParaRPr kumimoji="0" lang="de-DE" sz="1200" b="0" i="0" u="none" strike="noStrike" kern="0" cap="none" spc="0" normalizeH="0" baseline="0" noProof="0" dirty="0">
+              <a:ln>
+                <a:noFill/>
+              </a:ln>
+              <a:effectLst/>
+              <a:uLnTx/>
+              <a:uFillTx/>
+              <a:latin typeface="Tahoma"/>
+              <a:ea typeface="+mn-ea"/>
+              <a:cs typeface="Tahoma" pitchFamily="34" charset="0"/>
+            </a:endParaRPr>
+          </a:p>
+        </p:txBody>
+      </p:sp>
+      <p:cxnSp>
+        <p:nvCxnSpPr>
+          <p:cNvPr id="10" name="Gerader Verbinder 27">
+            <a:extLst>
+              <a:ext uri="{FF2B5EF4-FFF2-40B4-BE49-F238E27FC236}">
+                <a16:creationId xmlns:a16="http://schemas.microsoft.com/office/drawing/2014/main" id="{98C46430-E7F0-A873-AD20-845A4B725896}"/>
+              </a:ext>
+            </a:extLst>
+          </p:cNvPr>
+          <p:cNvCxnSpPr>
+            <a:cxnSpLocks/>
+          </p:cNvCxnSpPr>
+          <p:nvPr/>
+        </p:nvCxnSpPr>
+        <p:spPr>
+          <a:xfrm>
+            <a:off x="2841057" y="2903132"/>
+            <a:ext cx="214426" cy="815540"/>
+          </a:xfrm>
+          <a:prstGeom prst="line">
+            <a:avLst/>
+          </a:prstGeom>
+          <a:noFill/>
+          <a:ln w="6350" cap="rnd" cmpd="sng" algn="ctr">
+            <a:solidFill>
+              <a:srgbClr val="E52330"/>
+            </a:solidFill>
+            <a:prstDash val="solid"/>
+            <a:round/>
+          </a:ln>
+          <a:effectLst/>
+        </p:spPr>
+      </p:cxnSp>
+      <p:cxnSp>
+        <p:nvCxnSpPr>
+          <p:cNvPr id="16" name="Gerader Verbinder 32">
+            <a:extLst>
+              <a:ext uri="{FF2B5EF4-FFF2-40B4-BE49-F238E27FC236}">
+                <a16:creationId xmlns:a16="http://schemas.microsoft.com/office/drawing/2014/main" id="{9BFE056F-8EF7-18AE-63B5-9A62F06A38AE}"/>
+              </a:ext>
+            </a:extLst>
+          </p:cNvPr>
+          <p:cNvCxnSpPr>
+            <a:cxnSpLocks/>
+          </p:cNvCxnSpPr>
+          <p:nvPr/>
+        </p:nvCxnSpPr>
+        <p:spPr>
+          <a:xfrm>
+            <a:off x="3055483" y="3719380"/>
+            <a:ext cx="2985656" cy="0"/>
+          </a:xfrm>
+          <a:prstGeom prst="line">
+            <a:avLst/>
+          </a:prstGeom>
+          <a:noFill/>
+          <a:ln w="6350" cap="rnd" cmpd="sng" algn="ctr">
+            <a:solidFill>
+              <a:srgbClr val="E52330"/>
+            </a:solidFill>
+            <a:prstDash val="solid"/>
+            <a:round/>
+          </a:ln>
+          <a:effectLst/>
+        </p:spPr>
+      </p:cxnSp>
+      <p:cxnSp>
+        <p:nvCxnSpPr>
+          <p:cNvPr id="21" name="Gerader Verbinder 4">
+            <a:extLst>
+              <a:ext uri="{FF2B5EF4-FFF2-40B4-BE49-F238E27FC236}">
+                <a16:creationId xmlns:a16="http://schemas.microsoft.com/office/drawing/2014/main" id="{2B55EA21-37E2-39AE-A8AC-3CF153D171B1}"/>
+              </a:ext>
+            </a:extLst>
+          </p:cNvPr>
+          <p:cNvCxnSpPr>
+            <a:cxnSpLocks/>
+          </p:cNvCxnSpPr>
+          <p:nvPr/>
+        </p:nvCxnSpPr>
+        <p:spPr>
+          <a:xfrm flipV="1">
+            <a:off x="2842881" y="2557448"/>
+            <a:ext cx="224482" cy="1000365"/>
+          </a:xfrm>
+          <a:prstGeom prst="line">
+            <a:avLst/>
+          </a:prstGeom>
+          <a:noFill/>
+          <a:ln w="6350" cap="rnd" cmpd="sng" algn="ctr">
+            <a:solidFill>
+              <a:srgbClr val="0057B7"/>
+            </a:solidFill>
+            <a:prstDash val="solid"/>
+            <a:round/>
+          </a:ln>
+          <a:effectLst/>
+        </p:spPr>
+      </p:cxnSp>
+      <p:cxnSp>
+        <p:nvCxnSpPr>
+          <p:cNvPr id="24" name="Gerader Verbinder 8">
+            <a:extLst>
+              <a:ext uri="{FF2B5EF4-FFF2-40B4-BE49-F238E27FC236}">
+                <a16:creationId xmlns:a16="http://schemas.microsoft.com/office/drawing/2014/main" id="{4AF03F23-4402-B6D7-6C76-D4B064BBF4C8}"/>
+              </a:ext>
+            </a:extLst>
+          </p:cNvPr>
+          <p:cNvCxnSpPr>
+            <a:cxnSpLocks/>
+          </p:cNvCxnSpPr>
+          <p:nvPr/>
+        </p:nvCxnSpPr>
+        <p:spPr>
+          <a:xfrm>
+            <a:off x="3067363" y="2560217"/>
+            <a:ext cx="2594919" cy="0"/>
+          </a:xfrm>
+          <a:prstGeom prst="line">
+            <a:avLst/>
+          </a:prstGeom>
+          <a:noFill/>
+          <a:ln w="6350" cap="rnd" cmpd="sng" algn="ctr">
+            <a:solidFill>
+              <a:srgbClr val="0057B7"/>
+            </a:solidFill>
+            <a:prstDash val="solid"/>
+            <a:round/>
+          </a:ln>
+          <a:effectLst/>
+        </p:spPr>
+      </p:cxnSp>
+      <p:cxnSp>
+        <p:nvCxnSpPr>
+          <p:cNvPr id="32" name="Gerader Verbinder 12">
+            <a:extLst>
+              <a:ext uri="{FF2B5EF4-FFF2-40B4-BE49-F238E27FC236}">
+                <a16:creationId xmlns:a16="http://schemas.microsoft.com/office/drawing/2014/main" id="{B26DAFB7-E24C-6EB0-47A0-611573DFE34F}"/>
+              </a:ext>
+            </a:extLst>
+          </p:cNvPr>
+          <p:cNvCxnSpPr>
+            <a:cxnSpLocks/>
+          </p:cNvCxnSpPr>
+          <p:nvPr/>
+        </p:nvCxnSpPr>
+        <p:spPr>
+          <a:xfrm>
+            <a:off x="2842053" y="3300380"/>
+            <a:ext cx="224482" cy="257433"/>
+          </a:xfrm>
+          <a:prstGeom prst="line">
+            <a:avLst/>
+          </a:prstGeom>
+          <a:noFill/>
+          <a:ln w="6350" cap="rnd" cmpd="sng" algn="ctr">
+            <a:solidFill>
+              <a:srgbClr val="2EBEEF"/>
+            </a:solidFill>
+            <a:prstDash val="solid"/>
+            <a:round/>
+          </a:ln>
+          <a:effectLst/>
+        </p:spPr>
+      </p:cxnSp>
+      <p:cxnSp>
+        <p:nvCxnSpPr>
+          <p:cNvPr id="36" name="Gerader Verbinder 18">
+            <a:extLst>
+              <a:ext uri="{FF2B5EF4-FFF2-40B4-BE49-F238E27FC236}">
+                <a16:creationId xmlns:a16="http://schemas.microsoft.com/office/drawing/2014/main" id="{E49777AA-0F8F-E555-A6D1-957F45DCF5B4}"/>
+              </a:ext>
+            </a:extLst>
+          </p:cNvPr>
+          <p:cNvCxnSpPr>
+            <a:cxnSpLocks/>
+          </p:cNvCxnSpPr>
+          <p:nvPr/>
+        </p:nvCxnSpPr>
+        <p:spPr>
+          <a:xfrm>
+            <a:off x="3077537" y="3557813"/>
+            <a:ext cx="2570205" cy="0"/>
+          </a:xfrm>
+          <a:prstGeom prst="line">
+            <a:avLst/>
+          </a:prstGeom>
+          <a:noFill/>
+          <a:ln w="6350" cap="rnd" cmpd="sng" algn="ctr">
+            <a:solidFill>
+              <a:srgbClr val="2EBEEF"/>
+            </a:solidFill>
+            <a:prstDash val="solid"/>
+            <a:round/>
+          </a:ln>
+          <a:effectLst/>
+        </p:spPr>
+      </p:cxnSp>
+      <p:sp>
+        <p:nvSpPr>
+          <p:cNvPr id="38" name="Bogen 25">
+            <a:extLst>
+              <a:ext uri="{FF2B5EF4-FFF2-40B4-BE49-F238E27FC236}">
+                <a16:creationId xmlns:a16="http://schemas.microsoft.com/office/drawing/2014/main" id="{B53A3EA2-133A-A66B-1488-8CC86F956644}"/>
+              </a:ext>
+            </a:extLst>
+          </p:cNvPr>
+          <p:cNvSpPr/>
+          <p:nvPr/>
+        </p:nvSpPr>
+        <p:spPr>
+          <a:xfrm rot="10800000">
+            <a:off x="5634288" y="3215523"/>
+            <a:ext cx="440717" cy="498601"/>
+          </a:xfrm>
+          <a:prstGeom prst="arc">
+            <a:avLst>
+              <a:gd name="adj1" fmla="val 16200000"/>
+              <a:gd name="adj2" fmla="val 20101365"/>
+            </a:avLst>
+          </a:prstGeom>
+          <a:noFill/>
+          <a:ln w="6350" cap="rnd" cmpd="sng" algn="ctr">
+            <a:solidFill>
+              <a:srgbClr val="93D5F6"/>
+            </a:solidFill>
+            <a:prstDash val="solid"/>
+            <a:round/>
+          </a:ln>
+          <a:effectLst/>
+        </p:spPr>
+        <p:txBody>
+          <a:bodyPr rtlCol="0" anchor="ctr"/>
+          <a:lstStyle/>
+          <a:p>
+            <a:pPr algn="ctr"/>
+            <a:endParaRPr lang="de-DE"/>
+          </a:p>
+        </p:txBody>
+      </p:sp>
+      <p:sp>
+        <p:nvSpPr>
+          <p:cNvPr id="52" name="Bogen 24">
+            <a:extLst>
+              <a:ext uri="{FF2B5EF4-FFF2-40B4-BE49-F238E27FC236}">
+                <a16:creationId xmlns:a16="http://schemas.microsoft.com/office/drawing/2014/main" id="{8F0898D3-3F99-94CB-B91C-22A19935BF04}"/>
+              </a:ext>
+            </a:extLst>
+          </p:cNvPr>
+          <p:cNvSpPr/>
+          <p:nvPr/>
+        </p:nvSpPr>
+        <p:spPr>
+          <a:xfrm rot="10800000">
+            <a:off x="5668514" y="1417868"/>
+            <a:ext cx="327453" cy="2303995"/>
+          </a:xfrm>
+          <a:prstGeom prst="arc">
+            <a:avLst/>
+          </a:prstGeom>
+          <a:noFill/>
+          <a:ln w="6350" cap="rnd" cmpd="sng" algn="ctr">
+            <a:solidFill>
+              <a:srgbClr val="00265F"/>
+            </a:solidFill>
+            <a:prstDash val="solid"/>
+            <a:round/>
+          </a:ln>
+          <a:effectLst/>
+        </p:spPr>
+        <p:txBody>
+          <a:bodyPr rtlCol="0" anchor="ctr"/>
+          <a:lstStyle/>
+          <a:p>
+            <a:pPr algn="ctr"/>
+            <a:endParaRPr lang="de-DE"/>
+          </a:p>
+        </p:txBody>
+      </p:sp>
+      <p:sp>
+        <p:nvSpPr>
+          <p:cNvPr id="54" name="矩形 53">
+            <a:extLst>
+              <a:ext uri="{FF2B5EF4-FFF2-40B4-BE49-F238E27FC236}">
+                <a16:creationId xmlns:a16="http://schemas.microsoft.com/office/drawing/2014/main" id="{CBA4E754-9973-7F4E-512F-23D204CFB3FD}"/>
+              </a:ext>
+            </a:extLst>
+          </p:cNvPr>
+          <p:cNvSpPr/>
+          <p:nvPr/>
+        </p:nvSpPr>
+        <p:spPr>
+          <a:xfrm>
+            <a:off x="3999325" y="155500"/>
+            <a:ext cx="513676" cy="200896"/>
+          </a:xfrm>
+          <a:prstGeom prst="rect">
+            <a:avLst/>
+          </a:prstGeom>
+          <a:solidFill>
+            <a:srgbClr val="FF0000">
+              <a:alpha val="34118"/>
+            </a:srgbClr>
+          </a:solidFill>
+          <a:ln w="12700" cap="flat" cmpd="sng" algn="ctr">
+            <a:noFill/>
+            <a:prstDash val="solid"/>
+          </a:ln>
+          <a:effectLst/>
+        </p:spPr>
+        <p:txBody>
+          <a:bodyPr rot="0" spcFirstLastPara="0" vertOverflow="overflow" horzOverflow="overflow" vert="horz" wrap="square" lIns="90000" tIns="90000" rIns="90000" bIns="90000" numCol="1" spcCol="0" rtlCol="0" fromWordArt="0" anchor="ctr" anchorCtr="0" forceAA="0" compatLnSpc="1">
+            <a:prstTxWarp prst="textNoShape">
+              <a:avLst/>
+            </a:prstTxWarp>
+            <a:noAutofit/>
+          </a:bodyPr>
+          <a:lstStyle/>
+          <a:p>
+            <a:pPr marL="0" marR="0" indent="0" algn="ctr" defTabSz="914400" eaLnBrk="1" fontAlgn="base" latinLnBrk="0" hangingPunct="1">
+              <a:lnSpc>
+                <a:spcPct val="100000"/>
+              </a:lnSpc>
+              <a:spcBef>
+                <a:spcPts val="0"/>
+              </a:spcBef>
+              <a:spcAft>
+                <a:spcPct val="0"/>
+              </a:spcAft>
+              <a:buClrTx/>
+              <a:buSzTx/>
+              <a:buFontTx/>
+              <a:buNone/>
+              <a:tabLst/>
+            </a:pPr>
+            <a:endParaRPr kumimoji="0" lang="zh-CN" altLang="en-US" sz="1200" b="0" i="0" u="none" strike="noStrike" kern="0" cap="none" spc="0" normalizeH="0" baseline="0" noProof="0" dirty="0" err="1">
+              <a:ln>
+                <a:noFill/>
+              </a:ln>
+              <a:effectLst/>
+              <a:uLnTx/>
+              <a:uFillTx/>
+              <a:latin typeface="Tahoma"/>
+              <a:ea typeface="+mn-ea"/>
+              <a:cs typeface="Tahoma" pitchFamily="34" charset="0"/>
+            </a:endParaRPr>
+          </a:p>
+        </p:txBody>
+      </p:sp>
+      <p:sp>
+        <p:nvSpPr>
+          <p:cNvPr id="55" name="文本框 54">
+            <a:extLst>
+              <a:ext uri="{FF2B5EF4-FFF2-40B4-BE49-F238E27FC236}">
+                <a16:creationId xmlns:a16="http://schemas.microsoft.com/office/drawing/2014/main" id="{7A93CE4E-C202-B3CD-CA45-A5364D460C26}"/>
+              </a:ext>
+            </a:extLst>
+          </p:cNvPr>
+          <p:cNvSpPr txBox="1"/>
+          <p:nvPr/>
+        </p:nvSpPr>
+        <p:spPr>
+          <a:xfrm>
+            <a:off x="4629582" y="31955"/>
+            <a:ext cx="2009411" cy="538609"/>
+          </a:xfrm>
+          <a:prstGeom prst="rect">
+            <a:avLst/>
+          </a:prstGeom>
+          <a:noFill/>
+        </p:spPr>
+        <p:txBody>
+          <a:bodyPr wrap="square" lIns="0" tIns="0" rIns="0" bIns="0" rtlCol="0">
+            <a:spAutoFit/>
+          </a:bodyPr>
+          <a:lstStyle/>
+          <a:p>
+            <a:pPr marL="0" marR="0" indent="0" defTabSz="914400" eaLnBrk="1" fontAlgn="base" latinLnBrk="0" hangingPunct="1">
+              <a:lnSpc>
+                <a:spcPct val="100000"/>
+              </a:lnSpc>
+              <a:spcBef>
+                <a:spcPts val="0"/>
+              </a:spcBef>
+              <a:spcAft>
+                <a:spcPct val="0"/>
+              </a:spcAft>
+              <a:buClrTx/>
+              <a:buSzTx/>
+              <a:buFontTx/>
+              <a:buNone/>
+              <a:tabLst/>
+            </a:pPr>
+            <a:r>
+              <a:rPr kumimoji="0" lang="zh-CN" altLang="en-US" sz="700" b="0" i="0" u="none" strike="noStrike" kern="0" cap="none" spc="0" normalizeH="0" baseline="0" noProof="0" dirty="0">
+                <a:ln>
+                  <a:noFill/>
+                </a:ln>
+                <a:solidFill>
+                  <a:srgbClr val="000000"/>
+                </a:solidFill>
+                <a:effectLst/>
+                <a:uLnTx/>
+                <a:uFillTx/>
+              </a:rPr>
+              <a:t>驾驶员请求扭矩与实际车辆减速扭矩一致：</a:t>
+            </a:r>
+            <a:endParaRPr kumimoji="0" lang="en-US" altLang="zh-CN" sz="700" b="0" i="0" u="none" strike="noStrike" kern="0" cap="none" spc="0" normalizeH="0" baseline="0" noProof="0" dirty="0">
+              <a:ln>
+                <a:noFill/>
+              </a:ln>
+              <a:solidFill>
+                <a:srgbClr val="000000"/>
+              </a:solidFill>
+              <a:effectLst/>
+              <a:uLnTx/>
+              <a:uFillTx/>
+            </a:endParaRPr>
+          </a:p>
+          <a:p>
+            <a:pPr marL="0" marR="0" indent="0" defTabSz="914400" eaLnBrk="1" fontAlgn="base" latinLnBrk="0" hangingPunct="1">
+              <a:lnSpc>
+                <a:spcPct val="100000"/>
+              </a:lnSpc>
+              <a:spcBef>
+                <a:spcPts val="0"/>
+              </a:spcBef>
+              <a:spcAft>
+                <a:spcPct val="0"/>
+              </a:spcAft>
+              <a:buClrTx/>
+              <a:buSzTx/>
+              <a:buFontTx/>
+              <a:buNone/>
+              <a:tabLst/>
+            </a:pPr>
+            <a:r>
+              <a:rPr kumimoji="0" lang="en-US" altLang="zh-CN" sz="700" b="0" i="0" u="none" strike="noStrike" kern="0" cap="none" spc="0" normalizeH="0" baseline="0" noProof="0" dirty="0" err="1">
+                <a:ln>
+                  <a:noFill/>
+                </a:ln>
+                <a:solidFill>
+                  <a:srgbClr val="000000"/>
+                </a:solidFill>
+                <a:effectLst/>
+                <a:uLnTx/>
+                <a:uFillTx/>
+              </a:rPr>
+              <a:t>DrRqdFrntShftBrkTorq</a:t>
+            </a:r>
+            <a:endParaRPr kumimoji="0" lang="en-US" altLang="zh-CN" sz="700" b="0" i="0" u="none" strike="noStrike" kern="0" cap="none" spc="0" normalizeH="0" baseline="0" noProof="0" dirty="0">
+              <a:ln>
+                <a:noFill/>
+              </a:ln>
+              <a:solidFill>
+                <a:srgbClr val="000000"/>
+              </a:solidFill>
+              <a:effectLst/>
+              <a:uLnTx/>
+              <a:uFillTx/>
+            </a:endParaRPr>
+          </a:p>
+          <a:p>
+            <a:pPr marL="0" marR="0" indent="0" defTabSz="914400" eaLnBrk="1" fontAlgn="base" latinLnBrk="0" hangingPunct="1">
+              <a:lnSpc>
+                <a:spcPct val="100000"/>
+              </a:lnSpc>
+              <a:spcBef>
+                <a:spcPts val="0"/>
+              </a:spcBef>
+              <a:spcAft>
+                <a:spcPct val="0"/>
+              </a:spcAft>
+              <a:buClrTx/>
+              <a:buSzTx/>
+              <a:buFontTx/>
+              <a:buNone/>
+              <a:tabLst/>
+            </a:pPr>
+            <a:r>
+              <a:rPr kumimoji="0" lang="en-US" altLang="zh-CN" sz="700" b="0" i="0" u="none" strike="noStrike" kern="0" cap="none" spc="0" normalizeH="0" baseline="0" noProof="0" dirty="0" err="1">
+                <a:ln>
+                  <a:noFill/>
+                </a:ln>
+                <a:solidFill>
+                  <a:srgbClr val="000000"/>
+                </a:solidFill>
+                <a:effectLst/>
+                <a:uLnTx/>
+                <a:uFillTx/>
+              </a:rPr>
+              <a:t>DrRqdRearShftBrkTorq</a:t>
+            </a:r>
+            <a:endParaRPr kumimoji="0" lang="en-US" altLang="zh-CN" sz="700" b="0" i="0" u="none" strike="noStrike" kern="0" cap="none" spc="0" normalizeH="0" baseline="0" noProof="0" dirty="0">
+              <a:ln>
+                <a:noFill/>
+              </a:ln>
+              <a:solidFill>
+                <a:srgbClr val="000000"/>
+              </a:solidFill>
+              <a:effectLst/>
+              <a:uLnTx/>
+              <a:uFillTx/>
+            </a:endParaRPr>
+          </a:p>
+          <a:p>
+            <a:pPr fontAlgn="base">
+              <a:spcAft>
+                <a:spcPct val="0"/>
+              </a:spcAft>
+            </a:pPr>
+            <a:r>
+              <a:rPr lang="en-US" altLang="zh-CN" sz="700" kern="0" dirty="0" err="1">
+                <a:solidFill>
+                  <a:srgbClr val="000000"/>
+                </a:solidFill>
+              </a:rPr>
+              <a:t>PrDrvShftDrRqstdTorqDff_FD</a:t>
+            </a:r>
+            <a:endParaRPr lang="en-US" altLang="zh-CN" sz="700" kern="0" dirty="0">
+              <a:solidFill>
+                <a:srgbClr val="000000"/>
+              </a:solidFill>
+            </a:endParaRPr>
+          </a:p>
+          <a:p>
+            <a:pPr fontAlgn="base">
+              <a:spcAft>
+                <a:spcPct val="0"/>
+              </a:spcAft>
+            </a:pPr>
+            <a:r>
+              <a:rPr lang="en-US" altLang="zh-CN" sz="700" kern="0" dirty="0" err="1">
+                <a:solidFill>
+                  <a:srgbClr val="000000"/>
+                </a:solidFill>
+              </a:rPr>
+              <a:t>ThScdDrvShftDrRqstdTorqDffHCU_FD</a:t>
+            </a:r>
+            <a:endParaRPr kumimoji="0" lang="zh-CN" altLang="en-US" sz="700" b="0" i="0" u="none" strike="noStrike" kern="0" cap="none" spc="0" normalizeH="0" baseline="0" noProof="0" dirty="0">
+              <a:ln>
+                <a:noFill/>
+              </a:ln>
+              <a:solidFill>
+                <a:srgbClr val="000000"/>
+              </a:solidFill>
+              <a:effectLst/>
+              <a:uLnTx/>
+              <a:uFillTx/>
+            </a:endParaRPr>
+          </a:p>
+        </p:txBody>
+      </p:sp>
+      <p:sp>
+        <p:nvSpPr>
+          <p:cNvPr id="58" name="任意多边形: 形状 57">
+            <a:extLst>
+              <a:ext uri="{FF2B5EF4-FFF2-40B4-BE49-F238E27FC236}">
+                <a16:creationId xmlns:a16="http://schemas.microsoft.com/office/drawing/2014/main" id="{BC6096C1-29A3-A507-6277-C04A2EDB4222}"/>
+              </a:ext>
+            </a:extLst>
+          </p:cNvPr>
+          <p:cNvSpPr/>
+          <p:nvPr/>
+        </p:nvSpPr>
+        <p:spPr>
+          <a:xfrm>
+            <a:off x="5656217" y="1016493"/>
+            <a:ext cx="169817" cy="1491576"/>
+          </a:xfrm>
+          <a:custGeom>
+            <a:avLst/>
+            <a:gdLst>
+              <a:gd name="csX0" fmla="*/ 0 w 169817"/>
+              <a:gd name="csY0" fmla="*/ 0 h 1306286"/>
+              <a:gd name="csX1" fmla="*/ 0 w 169817"/>
+              <a:gd name="csY1" fmla="*/ 1306286 h 1306286"/>
+              <a:gd name="csX2" fmla="*/ 169817 w 169817"/>
+              <a:gd name="csY2" fmla="*/ 1299754 h 1306286"/>
+              <a:gd name="csX3" fmla="*/ 0 w 169817"/>
+              <a:gd name="csY3" fmla="*/ 0 h 1306286"/>
+            </a:gdLst>
+            <a:ahLst/>
+            <a:cxnLst>
+              <a:cxn ang="0">
+                <a:pos x="csX0" y="csY0"/>
+              </a:cxn>
+              <a:cxn ang="0">
+                <a:pos x="csX1" y="csY1"/>
+              </a:cxn>
+              <a:cxn ang="0">
+                <a:pos x="csX2" y="csY2"/>
+              </a:cxn>
+              <a:cxn ang="0">
+                <a:pos x="csX3" y="csY3"/>
+              </a:cxn>
+            </a:cxnLst>
+            <a:rect l="l" t="t" r="r" b="b"/>
+            <a:pathLst>
+              <a:path w="169817" h="1306286">
+                <a:moveTo>
+                  <a:pt x="0" y="0"/>
+                </a:moveTo>
+                <a:lnTo>
+                  <a:pt x="0" y="1306286"/>
+                </a:lnTo>
+                <a:lnTo>
+                  <a:pt x="169817" y="1299754"/>
+                </a:lnTo>
+                <a:lnTo>
+                  <a:pt x="0" y="0"/>
+                </a:lnTo>
+                <a:close/>
+              </a:path>
+            </a:pathLst>
+          </a:custGeom>
+          <a:solidFill>
+            <a:srgbClr val="00B0F0">
+              <a:alpha val="23922"/>
+            </a:srgbClr>
+          </a:solidFill>
+          <a:ln w="12700" cap="flat" cmpd="sng" algn="ctr">
+            <a:noFill/>
+            <a:prstDash val="solid"/>
+          </a:ln>
+          <a:effectLst/>
+        </p:spPr>
+        <p:txBody>
+          <a:bodyPr rot="0" spcFirstLastPara="0" vertOverflow="overflow" horzOverflow="overflow" vert="horz" wrap="square" lIns="90000" tIns="90000" rIns="90000" bIns="90000" numCol="1" spcCol="0" rtlCol="0" fromWordArt="0" anchor="ctr" anchorCtr="0" forceAA="0" compatLnSpc="1">
+            <a:prstTxWarp prst="textNoShape">
+              <a:avLst/>
+            </a:prstTxWarp>
+            <a:noAutofit/>
+          </a:bodyPr>
+          <a:lstStyle/>
+          <a:p>
+            <a:pPr marL="0" marR="0" indent="0" algn="ctr" defTabSz="914400" eaLnBrk="1" fontAlgn="base" latinLnBrk="0" hangingPunct="1">
+              <a:lnSpc>
+                <a:spcPct val="100000"/>
+              </a:lnSpc>
+              <a:spcBef>
+                <a:spcPts val="0"/>
+              </a:spcBef>
+              <a:spcAft>
+                <a:spcPct val="0"/>
+              </a:spcAft>
+              <a:buClrTx/>
+              <a:buSzTx/>
+              <a:buFontTx/>
+              <a:buNone/>
+              <a:tabLst/>
+            </a:pPr>
+            <a:endParaRPr kumimoji="0" lang="zh-CN" altLang="en-US" sz="1200" b="0" i="0" u="none" strike="noStrike" kern="0" cap="none" spc="0" normalizeH="0" baseline="0" noProof="0" dirty="0" err="1">
+              <a:ln>
+                <a:noFill/>
+              </a:ln>
+              <a:effectLst/>
+              <a:uLnTx/>
+              <a:uFillTx/>
+              <a:latin typeface="Tahoma"/>
+              <a:ea typeface="+mn-ea"/>
+              <a:cs typeface="Tahoma" pitchFamily="34" charset="0"/>
+            </a:endParaRPr>
+          </a:p>
+        </p:txBody>
+      </p:sp>
+      <p:sp>
+        <p:nvSpPr>
+          <p:cNvPr id="61" name="矩形 60">
+            <a:extLst>
+              <a:ext uri="{FF2B5EF4-FFF2-40B4-BE49-F238E27FC236}">
+                <a16:creationId xmlns:a16="http://schemas.microsoft.com/office/drawing/2014/main" id="{F23A59DA-857F-6686-C75A-23B541E8A25D}"/>
+              </a:ext>
+            </a:extLst>
+          </p:cNvPr>
+          <p:cNvSpPr/>
+          <p:nvPr/>
+        </p:nvSpPr>
+        <p:spPr>
+          <a:xfrm>
+            <a:off x="6462275" y="210531"/>
+            <a:ext cx="513676" cy="200896"/>
+          </a:xfrm>
+          <a:prstGeom prst="rect">
+            <a:avLst/>
+          </a:prstGeom>
+          <a:solidFill>
+            <a:srgbClr val="C2ECFB"/>
+          </a:solidFill>
+          <a:ln w="12700" cap="flat" cmpd="sng" algn="ctr">
+            <a:noFill/>
+            <a:prstDash val="solid"/>
+          </a:ln>
+          <a:effectLst/>
+        </p:spPr>
+        <p:txBody>
+          <a:bodyPr rot="0" spcFirstLastPara="0" vertOverflow="overflow" horzOverflow="overflow" vert="horz" wrap="square" lIns="90000" tIns="90000" rIns="90000" bIns="90000" numCol="1" spcCol="0" rtlCol="0" fromWordArt="0" anchor="ctr" anchorCtr="0" forceAA="0" compatLnSpc="1">
+            <a:prstTxWarp prst="textNoShape">
+              <a:avLst/>
+            </a:prstTxWarp>
+            <a:noAutofit/>
+          </a:bodyPr>
+          <a:lstStyle/>
+          <a:p>
+            <a:pPr marL="0" marR="0" indent="0" algn="ctr" defTabSz="914400" eaLnBrk="1" fontAlgn="base" latinLnBrk="0" hangingPunct="1">
+              <a:lnSpc>
+                <a:spcPct val="100000"/>
+              </a:lnSpc>
+              <a:spcBef>
+                <a:spcPts val="0"/>
+              </a:spcBef>
+              <a:spcAft>
+                <a:spcPct val="0"/>
+              </a:spcAft>
+              <a:buClrTx/>
+              <a:buSzTx/>
+              <a:buFontTx/>
+              <a:buNone/>
+              <a:tabLst/>
+            </a:pPr>
+            <a:endParaRPr kumimoji="0" lang="zh-CN" altLang="en-US" sz="1200" b="0" i="0" u="none" strike="noStrike" kern="0" cap="none" spc="0" normalizeH="0" baseline="0" noProof="0" dirty="0" err="1">
+              <a:ln>
+                <a:noFill/>
+              </a:ln>
+              <a:effectLst/>
+              <a:uLnTx/>
+              <a:uFillTx/>
+              <a:latin typeface="Tahoma"/>
+              <a:ea typeface="+mn-ea"/>
+              <a:cs typeface="Tahoma" pitchFamily="34" charset="0"/>
+            </a:endParaRPr>
+          </a:p>
+        </p:txBody>
+      </p:sp>
+      <p:sp>
+        <p:nvSpPr>
+          <p:cNvPr id="63" name="文本框 62">
+            <a:extLst>
+              <a:ext uri="{FF2B5EF4-FFF2-40B4-BE49-F238E27FC236}">
+                <a16:creationId xmlns:a16="http://schemas.microsoft.com/office/drawing/2014/main" id="{D3740B67-4928-8C8C-CEC4-BB56D543734E}"/>
+              </a:ext>
+            </a:extLst>
+          </p:cNvPr>
+          <p:cNvSpPr txBox="1"/>
+          <p:nvPr/>
+        </p:nvSpPr>
+        <p:spPr>
+          <a:xfrm>
+            <a:off x="7036617" y="213551"/>
+            <a:ext cx="2009411" cy="215444"/>
+          </a:xfrm>
+          <a:prstGeom prst="rect">
+            <a:avLst/>
+          </a:prstGeom>
+          <a:noFill/>
+        </p:spPr>
+        <p:txBody>
+          <a:bodyPr wrap="square" lIns="0" tIns="0" rIns="0" bIns="0" rtlCol="0">
+            <a:spAutoFit/>
+          </a:bodyPr>
+          <a:lstStyle/>
+          <a:p>
+            <a:pPr marL="0" marR="0" indent="0" defTabSz="914400" eaLnBrk="1" fontAlgn="base" latinLnBrk="0" hangingPunct="1">
+              <a:lnSpc>
+                <a:spcPct val="100000"/>
+              </a:lnSpc>
+              <a:spcBef>
+                <a:spcPts val="0"/>
+              </a:spcBef>
+              <a:spcAft>
+                <a:spcPct val="0"/>
+              </a:spcAft>
+              <a:buClrTx/>
+              <a:buSzTx/>
+              <a:buFontTx/>
+              <a:buNone/>
+              <a:tabLst/>
+            </a:pPr>
+            <a:r>
+              <a:rPr kumimoji="0" lang="zh-CN" altLang="en-US" sz="700" b="0" i="0" u="none" strike="noStrike" kern="0" cap="none" spc="0" normalizeH="0" baseline="0" noProof="0" dirty="0">
+                <a:ln>
+                  <a:noFill/>
+                </a:ln>
+                <a:solidFill>
+                  <a:srgbClr val="000000"/>
+                </a:solidFill>
+                <a:effectLst/>
+                <a:uLnTx/>
+                <a:uFillTx/>
+              </a:rPr>
+              <a:t>此时</a:t>
+            </a:r>
+            <a:r>
+              <a:rPr kumimoji="0" lang="en-US" altLang="zh-CN" sz="700" b="0" i="0" u="none" strike="noStrike" kern="0" cap="none" spc="0" normalizeH="0" baseline="0" noProof="0" dirty="0">
+                <a:ln>
+                  <a:noFill/>
+                </a:ln>
+                <a:solidFill>
+                  <a:srgbClr val="000000"/>
+                </a:solidFill>
+                <a:effectLst/>
+                <a:uLnTx/>
+                <a:uFillTx/>
+              </a:rPr>
+              <a:t>CST</a:t>
+            </a:r>
+            <a:r>
+              <a:rPr kumimoji="0" lang="zh-CN" altLang="en-US" sz="700" b="0" i="0" u="none" strike="noStrike" kern="0" cap="none" spc="0" normalizeH="0" baseline="0" noProof="0" dirty="0">
+                <a:ln>
+                  <a:noFill/>
+                </a:ln>
+                <a:solidFill>
+                  <a:srgbClr val="000000"/>
+                </a:solidFill>
+                <a:effectLst/>
+                <a:uLnTx/>
+                <a:uFillTx/>
+              </a:rPr>
+              <a:t>实际请求的减速扭矩</a:t>
+            </a:r>
+            <a:r>
+              <a:rPr lang="en-US" altLang="zh-CN" sz="700" kern="0" dirty="0">
+                <a:solidFill>
+                  <a:srgbClr val="000000"/>
+                </a:solidFill>
+              </a:rPr>
+              <a:t>&lt;</a:t>
+            </a:r>
+            <a:r>
+              <a:rPr kumimoji="0" lang="zh-CN" altLang="en-US" sz="700" b="0" i="0" u="none" strike="noStrike" kern="0" cap="none" spc="0" normalizeH="0" baseline="0" noProof="0" dirty="0">
+                <a:ln>
+                  <a:noFill/>
+                </a:ln>
+                <a:solidFill>
+                  <a:srgbClr val="000000"/>
+                </a:solidFill>
+                <a:effectLst/>
+                <a:uLnTx/>
+                <a:uFillTx/>
+              </a:rPr>
+              <a:t>驾驶员请求的减速扭矩</a:t>
+            </a:r>
+          </a:p>
+        </p:txBody>
+      </p:sp>
+      <p:cxnSp>
+        <p:nvCxnSpPr>
+          <p:cNvPr id="65" name="Gerader Verbinder 7">
+            <a:extLst>
+              <a:ext uri="{FF2B5EF4-FFF2-40B4-BE49-F238E27FC236}">
+                <a16:creationId xmlns:a16="http://schemas.microsoft.com/office/drawing/2014/main" id="{2FAF935C-B688-3982-E010-A2C1F898AFEB}"/>
+              </a:ext>
+            </a:extLst>
+          </p:cNvPr>
+          <p:cNvCxnSpPr>
+            <a:cxnSpLocks/>
+          </p:cNvCxnSpPr>
+          <p:nvPr/>
+        </p:nvCxnSpPr>
+        <p:spPr>
+          <a:xfrm>
+            <a:off x="6278184" y="624052"/>
+            <a:ext cx="16913" cy="4001491"/>
+          </a:xfrm>
+          <a:prstGeom prst="line">
+            <a:avLst/>
+          </a:prstGeom>
+          <a:noFill/>
+          <a:ln w="6350" cap="rnd" cmpd="sng" algn="ctr">
+            <a:solidFill>
+              <a:schemeClr val="bg2"/>
+            </a:solidFill>
+            <a:prstDash val="lgDash"/>
+            <a:round/>
+          </a:ln>
+          <a:effectLst/>
+        </p:spPr>
+      </p:cxnSp>
+      <p:cxnSp>
+        <p:nvCxnSpPr>
+          <p:cNvPr id="66" name="Gerader Verbinder 30">
+            <a:extLst>
+              <a:ext uri="{FF2B5EF4-FFF2-40B4-BE49-F238E27FC236}">
+                <a16:creationId xmlns:a16="http://schemas.microsoft.com/office/drawing/2014/main" id="{2EF40D64-D6C7-9724-B12F-BE783E2A4E1F}"/>
+              </a:ext>
+            </a:extLst>
+          </p:cNvPr>
+          <p:cNvCxnSpPr>
+            <a:cxnSpLocks/>
+          </p:cNvCxnSpPr>
+          <p:nvPr/>
+        </p:nvCxnSpPr>
+        <p:spPr>
+          <a:xfrm flipH="1">
+            <a:off x="6047295" y="2628766"/>
+            <a:ext cx="249194" cy="1094051"/>
+          </a:xfrm>
+          <a:prstGeom prst="line">
+            <a:avLst/>
+          </a:prstGeom>
+          <a:noFill/>
+          <a:ln w="6350" cap="rnd" cmpd="sng" algn="ctr">
+            <a:solidFill>
+              <a:srgbClr val="E52330"/>
+            </a:solidFill>
+            <a:prstDash val="solid"/>
+            <a:round/>
+          </a:ln>
+          <a:effectLst/>
+        </p:spPr>
+      </p:cxnSp>
+      <p:cxnSp>
+        <p:nvCxnSpPr>
+          <p:cNvPr id="77" name="Gerader Verbinder 26">
+            <a:extLst>
+              <a:ext uri="{FF2B5EF4-FFF2-40B4-BE49-F238E27FC236}">
+                <a16:creationId xmlns:a16="http://schemas.microsoft.com/office/drawing/2014/main" id="{2BB23030-5B90-6B60-0803-B5D1380F7B24}"/>
+              </a:ext>
+            </a:extLst>
+          </p:cNvPr>
+          <p:cNvCxnSpPr/>
+          <p:nvPr/>
+        </p:nvCxnSpPr>
+        <p:spPr>
+          <a:xfrm>
+            <a:off x="566352" y="1417867"/>
+            <a:ext cx="2273642" cy="0"/>
+          </a:xfrm>
+          <a:prstGeom prst="line">
+            <a:avLst/>
+          </a:prstGeom>
+          <a:noFill/>
+          <a:ln w="6350" cap="rnd" cmpd="sng" algn="ctr">
+            <a:solidFill>
+              <a:srgbClr val="E52330"/>
+            </a:solidFill>
+            <a:prstDash val="solid"/>
+            <a:round/>
+          </a:ln>
+          <a:effectLst/>
+        </p:spPr>
+      </p:cxnSp>
+      <p:cxnSp>
+        <p:nvCxnSpPr>
+          <p:cNvPr id="78" name="Gerader Verbinder 27">
+            <a:extLst>
+              <a:ext uri="{FF2B5EF4-FFF2-40B4-BE49-F238E27FC236}">
+                <a16:creationId xmlns:a16="http://schemas.microsoft.com/office/drawing/2014/main" id="{9D1644DF-6346-E32B-2171-B5E15086C3C8}"/>
+              </a:ext>
+            </a:extLst>
+          </p:cNvPr>
+          <p:cNvCxnSpPr>
+            <a:cxnSpLocks/>
+          </p:cNvCxnSpPr>
+          <p:nvPr/>
+        </p:nvCxnSpPr>
+        <p:spPr>
+          <a:xfrm>
+            <a:off x="2834528" y="1417867"/>
+            <a:ext cx="236478" cy="1096732"/>
+          </a:xfrm>
+          <a:prstGeom prst="line">
+            <a:avLst/>
+          </a:prstGeom>
+          <a:noFill/>
+          <a:ln w="6350" cap="rnd" cmpd="sng" algn="ctr">
+            <a:solidFill>
+              <a:srgbClr val="E52330"/>
+            </a:solidFill>
+            <a:prstDash val="solid"/>
+            <a:round/>
+          </a:ln>
+          <a:effectLst/>
+        </p:spPr>
+      </p:cxnSp>
+      <p:sp>
+        <p:nvSpPr>
+          <p:cNvPr id="81" name="Textfeld 34">
+            <a:extLst>
+              <a:ext uri="{FF2B5EF4-FFF2-40B4-BE49-F238E27FC236}">
+                <a16:creationId xmlns:a16="http://schemas.microsoft.com/office/drawing/2014/main" id="{89CCE5C2-4CCF-5592-092A-DA60711FA514}"/>
+              </a:ext>
+            </a:extLst>
+          </p:cNvPr>
+          <p:cNvSpPr txBox="1"/>
+          <p:nvPr/>
+        </p:nvSpPr>
+        <p:spPr>
+          <a:xfrm>
+            <a:off x="785684" y="1131443"/>
+            <a:ext cx="897682" cy="215444"/>
+          </a:xfrm>
+          <a:prstGeom prst="rect">
+            <a:avLst/>
+          </a:prstGeom>
+          <a:noFill/>
+        </p:spPr>
+        <p:txBody>
+          <a:bodyPr wrap="none" lIns="0" tIns="0" rIns="0" bIns="0" rtlCol="0">
+            <a:spAutoFit/>
+          </a:bodyPr>
+          <a:lstStyle/>
+          <a:p>
+            <a:pPr fontAlgn="base">
+              <a:spcAft>
+                <a:spcPct val="0"/>
+              </a:spcAft>
+            </a:pPr>
+            <a:r>
+              <a:rPr lang="zh-CN" altLang="en-US" sz="700" kern="0" dirty="0">
+                <a:solidFill>
+                  <a:srgbClr val="E52330"/>
+                </a:solidFill>
+              </a:rPr>
+              <a:t>机械制动扭矩请求前轴</a:t>
+            </a:r>
+            <a:endParaRPr lang="en-US" altLang="zh-CN" sz="700" kern="0" dirty="0">
+              <a:solidFill>
+                <a:srgbClr val="E52330"/>
+              </a:solidFill>
+            </a:endParaRPr>
+          </a:p>
+          <a:p>
+            <a:pPr fontAlgn="base">
+              <a:spcAft>
+                <a:spcPct val="0"/>
+              </a:spcAft>
+            </a:pPr>
+            <a:r>
+              <a:rPr lang="en-US" altLang="zh-CN" sz="700" kern="0" dirty="0" err="1">
+                <a:solidFill>
+                  <a:srgbClr val="000000"/>
+                </a:solidFill>
+              </a:rPr>
+              <a:t>DrRqdFrntShftBrkTorq</a:t>
+            </a:r>
+            <a:endParaRPr kumimoji="0" lang="de-DE" sz="700" b="0" i="0" u="none" strike="noStrike" kern="0" cap="none" spc="0" normalizeH="0" baseline="0" noProof="0" dirty="0">
+              <a:ln>
+                <a:noFill/>
+              </a:ln>
+              <a:solidFill>
+                <a:srgbClr val="E52330"/>
+              </a:solidFill>
+              <a:effectLst/>
+              <a:uLnTx/>
+              <a:uFillTx/>
+            </a:endParaRPr>
+          </a:p>
+        </p:txBody>
+      </p:sp>
+      <p:cxnSp>
+        <p:nvCxnSpPr>
+          <p:cNvPr id="82" name="Gerader Verbinder 30">
+            <a:extLst>
+              <a:ext uri="{FF2B5EF4-FFF2-40B4-BE49-F238E27FC236}">
+                <a16:creationId xmlns:a16="http://schemas.microsoft.com/office/drawing/2014/main" id="{8AF61131-0D6E-EC5E-4188-D2E0CC455C02}"/>
+              </a:ext>
+            </a:extLst>
+          </p:cNvPr>
+          <p:cNvCxnSpPr>
+            <a:cxnSpLocks/>
+            <a:endCxn id="68" idx="0"/>
+          </p:cNvCxnSpPr>
+          <p:nvPr/>
+        </p:nvCxnSpPr>
+        <p:spPr>
+          <a:xfrm flipH="1">
+            <a:off x="6048103" y="1562944"/>
+            <a:ext cx="230081" cy="938336"/>
+          </a:xfrm>
+          <a:prstGeom prst="line">
+            <a:avLst/>
+          </a:prstGeom>
+          <a:noFill/>
+          <a:ln w="6350" cap="rnd" cmpd="sng" algn="ctr">
+            <a:solidFill>
+              <a:srgbClr val="E52330"/>
+            </a:solidFill>
+            <a:prstDash val="solid"/>
+            <a:round/>
+          </a:ln>
+          <a:effectLst/>
+        </p:spPr>
+      </p:cxnSp>
+      <p:sp>
+        <p:nvSpPr>
+          <p:cNvPr id="87" name="文本框 86">
+            <a:extLst>
+              <a:ext uri="{FF2B5EF4-FFF2-40B4-BE49-F238E27FC236}">
+                <a16:creationId xmlns:a16="http://schemas.microsoft.com/office/drawing/2014/main" id="{05DD48FA-C4D7-80F1-CE3E-3A0E59C0001F}"/>
+              </a:ext>
+            </a:extLst>
+          </p:cNvPr>
+          <p:cNvSpPr txBox="1"/>
+          <p:nvPr/>
+        </p:nvSpPr>
+        <p:spPr>
+          <a:xfrm>
+            <a:off x="3004655" y="1727278"/>
+            <a:ext cx="1675549" cy="276999"/>
+          </a:xfrm>
+          <a:prstGeom prst="rect">
+            <a:avLst/>
+          </a:prstGeom>
+          <a:noFill/>
+        </p:spPr>
+        <p:txBody>
+          <a:bodyPr wrap="square">
+            <a:spAutoFit/>
+          </a:bodyPr>
+          <a:lstStyle/>
+          <a:p>
+            <a:pPr fontAlgn="base">
+              <a:spcAft>
+                <a:spcPct val="0"/>
+              </a:spcAft>
+            </a:pPr>
+            <a:r>
+              <a:rPr lang="en-US" altLang="zh-CN" sz="600" kern="0" dirty="0" err="1">
+                <a:solidFill>
+                  <a:srgbClr val="000000"/>
+                </a:solidFill>
+              </a:rPr>
+              <a:t>VMCTarBrkTqFrnt</a:t>
+            </a:r>
+            <a:r>
+              <a:rPr lang="en-US" altLang="zh-CN" sz="600" kern="0" dirty="0">
+                <a:solidFill>
+                  <a:srgbClr val="000000"/>
+                </a:solidFill>
+              </a:rPr>
+              <a:t>=</a:t>
+            </a:r>
+            <a:r>
+              <a:rPr lang="en-US" altLang="zh-CN" sz="600" kern="0" dirty="0" err="1">
+                <a:solidFill>
+                  <a:srgbClr val="000000"/>
+                </a:solidFill>
+              </a:rPr>
+              <a:t>DrRqdFrntShftBrkTorq</a:t>
+            </a:r>
+            <a:endParaRPr lang="en-US" altLang="zh-CN" sz="600" kern="0" dirty="0">
+              <a:solidFill>
+                <a:srgbClr val="000000"/>
+              </a:solidFill>
+            </a:endParaRPr>
+          </a:p>
+          <a:p>
+            <a:pPr fontAlgn="base">
+              <a:spcAft>
+                <a:spcPct val="0"/>
+              </a:spcAft>
+            </a:pPr>
+            <a:r>
+              <a:rPr lang="en-US" altLang="zh-CN" sz="600" kern="0" dirty="0" err="1">
+                <a:solidFill>
+                  <a:srgbClr val="000000"/>
+                </a:solidFill>
+              </a:rPr>
+              <a:t>VMCTarBrkTqRear</a:t>
+            </a:r>
+            <a:r>
+              <a:rPr lang="en-US" altLang="zh-CN" sz="600" kern="0" dirty="0">
+                <a:solidFill>
+                  <a:srgbClr val="000000"/>
+                </a:solidFill>
+              </a:rPr>
+              <a:t>= </a:t>
+            </a:r>
+            <a:r>
+              <a:rPr lang="en-US" altLang="zh-CN" sz="600" kern="0" dirty="0" err="1">
+                <a:solidFill>
+                  <a:srgbClr val="000000"/>
+                </a:solidFill>
+              </a:rPr>
+              <a:t>DrRqdRearShftBrkTorq</a:t>
+            </a:r>
+            <a:endParaRPr lang="en-US" altLang="zh-CN" sz="600" kern="0" dirty="0">
+              <a:solidFill>
+                <a:srgbClr val="000000"/>
+              </a:solidFill>
+            </a:endParaRPr>
+          </a:p>
+        </p:txBody>
+      </p:sp>
+    </p:spTree>
+    <p:extLst>
+      <p:ext uri="{BB962C8B-B14F-4D97-AF65-F5344CB8AC3E}">
+        <p14:creationId xmlns:p14="http://schemas.microsoft.com/office/powerpoint/2010/main" val="3466089900"/>
+      </p:ext>
+    </p:extLst>
+  </p:cSld>
+  <p:clrMapOvr>
+    <a:masterClrMapping/>
+  </p:clrMapOvr>
+</p:sld>
+</file>
+
+<file path=ppt/slides/slide6.xml><?xml version="1.0" encoding="utf-8"?>
+<p:sld xmlns:a="http://schemas.openxmlformats.org/drawingml/2006/main" xmlns:r="http://schemas.openxmlformats.org/officeDocument/2006/relationships" xmlns:p="http://schemas.openxmlformats.org/presentationml/2006/main">
+  <p:cSld>
+    <p:spTree>
+      <p:nvGrpSpPr>
+        <p:cNvPr id="1" name="">
+          <a:extLst>
+            <a:ext uri="{FF2B5EF4-FFF2-40B4-BE49-F238E27FC236}">
+              <a16:creationId xmlns:a16="http://schemas.microsoft.com/office/drawing/2014/main" id="{9430BE01-313A-4709-1C0E-B4F352BCCA8B}"/>
+            </a:ext>
+          </a:extLst>
+        </p:cNvPr>
+        <p:cNvGrpSpPr/>
+        <p:nvPr/>
+      </p:nvGrpSpPr>
+      <p:grpSpPr>
+        <a:xfrm>
+          <a:off x="0" y="0"/>
+          <a:ext cx="0" cy="0"/>
+          <a:chOff x="0" y="0"/>
+          <a:chExt cx="0" cy="0"/>
+        </a:xfrm>
+      </p:grpSpPr>
+      <p:sp>
+        <p:nvSpPr>
+          <p:cNvPr id="56" name="矩形 55">
+            <a:extLst>
+              <a:ext uri="{FF2B5EF4-FFF2-40B4-BE49-F238E27FC236}">
+                <a16:creationId xmlns:a16="http://schemas.microsoft.com/office/drawing/2014/main" id="{4F0DEF16-81FA-A6D8-EBCC-B4A4D25E0779}"/>
+              </a:ext>
+            </a:extLst>
+          </p:cNvPr>
+          <p:cNvSpPr/>
+          <p:nvPr/>
+        </p:nvSpPr>
+        <p:spPr>
+          <a:xfrm>
+            <a:off x="2869874" y="1006194"/>
+            <a:ext cx="2785749" cy="1498100"/>
+          </a:xfrm>
+          <a:prstGeom prst="rect">
+            <a:avLst/>
+          </a:prstGeom>
+          <a:solidFill>
+            <a:srgbClr val="FF0000">
+              <a:alpha val="34118"/>
+            </a:srgbClr>
+          </a:solidFill>
+          <a:ln w="12700" cap="flat" cmpd="sng" algn="ctr">
+            <a:noFill/>
+            <a:prstDash val="solid"/>
+          </a:ln>
+          <a:effectLst/>
+        </p:spPr>
+        <p:txBody>
+          <a:bodyPr rot="0" spcFirstLastPara="0" vertOverflow="overflow" horzOverflow="overflow" vert="horz" wrap="square" lIns="90000" tIns="90000" rIns="90000" bIns="90000" numCol="1" spcCol="0" rtlCol="0" fromWordArt="0" anchor="ctr" anchorCtr="0" forceAA="0" compatLnSpc="1">
+            <a:prstTxWarp prst="textNoShape">
+              <a:avLst/>
+            </a:prstTxWarp>
+            <a:noAutofit/>
+          </a:bodyPr>
+          <a:lstStyle/>
+          <a:p>
+            <a:pPr marL="0" marR="0" indent="0" algn="ctr" defTabSz="914400" eaLnBrk="1" fontAlgn="base" latinLnBrk="0" hangingPunct="1">
+              <a:lnSpc>
+                <a:spcPct val="100000"/>
+              </a:lnSpc>
+              <a:spcBef>
+                <a:spcPts val="0"/>
+              </a:spcBef>
+              <a:spcAft>
+                <a:spcPct val="0"/>
+              </a:spcAft>
+              <a:buClrTx/>
+              <a:buSzTx/>
+              <a:buFontTx/>
+              <a:buNone/>
+              <a:tabLst/>
+            </a:pPr>
+            <a:endParaRPr kumimoji="0" lang="zh-CN" altLang="en-US" sz="1200" b="0" i="0" u="none" strike="noStrike" kern="0" cap="none" spc="0" normalizeH="0" baseline="0" noProof="0" dirty="0" err="1">
+              <a:ln>
+                <a:noFill/>
+              </a:ln>
+              <a:effectLst/>
+              <a:uLnTx/>
+              <a:uFillTx/>
+              <a:latin typeface="Tahoma"/>
+              <a:ea typeface="+mn-ea"/>
+              <a:cs typeface="Tahoma" pitchFamily="34" charset="0"/>
+            </a:endParaRPr>
+          </a:p>
+        </p:txBody>
+      </p:sp>
+      <p:sp>
+        <p:nvSpPr>
+          <p:cNvPr id="53" name="矩形 52">
+            <a:extLst>
+              <a:ext uri="{FF2B5EF4-FFF2-40B4-BE49-F238E27FC236}">
+                <a16:creationId xmlns:a16="http://schemas.microsoft.com/office/drawing/2014/main" id="{C880D6D2-09B5-5C62-A8E9-041CEB90C5C3}"/>
+              </a:ext>
+            </a:extLst>
+          </p:cNvPr>
+          <p:cNvSpPr/>
+          <p:nvPr/>
+        </p:nvSpPr>
+        <p:spPr>
+          <a:xfrm>
+            <a:off x="568411" y="1010313"/>
+            <a:ext cx="2272648" cy="1491923"/>
+          </a:xfrm>
+          <a:prstGeom prst="rect">
+            <a:avLst/>
+          </a:prstGeom>
+          <a:solidFill>
+            <a:srgbClr val="FF0000">
+              <a:alpha val="34118"/>
+            </a:srgbClr>
+          </a:solidFill>
+          <a:ln w="12700" cap="flat" cmpd="sng" algn="ctr">
+            <a:noFill/>
+            <a:prstDash val="solid"/>
+          </a:ln>
+          <a:effectLst/>
+        </p:spPr>
+        <p:txBody>
+          <a:bodyPr rot="0" spcFirstLastPara="0" vertOverflow="overflow" horzOverflow="overflow" vert="horz" wrap="square" lIns="90000" tIns="90000" rIns="90000" bIns="90000" numCol="1" spcCol="0" rtlCol="0" fromWordArt="0" anchor="ctr" anchorCtr="0" forceAA="0" compatLnSpc="1">
+            <a:prstTxWarp prst="textNoShape">
+              <a:avLst/>
+            </a:prstTxWarp>
+            <a:noAutofit/>
+          </a:bodyPr>
+          <a:lstStyle/>
+          <a:p>
+            <a:pPr marL="0" marR="0" indent="0" algn="ctr" defTabSz="914400" eaLnBrk="1" fontAlgn="base" latinLnBrk="0" hangingPunct="1">
+              <a:lnSpc>
+                <a:spcPct val="100000"/>
+              </a:lnSpc>
+              <a:spcBef>
+                <a:spcPts val="0"/>
+              </a:spcBef>
+              <a:spcAft>
+                <a:spcPct val="0"/>
+              </a:spcAft>
+              <a:buClrTx/>
+              <a:buSzTx/>
+              <a:buFontTx/>
+              <a:buNone/>
+              <a:tabLst/>
+            </a:pPr>
+            <a:endParaRPr kumimoji="0" lang="zh-CN" altLang="en-US" sz="1200" b="0" i="0" u="none" strike="noStrike" kern="0" cap="none" spc="0" normalizeH="0" baseline="0" noProof="0" dirty="0" err="1">
+              <a:ln>
+                <a:noFill/>
+              </a:ln>
+              <a:effectLst/>
+              <a:uLnTx/>
+              <a:uFillTx/>
+              <a:latin typeface="Tahoma"/>
+              <a:ea typeface="+mn-ea"/>
+              <a:cs typeface="Tahoma" pitchFamily="34" charset="0"/>
+            </a:endParaRPr>
+          </a:p>
+        </p:txBody>
+      </p:sp>
+      <p:sp>
+        <p:nvSpPr>
+          <p:cNvPr id="68" name="任意多边形: 形状 67">
+            <a:extLst>
+              <a:ext uri="{FF2B5EF4-FFF2-40B4-BE49-F238E27FC236}">
+                <a16:creationId xmlns:a16="http://schemas.microsoft.com/office/drawing/2014/main" id="{0D6076A3-C030-7B57-4D7D-E4EEBD1EDAFB}"/>
+              </a:ext>
+            </a:extLst>
+          </p:cNvPr>
+          <p:cNvSpPr/>
+          <p:nvPr/>
+        </p:nvSpPr>
+        <p:spPr>
+          <a:xfrm>
+            <a:off x="6048103" y="993934"/>
+            <a:ext cx="248194" cy="1514136"/>
+          </a:xfrm>
+          <a:custGeom>
+            <a:avLst/>
+            <a:gdLst>
+              <a:gd name="csX0" fmla="*/ 0 w 248194"/>
+              <a:gd name="csY0" fmla="*/ 1449977 h 1456509"/>
+              <a:gd name="csX1" fmla="*/ 248194 w 248194"/>
+              <a:gd name="csY1" fmla="*/ 1456509 h 1456509"/>
+              <a:gd name="csX2" fmla="*/ 248194 w 248194"/>
+              <a:gd name="csY2" fmla="*/ 0 h 1456509"/>
+              <a:gd name="csX3" fmla="*/ 0 w 248194"/>
+              <a:gd name="csY3" fmla="*/ 1449977 h 1456509"/>
+            </a:gdLst>
+            <a:ahLst/>
+            <a:cxnLst>
+              <a:cxn ang="0">
+                <a:pos x="csX0" y="csY0"/>
+              </a:cxn>
+              <a:cxn ang="0">
+                <a:pos x="csX1" y="csY1"/>
+              </a:cxn>
+              <a:cxn ang="0">
+                <a:pos x="csX2" y="csY2"/>
+              </a:cxn>
+              <a:cxn ang="0">
+                <a:pos x="csX3" y="csY3"/>
+              </a:cxn>
+            </a:cxnLst>
+            <a:rect l="l" t="t" r="r" b="b"/>
+            <a:pathLst>
+              <a:path w="248194" h="1456509">
+                <a:moveTo>
+                  <a:pt x="0" y="1449977"/>
+                </a:moveTo>
+                <a:lnTo>
+                  <a:pt x="248194" y="1456509"/>
+                </a:lnTo>
+                <a:lnTo>
+                  <a:pt x="248194" y="0"/>
+                </a:lnTo>
+                <a:lnTo>
+                  <a:pt x="0" y="1449977"/>
+                </a:lnTo>
+                <a:close/>
+              </a:path>
+            </a:pathLst>
+          </a:custGeom>
+          <a:solidFill>
+            <a:srgbClr val="FFA8A8">
+              <a:alpha val="36078"/>
+            </a:srgbClr>
+          </a:solidFill>
+          <a:ln w="12700" cap="flat" cmpd="sng" algn="ctr">
+            <a:noFill/>
+            <a:prstDash val="solid"/>
+          </a:ln>
+          <a:effectLst/>
+        </p:spPr>
+        <p:txBody>
+          <a:bodyPr rot="0" spcFirstLastPara="0" vertOverflow="overflow" horzOverflow="overflow" vert="horz" wrap="square" lIns="90000" tIns="90000" rIns="90000" bIns="90000" numCol="1" spcCol="0" rtlCol="0" fromWordArt="0" anchor="ctr" anchorCtr="0" forceAA="0" compatLnSpc="1">
+            <a:prstTxWarp prst="textNoShape">
+              <a:avLst/>
+            </a:prstTxWarp>
+            <a:noAutofit/>
+          </a:bodyPr>
+          <a:lstStyle/>
+          <a:p>
+            <a:pPr marL="0" marR="0" indent="0" algn="ctr" defTabSz="914400" eaLnBrk="1" fontAlgn="base" latinLnBrk="0" hangingPunct="1">
+              <a:lnSpc>
+                <a:spcPct val="100000"/>
+              </a:lnSpc>
+              <a:spcBef>
+                <a:spcPts val="0"/>
+              </a:spcBef>
+              <a:spcAft>
+                <a:spcPct val="0"/>
+              </a:spcAft>
+              <a:buClrTx/>
+              <a:buSzTx/>
+              <a:buFontTx/>
+              <a:buNone/>
+              <a:tabLst/>
+            </a:pPr>
+            <a:endParaRPr kumimoji="0" lang="zh-CN" altLang="en-US" sz="1200" b="0" i="0" u="none" strike="noStrike" kern="0" cap="none" spc="0" normalizeH="0" baseline="0" noProof="0" dirty="0" err="1">
+              <a:ln>
+                <a:noFill/>
+              </a:ln>
+              <a:effectLst/>
+              <a:uLnTx/>
+              <a:uFillTx/>
+              <a:latin typeface="Tahoma"/>
+              <a:ea typeface="+mn-ea"/>
+              <a:cs typeface="Tahoma" pitchFamily="34" charset="0"/>
+            </a:endParaRPr>
+          </a:p>
+        </p:txBody>
+      </p:sp>
+      <p:sp>
+        <p:nvSpPr>
+          <p:cNvPr id="2" name="Titel 1">
+            <a:extLst>
+              <a:ext uri="{FF2B5EF4-FFF2-40B4-BE49-F238E27FC236}">
+                <a16:creationId xmlns:a16="http://schemas.microsoft.com/office/drawing/2014/main" id="{8237AA19-C30B-27EE-93F5-62B520FCDF5A}"/>
+              </a:ext>
+            </a:extLst>
+          </p:cNvPr>
+          <p:cNvSpPr>
+            <a:spLocks noGrp="1"/>
+          </p:cNvSpPr>
+          <p:nvPr>
+            <p:ph type="title"/>
+          </p:nvPr>
+        </p:nvSpPr>
+        <p:spPr/>
+        <p:txBody>
+          <a:bodyPr/>
+          <a:lstStyle/>
+          <a:p>
+            <a:r>
+              <a:rPr lang="de-DE" dirty="0"/>
+              <a:t>normal CST Scenario</a:t>
+            </a:r>
+          </a:p>
+        </p:txBody>
+      </p:sp>
+      <p:sp>
+        <p:nvSpPr>
+          <p:cNvPr id="3" name="Fußzeilenplatzhalter 2">
+            <a:extLst>
+              <a:ext uri="{FF2B5EF4-FFF2-40B4-BE49-F238E27FC236}">
+                <a16:creationId xmlns:a16="http://schemas.microsoft.com/office/drawing/2014/main" id="{9F4B3A91-BBC0-A52E-BA8C-DFACACE102CF}"/>
+              </a:ext>
+            </a:extLst>
+          </p:cNvPr>
+          <p:cNvSpPr>
+            <a:spLocks noGrp="1"/>
+          </p:cNvSpPr>
+          <p:nvPr>
+            <p:ph type="ftr" sz="quarter" idx="11"/>
+          </p:nvPr>
+        </p:nvSpPr>
+        <p:spPr/>
+        <p:txBody>
+          <a:bodyPr/>
+          <a:lstStyle/>
+          <a:p>
+            <a:endParaRPr lang="de-DE" dirty="0"/>
+          </a:p>
+        </p:txBody>
+      </p:sp>
+      <p:sp>
+        <p:nvSpPr>
+          <p:cNvPr id="4" name="Foliennummernplatzhalter 3">
+            <a:extLst>
+              <a:ext uri="{FF2B5EF4-FFF2-40B4-BE49-F238E27FC236}">
+                <a16:creationId xmlns:a16="http://schemas.microsoft.com/office/drawing/2014/main" id="{B86DB6EC-ACF2-8991-1588-EA13031DD4B3}"/>
+              </a:ext>
+            </a:extLst>
+          </p:cNvPr>
+          <p:cNvSpPr>
+            <a:spLocks noGrp="1"/>
+          </p:cNvSpPr>
+          <p:nvPr>
+            <p:ph type="sldNum" sz="quarter" idx="12"/>
+          </p:nvPr>
+        </p:nvSpPr>
+        <p:spPr/>
+        <p:txBody>
+          <a:bodyPr/>
+          <a:lstStyle/>
+          <a:p>
+            <a:fld id="{AE839375-43AA-4A5D-B991-4343C4570BCB}" type="slidenum">
+              <a:rPr lang="de-DE" smtClean="0"/>
+              <a:t>6</a:t>
+            </a:fld>
+            <a:endParaRPr lang="de-DE" dirty="0"/>
+          </a:p>
+        </p:txBody>
+      </p:sp>
+      <p:cxnSp>
+        <p:nvCxnSpPr>
+          <p:cNvPr id="6" name="Gerader Verbinder 5">
+            <a:extLst>
+              <a:ext uri="{FF2B5EF4-FFF2-40B4-BE49-F238E27FC236}">
+                <a16:creationId xmlns:a16="http://schemas.microsoft.com/office/drawing/2014/main" id="{DB8B5E70-6EC2-38F6-7E27-0C103A088C23}"/>
+              </a:ext>
+            </a:extLst>
+          </p:cNvPr>
+          <p:cNvCxnSpPr>
+            <a:cxnSpLocks/>
+          </p:cNvCxnSpPr>
+          <p:nvPr/>
+        </p:nvCxnSpPr>
+        <p:spPr>
+          <a:xfrm>
+            <a:off x="568411" y="753761"/>
+            <a:ext cx="0" cy="1760838"/>
+          </a:xfrm>
+          <a:prstGeom prst="line">
+            <a:avLst/>
+          </a:prstGeom>
+          <a:noFill/>
+          <a:ln w="6350" cap="rnd" cmpd="sng" algn="ctr">
+            <a:solidFill>
+              <a:schemeClr val="bg2"/>
+            </a:solidFill>
+            <a:prstDash val="solid"/>
+            <a:round/>
+            <a:headEnd type="triangle" w="med" len="med"/>
+            <a:tailEnd type="none" w="med" len="med"/>
+          </a:ln>
+          <a:effectLst/>
+        </p:spPr>
+      </p:cxnSp>
+      <p:cxnSp>
+        <p:nvCxnSpPr>
+          <p:cNvPr id="7" name="Gerader Verbinder 6">
+            <a:extLst>
+              <a:ext uri="{FF2B5EF4-FFF2-40B4-BE49-F238E27FC236}">
+                <a16:creationId xmlns:a16="http://schemas.microsoft.com/office/drawing/2014/main" id="{CB2524D5-614D-CD76-9DC2-228192DC731C}"/>
+              </a:ext>
+            </a:extLst>
+          </p:cNvPr>
+          <p:cNvCxnSpPr>
+            <a:cxnSpLocks/>
+          </p:cNvCxnSpPr>
+          <p:nvPr/>
+        </p:nvCxnSpPr>
+        <p:spPr>
+          <a:xfrm flipH="1">
+            <a:off x="568411" y="2508417"/>
+            <a:ext cx="7963930" cy="0"/>
+          </a:xfrm>
+          <a:prstGeom prst="line">
+            <a:avLst/>
+          </a:prstGeom>
+          <a:noFill/>
+          <a:ln w="6350" cap="rnd" cmpd="sng" algn="ctr">
+            <a:solidFill>
+              <a:schemeClr val="bg2"/>
+            </a:solidFill>
+            <a:prstDash val="solid"/>
+            <a:round/>
+            <a:headEnd type="triangle" w="med" len="med"/>
+            <a:tailEnd type="none" w="med" len="med"/>
+          </a:ln>
+          <a:effectLst/>
+        </p:spPr>
+      </p:cxnSp>
+      <p:sp>
+        <p:nvSpPr>
+          <p:cNvPr id="11" name="Textfeld 10">
+            <a:extLst>
+              <a:ext uri="{FF2B5EF4-FFF2-40B4-BE49-F238E27FC236}">
+                <a16:creationId xmlns:a16="http://schemas.microsoft.com/office/drawing/2014/main" id="{929CDE56-509D-1CAE-272E-C4F11112D023}"/>
+              </a:ext>
+            </a:extLst>
+          </p:cNvPr>
+          <p:cNvSpPr txBox="1"/>
+          <p:nvPr/>
+        </p:nvSpPr>
+        <p:spPr>
+          <a:xfrm rot="16200000">
+            <a:off x="208235" y="1752342"/>
+            <a:ext cx="307777" cy="184666"/>
+          </a:xfrm>
+          <a:prstGeom prst="rect">
+            <a:avLst/>
+          </a:prstGeom>
+          <a:noFill/>
+        </p:spPr>
+        <p:txBody>
+          <a:bodyPr wrap="none" lIns="0" tIns="0" rIns="0" bIns="0" rtlCol="0">
+            <a:spAutoFit/>
+          </a:bodyPr>
+          <a:lstStyle/>
+          <a:p>
+            <a:pPr marL="0" marR="0" indent="0" defTabSz="914400" eaLnBrk="1" fontAlgn="base" latinLnBrk="0" hangingPunct="1">
+              <a:lnSpc>
+                <a:spcPct val="100000"/>
+              </a:lnSpc>
+              <a:spcBef>
+                <a:spcPts val="0"/>
+              </a:spcBef>
+              <a:spcAft>
+                <a:spcPct val="0"/>
+              </a:spcAft>
+              <a:buClrTx/>
+              <a:buSzTx/>
+              <a:buFontTx/>
+              <a:buNone/>
+              <a:tabLst/>
+            </a:pPr>
+            <a:r>
+              <a:rPr lang="zh-CN" altLang="en-US" sz="1200" kern="0" dirty="0">
+                <a:solidFill>
+                  <a:srgbClr val="000000"/>
+                </a:solidFill>
+              </a:rPr>
+              <a:t>扭矩</a:t>
+            </a:r>
+            <a:endParaRPr kumimoji="0" lang="de-DE" sz="1200" b="0" i="0" u="none" strike="noStrike" kern="0" cap="none" spc="0" normalizeH="0" baseline="0" noProof="0" dirty="0">
+              <a:ln>
+                <a:noFill/>
+              </a:ln>
+              <a:solidFill>
+                <a:srgbClr val="000000"/>
+              </a:solidFill>
+              <a:effectLst/>
+              <a:uLnTx/>
+              <a:uFillTx/>
+            </a:endParaRPr>
+          </a:p>
+        </p:txBody>
+      </p:sp>
+      <p:sp>
+        <p:nvSpPr>
+          <p:cNvPr id="12" name="Textfeld 11">
+            <a:extLst>
+              <a:ext uri="{FF2B5EF4-FFF2-40B4-BE49-F238E27FC236}">
+                <a16:creationId xmlns:a16="http://schemas.microsoft.com/office/drawing/2014/main" id="{4760503F-8113-A254-8F70-B4E062A445AC}"/>
+              </a:ext>
+            </a:extLst>
+          </p:cNvPr>
+          <p:cNvSpPr txBox="1"/>
+          <p:nvPr/>
+        </p:nvSpPr>
+        <p:spPr>
+          <a:xfrm>
+            <a:off x="3884328" y="4631724"/>
+            <a:ext cx="298159" cy="184666"/>
+          </a:xfrm>
+          <a:prstGeom prst="rect">
+            <a:avLst/>
+          </a:prstGeom>
+          <a:noFill/>
+        </p:spPr>
+        <p:txBody>
+          <a:bodyPr wrap="none" lIns="0" tIns="0" rIns="0" bIns="0" rtlCol="0">
+            <a:spAutoFit/>
+          </a:bodyPr>
+          <a:lstStyle/>
+          <a:p>
+            <a:pPr marL="0" marR="0" indent="0" defTabSz="914400" eaLnBrk="1" fontAlgn="base" latinLnBrk="0" hangingPunct="1">
+              <a:lnSpc>
+                <a:spcPct val="100000"/>
+              </a:lnSpc>
+              <a:spcBef>
+                <a:spcPts val="0"/>
+              </a:spcBef>
+              <a:spcAft>
+                <a:spcPct val="0"/>
+              </a:spcAft>
+              <a:buClrTx/>
+              <a:buSzTx/>
+              <a:buFontTx/>
+              <a:buNone/>
+              <a:tabLst/>
+            </a:pPr>
+            <a:r>
+              <a:rPr lang="de-DE" sz="1200" kern="0" dirty="0">
+                <a:solidFill>
+                  <a:srgbClr val="000000"/>
+                </a:solidFill>
+              </a:rPr>
+              <a:t>time</a:t>
+            </a:r>
+            <a:endParaRPr kumimoji="0" lang="de-DE" sz="1200" b="0" i="0" u="none" strike="noStrike" kern="0" cap="none" spc="0" normalizeH="0" baseline="0" noProof="0" dirty="0">
+              <a:ln>
+                <a:noFill/>
+              </a:ln>
+              <a:solidFill>
+                <a:srgbClr val="000000"/>
+              </a:solidFill>
+              <a:effectLst/>
+              <a:uLnTx/>
+              <a:uFillTx/>
+            </a:endParaRPr>
+          </a:p>
+        </p:txBody>
+      </p:sp>
+      <p:cxnSp>
+        <p:nvCxnSpPr>
+          <p:cNvPr id="14" name="Gerader Verbinder 13">
+            <a:extLst>
+              <a:ext uri="{FF2B5EF4-FFF2-40B4-BE49-F238E27FC236}">
+                <a16:creationId xmlns:a16="http://schemas.microsoft.com/office/drawing/2014/main" id="{3B6329B8-F529-A4A7-03AA-2239813586A9}"/>
+              </a:ext>
+            </a:extLst>
+          </p:cNvPr>
+          <p:cNvCxnSpPr>
+            <a:cxnSpLocks/>
+          </p:cNvCxnSpPr>
+          <p:nvPr/>
+        </p:nvCxnSpPr>
+        <p:spPr>
+          <a:xfrm flipH="1">
+            <a:off x="2842053" y="753761"/>
+            <a:ext cx="7997" cy="3855309"/>
+          </a:xfrm>
+          <a:prstGeom prst="line">
+            <a:avLst/>
+          </a:prstGeom>
+          <a:noFill/>
+          <a:ln w="6350" cap="rnd" cmpd="sng" algn="ctr">
+            <a:solidFill>
+              <a:schemeClr val="bg2"/>
+            </a:solidFill>
+            <a:prstDash val="lgDash"/>
+            <a:round/>
+          </a:ln>
+          <a:effectLst/>
+        </p:spPr>
+      </p:cxnSp>
+      <p:cxnSp>
+        <p:nvCxnSpPr>
+          <p:cNvPr id="15" name="Gerader Verbinder 14">
+            <a:extLst>
+              <a:ext uri="{FF2B5EF4-FFF2-40B4-BE49-F238E27FC236}">
+                <a16:creationId xmlns:a16="http://schemas.microsoft.com/office/drawing/2014/main" id="{1D062756-E85D-0EDA-DD5C-2A063FFBE1B7}"/>
+              </a:ext>
+            </a:extLst>
+          </p:cNvPr>
+          <p:cNvCxnSpPr>
+            <a:cxnSpLocks/>
+          </p:cNvCxnSpPr>
+          <p:nvPr/>
+        </p:nvCxnSpPr>
+        <p:spPr>
+          <a:xfrm>
+            <a:off x="5823119" y="675354"/>
+            <a:ext cx="4" cy="3939895"/>
+          </a:xfrm>
+          <a:prstGeom prst="line">
+            <a:avLst/>
+          </a:prstGeom>
+          <a:noFill/>
+          <a:ln w="6350" cap="rnd" cmpd="sng" algn="ctr">
+            <a:solidFill>
+              <a:schemeClr val="bg2"/>
+            </a:solidFill>
+            <a:prstDash val="lgDash"/>
+            <a:round/>
+          </a:ln>
+          <a:effectLst/>
+        </p:spPr>
+      </p:cxnSp>
+      <p:cxnSp>
+        <p:nvCxnSpPr>
+          <p:cNvPr id="17" name="Gerader Verbinder 16">
+            <a:extLst>
+              <a:ext uri="{FF2B5EF4-FFF2-40B4-BE49-F238E27FC236}">
+                <a16:creationId xmlns:a16="http://schemas.microsoft.com/office/drawing/2014/main" id="{844F0597-A83D-6B32-88F6-E7308FB84349}"/>
+              </a:ext>
+            </a:extLst>
+          </p:cNvPr>
+          <p:cNvCxnSpPr>
+            <a:cxnSpLocks/>
+          </p:cNvCxnSpPr>
+          <p:nvPr/>
+        </p:nvCxnSpPr>
+        <p:spPr>
+          <a:xfrm>
+            <a:off x="568411" y="4046152"/>
+            <a:ext cx="0" cy="581451"/>
+          </a:xfrm>
+          <a:prstGeom prst="line">
+            <a:avLst/>
+          </a:prstGeom>
+          <a:noFill/>
+          <a:ln w="6350" cap="rnd" cmpd="sng" algn="ctr">
+            <a:solidFill>
+              <a:schemeClr val="bg2"/>
+            </a:solidFill>
+            <a:prstDash val="solid"/>
+            <a:round/>
+            <a:headEnd type="triangle" w="med" len="med"/>
+            <a:tailEnd type="none" w="med" len="med"/>
+          </a:ln>
+          <a:effectLst/>
+        </p:spPr>
+      </p:cxnSp>
+      <p:sp>
+        <p:nvSpPr>
+          <p:cNvPr id="18" name="Textfeld 17">
+            <a:extLst>
+              <a:ext uri="{FF2B5EF4-FFF2-40B4-BE49-F238E27FC236}">
+                <a16:creationId xmlns:a16="http://schemas.microsoft.com/office/drawing/2014/main" id="{F5BD8C63-A544-9EAE-F014-9CC4FBFA6148}"/>
+              </a:ext>
+            </a:extLst>
+          </p:cNvPr>
+          <p:cNvSpPr txBox="1"/>
+          <p:nvPr/>
+        </p:nvSpPr>
+        <p:spPr>
+          <a:xfrm rot="16200000">
+            <a:off x="-101994" y="4155144"/>
+            <a:ext cx="923330" cy="184666"/>
+          </a:xfrm>
+          <a:prstGeom prst="rect">
+            <a:avLst/>
+          </a:prstGeom>
+          <a:noFill/>
+        </p:spPr>
+        <p:txBody>
+          <a:bodyPr wrap="none" lIns="0" tIns="0" rIns="0" bIns="0" rtlCol="0">
+            <a:spAutoFit/>
+          </a:bodyPr>
+          <a:lstStyle/>
+          <a:p>
+            <a:pPr marL="0" marR="0" indent="0" defTabSz="914400" eaLnBrk="1" fontAlgn="base" latinLnBrk="0" hangingPunct="1">
+              <a:lnSpc>
+                <a:spcPct val="100000"/>
+              </a:lnSpc>
+              <a:spcBef>
+                <a:spcPts val="0"/>
+              </a:spcBef>
+              <a:spcAft>
+                <a:spcPct val="0"/>
+              </a:spcAft>
+              <a:buClrTx/>
+              <a:buSzTx/>
+              <a:buFontTx/>
+              <a:buNone/>
+              <a:tabLst/>
+            </a:pPr>
+            <a:r>
+              <a:rPr lang="zh-CN" altLang="en-US" sz="1200" kern="0" dirty="0">
+                <a:solidFill>
+                  <a:srgbClr val="00B050"/>
+                </a:solidFill>
+              </a:rPr>
+              <a:t>电机请求模式</a:t>
+            </a:r>
+            <a:endParaRPr kumimoji="0" lang="de-DE" sz="1200" b="0" i="0" u="none" strike="noStrike" kern="0" cap="none" spc="0" normalizeH="0" baseline="0" noProof="0" dirty="0">
+              <a:ln>
+                <a:noFill/>
+              </a:ln>
+              <a:solidFill>
+                <a:srgbClr val="00B050"/>
+              </a:solidFill>
+              <a:effectLst/>
+              <a:uLnTx/>
+              <a:uFillTx/>
+            </a:endParaRPr>
+          </a:p>
+        </p:txBody>
+      </p:sp>
+      <p:cxnSp>
+        <p:nvCxnSpPr>
+          <p:cNvPr id="22" name="Gerader Verbinder 21">
+            <a:extLst>
+              <a:ext uri="{FF2B5EF4-FFF2-40B4-BE49-F238E27FC236}">
+                <a16:creationId xmlns:a16="http://schemas.microsoft.com/office/drawing/2014/main" id="{70B19FDB-D363-27AC-6F36-27D7F81C4F04}"/>
+              </a:ext>
+            </a:extLst>
+          </p:cNvPr>
+          <p:cNvCxnSpPr>
+            <a:cxnSpLocks/>
+          </p:cNvCxnSpPr>
+          <p:nvPr/>
+        </p:nvCxnSpPr>
+        <p:spPr>
+          <a:xfrm flipH="1">
+            <a:off x="568411" y="4625543"/>
+            <a:ext cx="7963930" cy="0"/>
+          </a:xfrm>
+          <a:prstGeom prst="line">
+            <a:avLst/>
+          </a:prstGeom>
+          <a:noFill/>
+          <a:ln w="6350" cap="rnd" cmpd="sng" algn="ctr">
+            <a:solidFill>
+              <a:schemeClr val="bg2"/>
+            </a:solidFill>
+            <a:prstDash val="solid"/>
+            <a:round/>
+            <a:headEnd type="triangle" w="med" len="med"/>
+            <a:tailEnd type="none" w="med" len="med"/>
+          </a:ln>
+          <a:effectLst/>
+        </p:spPr>
+      </p:cxnSp>
+      <p:cxnSp>
+        <p:nvCxnSpPr>
+          <p:cNvPr id="27" name="Gerader Verbinder 26">
+            <a:extLst>
+              <a:ext uri="{FF2B5EF4-FFF2-40B4-BE49-F238E27FC236}">
+                <a16:creationId xmlns:a16="http://schemas.microsoft.com/office/drawing/2014/main" id="{2B0BDDF5-2D2F-38E0-9689-2A8ED648119F}"/>
+              </a:ext>
+            </a:extLst>
+          </p:cNvPr>
+          <p:cNvCxnSpPr/>
+          <p:nvPr/>
+        </p:nvCxnSpPr>
+        <p:spPr>
+          <a:xfrm>
+            <a:off x="568411" y="1686697"/>
+            <a:ext cx="2273642" cy="0"/>
+          </a:xfrm>
+          <a:prstGeom prst="line">
+            <a:avLst/>
+          </a:prstGeom>
+          <a:noFill/>
+          <a:ln w="6350" cap="rnd" cmpd="sng" algn="ctr">
+            <a:solidFill>
+              <a:srgbClr val="E52330"/>
+            </a:solidFill>
+            <a:prstDash val="solid"/>
+            <a:round/>
+          </a:ln>
+          <a:effectLst/>
+        </p:spPr>
+      </p:cxnSp>
+      <p:cxnSp>
+        <p:nvCxnSpPr>
+          <p:cNvPr id="28" name="Gerader Verbinder 27">
+            <a:extLst>
+              <a:ext uri="{FF2B5EF4-FFF2-40B4-BE49-F238E27FC236}">
+                <a16:creationId xmlns:a16="http://schemas.microsoft.com/office/drawing/2014/main" id="{AFA49F4A-2C00-F944-3EFD-B9BB5C6067CB}"/>
+              </a:ext>
+            </a:extLst>
+          </p:cNvPr>
+          <p:cNvCxnSpPr>
+            <a:cxnSpLocks/>
+          </p:cNvCxnSpPr>
+          <p:nvPr/>
+        </p:nvCxnSpPr>
+        <p:spPr>
+          <a:xfrm>
+            <a:off x="2850050" y="1686697"/>
+            <a:ext cx="214426" cy="815540"/>
+          </a:xfrm>
+          <a:prstGeom prst="line">
+            <a:avLst/>
+          </a:prstGeom>
+          <a:noFill/>
+          <a:ln w="6350" cap="rnd" cmpd="sng" algn="ctr">
+            <a:solidFill>
+              <a:srgbClr val="E52330"/>
+            </a:solidFill>
+            <a:prstDash val="solid"/>
+            <a:round/>
+          </a:ln>
+          <a:effectLst/>
+        </p:spPr>
+      </p:cxnSp>
+      <p:cxnSp>
+        <p:nvCxnSpPr>
+          <p:cNvPr id="31" name="Gerader Verbinder 30">
+            <a:extLst>
+              <a:ext uri="{FF2B5EF4-FFF2-40B4-BE49-F238E27FC236}">
+                <a16:creationId xmlns:a16="http://schemas.microsoft.com/office/drawing/2014/main" id="{54C929E7-9165-2810-049B-7B80248BBE11}"/>
+              </a:ext>
+            </a:extLst>
+          </p:cNvPr>
+          <p:cNvCxnSpPr>
+            <a:cxnSpLocks/>
+            <a:stCxn id="68" idx="2"/>
+          </p:cNvCxnSpPr>
+          <p:nvPr/>
+        </p:nvCxnSpPr>
+        <p:spPr>
+          <a:xfrm flipH="1">
+            <a:off x="6051065" y="993934"/>
+            <a:ext cx="245232" cy="1514964"/>
+          </a:xfrm>
+          <a:prstGeom prst="line">
+            <a:avLst/>
+          </a:prstGeom>
+          <a:noFill/>
+          <a:ln w="6350" cap="rnd" cmpd="sng" algn="ctr">
+            <a:solidFill>
+              <a:srgbClr val="E52330"/>
+            </a:solidFill>
+            <a:prstDash val="solid"/>
+            <a:round/>
+          </a:ln>
+          <a:effectLst/>
+        </p:spPr>
+      </p:cxnSp>
+      <p:cxnSp>
+        <p:nvCxnSpPr>
+          <p:cNvPr id="33" name="Gerader Verbinder 32">
+            <a:extLst>
+              <a:ext uri="{FF2B5EF4-FFF2-40B4-BE49-F238E27FC236}">
+                <a16:creationId xmlns:a16="http://schemas.microsoft.com/office/drawing/2014/main" id="{0DAD4565-C8E0-BCD5-A7FE-0993B3BB4043}"/>
+              </a:ext>
+            </a:extLst>
+          </p:cNvPr>
+          <p:cNvCxnSpPr>
+            <a:cxnSpLocks/>
+          </p:cNvCxnSpPr>
+          <p:nvPr/>
+        </p:nvCxnSpPr>
+        <p:spPr>
+          <a:xfrm>
+            <a:off x="3064476" y="2508898"/>
+            <a:ext cx="2985656" cy="0"/>
+          </a:xfrm>
+          <a:prstGeom prst="line">
+            <a:avLst/>
+          </a:prstGeom>
+          <a:noFill/>
+          <a:ln w="6350" cap="rnd" cmpd="sng" algn="ctr">
+            <a:solidFill>
+              <a:srgbClr val="E52330"/>
+            </a:solidFill>
+            <a:prstDash val="solid"/>
+            <a:round/>
+          </a:ln>
+          <a:effectLst/>
+        </p:spPr>
+      </p:cxnSp>
+      <p:sp>
+        <p:nvSpPr>
+          <p:cNvPr id="35" name="Textfeld 34">
+            <a:extLst>
+              <a:ext uri="{FF2B5EF4-FFF2-40B4-BE49-F238E27FC236}">
+                <a16:creationId xmlns:a16="http://schemas.microsoft.com/office/drawing/2014/main" id="{3C18B90B-99A4-9B8D-CDEA-51E45EE5E2AF}"/>
+              </a:ext>
+            </a:extLst>
+          </p:cNvPr>
+          <p:cNvSpPr txBox="1"/>
+          <p:nvPr/>
+        </p:nvSpPr>
+        <p:spPr>
+          <a:xfrm>
+            <a:off x="784043" y="1259899"/>
+            <a:ext cx="1339068" cy="323165"/>
+          </a:xfrm>
+          <a:prstGeom prst="rect">
+            <a:avLst/>
+          </a:prstGeom>
+          <a:noFill/>
+        </p:spPr>
+        <p:txBody>
+          <a:bodyPr wrap="square" lIns="0" tIns="0" rIns="0" bIns="0" rtlCol="0">
+            <a:spAutoFit/>
+          </a:bodyPr>
+          <a:lstStyle/>
+          <a:p>
+            <a:pPr marL="0" marR="0" indent="0" defTabSz="914400" eaLnBrk="1" fontAlgn="base" latinLnBrk="0" hangingPunct="1">
+              <a:lnSpc>
+                <a:spcPct val="100000"/>
+              </a:lnSpc>
+              <a:spcBef>
+                <a:spcPts val="0"/>
+              </a:spcBef>
+              <a:spcAft>
+                <a:spcPct val="0"/>
+              </a:spcAft>
+              <a:buClrTx/>
+              <a:buSzTx/>
+              <a:buFontTx/>
+              <a:buNone/>
+              <a:tabLst/>
+            </a:pPr>
+            <a:r>
+              <a:rPr lang="zh-CN" altLang="en-US" sz="700" kern="0" dirty="0">
+                <a:solidFill>
+                  <a:srgbClr val="E52330"/>
+                </a:solidFill>
+              </a:rPr>
+              <a:t>机械制动扭矩请求</a:t>
+            </a:r>
+            <a:endParaRPr lang="en-US" altLang="zh-CN" sz="700" kern="0" dirty="0">
+              <a:solidFill>
+                <a:srgbClr val="E52330"/>
+              </a:solidFill>
+            </a:endParaRPr>
+          </a:p>
+          <a:p>
+            <a:pPr fontAlgn="base">
+              <a:spcAft>
+                <a:spcPct val="0"/>
+              </a:spcAft>
+            </a:pPr>
+            <a:r>
+              <a:rPr lang="en-US" altLang="zh-CN" sz="700" kern="0" dirty="0" err="1">
+                <a:solidFill>
+                  <a:srgbClr val="000000"/>
+                </a:solidFill>
+              </a:rPr>
+              <a:t>DrRqdFrntShftBrkTorq</a:t>
+            </a:r>
+            <a:r>
+              <a:rPr lang="en-US" altLang="zh-CN" sz="700" kern="0" dirty="0">
+                <a:solidFill>
+                  <a:srgbClr val="000000"/>
+                </a:solidFill>
+              </a:rPr>
+              <a:t> +</a:t>
+            </a:r>
+          </a:p>
+          <a:p>
+            <a:pPr fontAlgn="base">
+              <a:spcAft>
+                <a:spcPct val="0"/>
+              </a:spcAft>
+            </a:pPr>
+            <a:r>
+              <a:rPr lang="en-US" altLang="zh-CN" sz="700" kern="0" dirty="0" err="1">
+                <a:solidFill>
+                  <a:srgbClr val="000000"/>
+                </a:solidFill>
+              </a:rPr>
+              <a:t>DrRqdRearShftBrkTorq</a:t>
+            </a:r>
+            <a:endParaRPr lang="en-US" altLang="zh-CN" sz="700" kern="0" dirty="0">
+              <a:solidFill>
+                <a:srgbClr val="000000"/>
+              </a:solidFill>
+            </a:endParaRPr>
+          </a:p>
+        </p:txBody>
+      </p:sp>
+      <p:cxnSp>
+        <p:nvCxnSpPr>
+          <p:cNvPr id="37" name="Gerader Verbinder 36">
+            <a:extLst>
+              <a:ext uri="{FF2B5EF4-FFF2-40B4-BE49-F238E27FC236}">
+                <a16:creationId xmlns:a16="http://schemas.microsoft.com/office/drawing/2014/main" id="{7F8EFA7A-3C80-147E-DBD6-80436E795002}"/>
+              </a:ext>
+            </a:extLst>
+          </p:cNvPr>
+          <p:cNvCxnSpPr>
+            <a:cxnSpLocks/>
+          </p:cNvCxnSpPr>
+          <p:nvPr/>
+        </p:nvCxnSpPr>
+        <p:spPr>
+          <a:xfrm>
+            <a:off x="566352" y="2631989"/>
+            <a:ext cx="0" cy="1087391"/>
+          </a:xfrm>
+          <a:prstGeom prst="line">
+            <a:avLst/>
+          </a:prstGeom>
+          <a:noFill/>
+          <a:ln w="6350" cap="rnd" cmpd="sng" algn="ctr">
+            <a:solidFill>
+              <a:schemeClr val="bg2"/>
+            </a:solidFill>
+            <a:prstDash val="solid"/>
+            <a:round/>
+            <a:headEnd type="triangle" w="med" len="med"/>
+            <a:tailEnd type="none" w="med" len="med"/>
+          </a:ln>
+          <a:effectLst/>
+        </p:spPr>
+      </p:cxnSp>
+      <p:cxnSp>
+        <p:nvCxnSpPr>
+          <p:cNvPr id="39" name="Gerader Verbinder 38">
+            <a:extLst>
+              <a:ext uri="{FF2B5EF4-FFF2-40B4-BE49-F238E27FC236}">
+                <a16:creationId xmlns:a16="http://schemas.microsoft.com/office/drawing/2014/main" id="{5BF1EC34-AB5B-C547-6DFC-64D37A660282}"/>
+              </a:ext>
+            </a:extLst>
+          </p:cNvPr>
+          <p:cNvCxnSpPr>
+            <a:cxnSpLocks/>
+          </p:cNvCxnSpPr>
+          <p:nvPr/>
+        </p:nvCxnSpPr>
+        <p:spPr>
+          <a:xfrm flipH="1">
+            <a:off x="568411" y="3719380"/>
+            <a:ext cx="7963930" cy="0"/>
+          </a:xfrm>
+          <a:prstGeom prst="line">
+            <a:avLst/>
+          </a:prstGeom>
+          <a:noFill/>
+          <a:ln w="6350" cap="rnd" cmpd="sng" algn="ctr">
+            <a:solidFill>
+              <a:schemeClr val="bg2"/>
+            </a:solidFill>
+            <a:prstDash val="solid"/>
+            <a:round/>
+            <a:headEnd type="triangle" w="med" len="med"/>
+            <a:tailEnd type="none" w="med" len="med"/>
+          </a:ln>
+          <a:effectLst/>
+        </p:spPr>
+      </p:cxnSp>
+      <p:sp>
+        <p:nvSpPr>
+          <p:cNvPr id="40" name="Textfeld 39">
+            <a:extLst>
+              <a:ext uri="{FF2B5EF4-FFF2-40B4-BE49-F238E27FC236}">
+                <a16:creationId xmlns:a16="http://schemas.microsoft.com/office/drawing/2014/main" id="{746D5CF5-B585-2EF3-298B-3A6EE870ACA5}"/>
+              </a:ext>
+            </a:extLst>
+          </p:cNvPr>
+          <p:cNvSpPr txBox="1"/>
+          <p:nvPr/>
+        </p:nvSpPr>
+        <p:spPr>
+          <a:xfrm rot="16200000">
+            <a:off x="-371689" y="2917823"/>
+            <a:ext cx="1405730" cy="184666"/>
+          </a:xfrm>
+          <a:prstGeom prst="rect">
+            <a:avLst/>
+          </a:prstGeom>
+          <a:noFill/>
+        </p:spPr>
+        <p:txBody>
+          <a:bodyPr wrap="square" lIns="0" tIns="0" rIns="0" bIns="0" rtlCol="0">
+            <a:spAutoFit/>
+          </a:bodyPr>
+          <a:lstStyle/>
+          <a:p>
+            <a:pPr marL="0" marR="0" indent="0" defTabSz="914400" eaLnBrk="1" fontAlgn="base" latinLnBrk="0" hangingPunct="1">
+              <a:lnSpc>
+                <a:spcPct val="100000"/>
+              </a:lnSpc>
+              <a:spcBef>
+                <a:spcPts val="0"/>
+              </a:spcBef>
+              <a:spcAft>
+                <a:spcPct val="0"/>
+              </a:spcAft>
+              <a:buClrTx/>
+              <a:buSzTx/>
+              <a:buFontTx/>
+              <a:buNone/>
+              <a:tabLst/>
+            </a:pPr>
+            <a:r>
+              <a:rPr lang="en-US" altLang="zh-CN" sz="1200" kern="0" dirty="0"/>
+              <a:t>VMC</a:t>
+            </a:r>
+            <a:r>
+              <a:rPr lang="zh-CN" altLang="en-US" sz="1200" kern="0" dirty="0"/>
+              <a:t> 制动</a:t>
+            </a:r>
+            <a:r>
+              <a:rPr kumimoji="0" lang="zh-CN" altLang="en-US" sz="1200" b="0" i="0" u="none" strike="noStrike" kern="0" cap="none" spc="0" normalizeH="0" baseline="0" noProof="0" dirty="0">
+                <a:ln>
+                  <a:noFill/>
+                </a:ln>
+                <a:effectLst/>
+                <a:uLnTx/>
+                <a:uFillTx/>
+              </a:rPr>
+              <a:t>扭矩请求</a:t>
+            </a:r>
+            <a:endParaRPr kumimoji="0" lang="de-DE" sz="1200" b="0" i="0" u="none" strike="noStrike" kern="0" cap="none" spc="0" normalizeH="0" baseline="0" noProof="0" dirty="0">
+              <a:ln>
+                <a:noFill/>
+              </a:ln>
+              <a:effectLst/>
+              <a:uLnTx/>
+              <a:uFillTx/>
+            </a:endParaRPr>
+          </a:p>
+        </p:txBody>
+      </p:sp>
+      <p:cxnSp>
+        <p:nvCxnSpPr>
+          <p:cNvPr id="42" name="Gerader Verbinder 41">
+            <a:extLst>
+              <a:ext uri="{FF2B5EF4-FFF2-40B4-BE49-F238E27FC236}">
+                <a16:creationId xmlns:a16="http://schemas.microsoft.com/office/drawing/2014/main" id="{1DAD12F5-9C40-EA31-7311-DE227C5C22F9}"/>
+              </a:ext>
+            </a:extLst>
+          </p:cNvPr>
+          <p:cNvCxnSpPr/>
+          <p:nvPr/>
+        </p:nvCxnSpPr>
+        <p:spPr>
+          <a:xfrm>
+            <a:off x="568411" y="1952368"/>
+            <a:ext cx="2273642" cy="0"/>
+          </a:xfrm>
+          <a:prstGeom prst="line">
+            <a:avLst/>
+          </a:prstGeom>
+          <a:noFill/>
+          <a:ln w="6350" cap="rnd" cmpd="sng" algn="ctr">
+            <a:solidFill>
+              <a:srgbClr val="2EBEEF"/>
+            </a:solidFill>
+            <a:prstDash val="solid"/>
+            <a:round/>
+          </a:ln>
+          <a:effectLst/>
+        </p:spPr>
+      </p:cxnSp>
+      <p:cxnSp>
+        <p:nvCxnSpPr>
+          <p:cNvPr id="43" name="Gerader Verbinder 42">
+            <a:extLst>
+              <a:ext uri="{FF2B5EF4-FFF2-40B4-BE49-F238E27FC236}">
+                <a16:creationId xmlns:a16="http://schemas.microsoft.com/office/drawing/2014/main" id="{8933D443-0734-3D78-9490-ADF23B451445}"/>
+              </a:ext>
+            </a:extLst>
+          </p:cNvPr>
+          <p:cNvCxnSpPr/>
+          <p:nvPr/>
+        </p:nvCxnSpPr>
+        <p:spPr>
+          <a:xfrm>
+            <a:off x="566352" y="2209801"/>
+            <a:ext cx="2273642" cy="0"/>
+          </a:xfrm>
+          <a:prstGeom prst="line">
+            <a:avLst/>
+          </a:prstGeom>
+          <a:noFill/>
+          <a:ln w="6350" cap="rnd" cmpd="sng" algn="ctr">
+            <a:solidFill>
+              <a:srgbClr val="0057B7"/>
+            </a:solidFill>
+            <a:prstDash val="solid"/>
+            <a:round/>
+          </a:ln>
+          <a:effectLst/>
+        </p:spPr>
+      </p:cxnSp>
+      <p:sp>
+        <p:nvSpPr>
+          <p:cNvPr id="46" name="Textfeld 45">
+            <a:extLst>
+              <a:ext uri="{FF2B5EF4-FFF2-40B4-BE49-F238E27FC236}">
+                <a16:creationId xmlns:a16="http://schemas.microsoft.com/office/drawing/2014/main" id="{63728767-3410-28F7-CB36-831D9DEC87CE}"/>
+              </a:ext>
+            </a:extLst>
+          </p:cNvPr>
+          <p:cNvSpPr txBox="1"/>
+          <p:nvPr/>
+        </p:nvSpPr>
+        <p:spPr>
+          <a:xfrm>
+            <a:off x="776459" y="1801527"/>
+            <a:ext cx="807913" cy="107722"/>
+          </a:xfrm>
+          <a:prstGeom prst="rect">
+            <a:avLst/>
+          </a:prstGeom>
+          <a:noFill/>
+        </p:spPr>
+        <p:txBody>
+          <a:bodyPr wrap="none" lIns="0" tIns="0" rIns="0" bIns="0" rtlCol="0">
+            <a:spAutoFit/>
+          </a:bodyPr>
+          <a:lstStyle/>
+          <a:p>
+            <a:pPr marL="0" marR="0" indent="0" defTabSz="914400" eaLnBrk="1" fontAlgn="base" latinLnBrk="0" hangingPunct="1">
+              <a:lnSpc>
+                <a:spcPct val="100000"/>
+              </a:lnSpc>
+              <a:spcBef>
+                <a:spcPts val="0"/>
+              </a:spcBef>
+              <a:spcAft>
+                <a:spcPct val="0"/>
+              </a:spcAft>
+              <a:buClrTx/>
+              <a:buSzTx/>
+              <a:buFontTx/>
+              <a:buNone/>
+              <a:tabLst/>
+            </a:pPr>
+            <a:r>
+              <a:rPr lang="zh-CN" altLang="en-US" sz="700" kern="0" dirty="0">
+                <a:solidFill>
+                  <a:srgbClr val="2EBEEF"/>
+                </a:solidFill>
+              </a:rPr>
+              <a:t>电制动扭矩请求前轴</a:t>
+            </a:r>
+            <a:endParaRPr kumimoji="0" lang="de-DE" sz="700" b="0" i="0" u="none" strike="noStrike" kern="0" cap="none" spc="0" normalizeH="0" baseline="0" noProof="0" dirty="0">
+              <a:ln>
+                <a:noFill/>
+              </a:ln>
+              <a:solidFill>
+                <a:srgbClr val="2EBEEF"/>
+              </a:solidFill>
+              <a:effectLst/>
+              <a:uLnTx/>
+              <a:uFillTx/>
+            </a:endParaRPr>
+          </a:p>
+        </p:txBody>
+      </p:sp>
+      <p:sp>
+        <p:nvSpPr>
+          <p:cNvPr id="47" name="Textfeld 46">
+            <a:extLst>
+              <a:ext uri="{FF2B5EF4-FFF2-40B4-BE49-F238E27FC236}">
+                <a16:creationId xmlns:a16="http://schemas.microsoft.com/office/drawing/2014/main" id="{4BCC8D90-1A73-C5D1-C177-F08C45C72780}"/>
+              </a:ext>
+            </a:extLst>
+          </p:cNvPr>
+          <p:cNvSpPr txBox="1"/>
+          <p:nvPr/>
+        </p:nvSpPr>
+        <p:spPr>
+          <a:xfrm>
+            <a:off x="784043" y="2071068"/>
+            <a:ext cx="807913" cy="107722"/>
+          </a:xfrm>
+          <a:prstGeom prst="rect">
+            <a:avLst/>
+          </a:prstGeom>
+          <a:noFill/>
+        </p:spPr>
+        <p:txBody>
+          <a:bodyPr wrap="none" lIns="0" tIns="0" rIns="0" bIns="0" rtlCol="0">
+            <a:spAutoFit/>
+          </a:bodyPr>
+          <a:lstStyle/>
+          <a:p>
+            <a:pPr marL="0" marR="0" indent="0" defTabSz="914400" eaLnBrk="1" fontAlgn="base" latinLnBrk="0" hangingPunct="1">
+              <a:lnSpc>
+                <a:spcPct val="100000"/>
+              </a:lnSpc>
+              <a:spcBef>
+                <a:spcPts val="0"/>
+              </a:spcBef>
+              <a:spcAft>
+                <a:spcPct val="0"/>
+              </a:spcAft>
+              <a:buClrTx/>
+              <a:buSzTx/>
+              <a:buFontTx/>
+              <a:buNone/>
+              <a:tabLst/>
+            </a:pPr>
+            <a:r>
+              <a:rPr lang="zh-CN" altLang="en-US" sz="700" kern="0" dirty="0">
+                <a:solidFill>
+                  <a:srgbClr val="00265F"/>
+                </a:solidFill>
+              </a:rPr>
+              <a:t>电制动扭矩请求后轴</a:t>
+            </a:r>
+          </a:p>
+        </p:txBody>
+      </p:sp>
+      <p:cxnSp>
+        <p:nvCxnSpPr>
+          <p:cNvPr id="5" name="Gerader Verbinder 4">
+            <a:extLst>
+              <a:ext uri="{FF2B5EF4-FFF2-40B4-BE49-F238E27FC236}">
+                <a16:creationId xmlns:a16="http://schemas.microsoft.com/office/drawing/2014/main" id="{E3885E65-C50C-4BF1-6A3F-1C68F3F59653}"/>
+              </a:ext>
+            </a:extLst>
+          </p:cNvPr>
+          <p:cNvCxnSpPr>
+            <a:cxnSpLocks/>
+          </p:cNvCxnSpPr>
+          <p:nvPr/>
+        </p:nvCxnSpPr>
+        <p:spPr>
+          <a:xfrm flipV="1">
+            <a:off x="2839994" y="1217141"/>
+            <a:ext cx="224482" cy="1000365"/>
+          </a:xfrm>
+          <a:prstGeom prst="line">
+            <a:avLst/>
+          </a:prstGeom>
+          <a:noFill/>
+          <a:ln w="6350" cap="rnd" cmpd="sng" algn="ctr">
+            <a:solidFill>
+              <a:srgbClr val="0057B7"/>
+            </a:solidFill>
+            <a:prstDash val="solid"/>
+            <a:round/>
+          </a:ln>
+          <a:effectLst/>
+        </p:spPr>
+      </p:cxnSp>
+      <p:cxnSp>
+        <p:nvCxnSpPr>
+          <p:cNvPr id="9" name="Gerader Verbinder 8">
+            <a:extLst>
+              <a:ext uri="{FF2B5EF4-FFF2-40B4-BE49-F238E27FC236}">
+                <a16:creationId xmlns:a16="http://schemas.microsoft.com/office/drawing/2014/main" id="{643797E5-1D13-EB82-4C72-3E6BD702B5ED}"/>
+              </a:ext>
+            </a:extLst>
+          </p:cNvPr>
+          <p:cNvCxnSpPr>
+            <a:cxnSpLocks/>
+          </p:cNvCxnSpPr>
+          <p:nvPr/>
+        </p:nvCxnSpPr>
+        <p:spPr>
+          <a:xfrm>
+            <a:off x="3064476" y="1208904"/>
+            <a:ext cx="2594919" cy="0"/>
+          </a:xfrm>
+          <a:prstGeom prst="line">
+            <a:avLst/>
+          </a:prstGeom>
+          <a:noFill/>
+          <a:ln w="6350" cap="rnd" cmpd="sng" algn="ctr">
+            <a:solidFill>
+              <a:srgbClr val="0057B7"/>
+            </a:solidFill>
+            <a:prstDash val="solid"/>
+            <a:round/>
+          </a:ln>
+          <a:effectLst/>
+        </p:spPr>
+      </p:cxnSp>
+      <p:cxnSp>
+        <p:nvCxnSpPr>
+          <p:cNvPr id="13" name="Gerader Verbinder 12">
+            <a:extLst>
+              <a:ext uri="{FF2B5EF4-FFF2-40B4-BE49-F238E27FC236}">
+                <a16:creationId xmlns:a16="http://schemas.microsoft.com/office/drawing/2014/main" id="{65948D00-AC93-5DEC-CBB8-53B63F58E370}"/>
+              </a:ext>
+            </a:extLst>
+          </p:cNvPr>
+          <p:cNvCxnSpPr>
+            <a:cxnSpLocks/>
+          </p:cNvCxnSpPr>
+          <p:nvPr/>
+        </p:nvCxnSpPr>
+        <p:spPr>
+          <a:xfrm>
+            <a:off x="2839994" y="1952368"/>
+            <a:ext cx="224482" cy="257433"/>
+          </a:xfrm>
+          <a:prstGeom prst="line">
+            <a:avLst/>
+          </a:prstGeom>
+          <a:noFill/>
+          <a:ln w="6350" cap="rnd" cmpd="sng" algn="ctr">
+            <a:solidFill>
+              <a:srgbClr val="2EBEEF"/>
+            </a:solidFill>
+            <a:prstDash val="solid"/>
+            <a:round/>
+          </a:ln>
+          <a:effectLst/>
+        </p:spPr>
+      </p:cxnSp>
+      <p:cxnSp>
+        <p:nvCxnSpPr>
+          <p:cNvPr id="19" name="Gerader Verbinder 18">
+            <a:extLst>
+              <a:ext uri="{FF2B5EF4-FFF2-40B4-BE49-F238E27FC236}">
+                <a16:creationId xmlns:a16="http://schemas.microsoft.com/office/drawing/2014/main" id="{3D931EAD-5CC2-3D80-0DFB-20CA2CD41862}"/>
+              </a:ext>
+            </a:extLst>
+          </p:cNvPr>
+          <p:cNvCxnSpPr>
+            <a:cxnSpLocks/>
+          </p:cNvCxnSpPr>
+          <p:nvPr/>
+        </p:nvCxnSpPr>
+        <p:spPr>
+          <a:xfrm>
+            <a:off x="3064476" y="2209801"/>
+            <a:ext cx="2570205" cy="0"/>
+          </a:xfrm>
+          <a:prstGeom prst="line">
+            <a:avLst/>
+          </a:prstGeom>
+          <a:noFill/>
+          <a:ln w="6350" cap="rnd" cmpd="sng" algn="ctr">
+            <a:solidFill>
+              <a:srgbClr val="2EBEEF"/>
+            </a:solidFill>
+            <a:prstDash val="solid"/>
+            <a:round/>
+          </a:ln>
+          <a:effectLst/>
+        </p:spPr>
+      </p:cxnSp>
+      <p:sp>
+        <p:nvSpPr>
+          <p:cNvPr id="25" name="Bogen 24">
+            <a:extLst>
+              <a:ext uri="{FF2B5EF4-FFF2-40B4-BE49-F238E27FC236}">
+                <a16:creationId xmlns:a16="http://schemas.microsoft.com/office/drawing/2014/main" id="{57090A8D-AD43-A278-C48A-95D98694A088}"/>
+              </a:ext>
+            </a:extLst>
+          </p:cNvPr>
+          <p:cNvSpPr/>
+          <p:nvPr/>
+        </p:nvSpPr>
+        <p:spPr>
+          <a:xfrm rot="10800000">
+            <a:off x="5659393" y="-49429"/>
+            <a:ext cx="327453" cy="2543627"/>
+          </a:xfrm>
+          <a:prstGeom prst="arc">
+            <a:avLst/>
+          </a:prstGeom>
+          <a:noFill/>
+          <a:ln w="6350" cap="rnd" cmpd="sng" algn="ctr">
+            <a:solidFill>
+              <a:srgbClr val="00265F"/>
+            </a:solidFill>
+            <a:prstDash val="solid"/>
+            <a:round/>
+          </a:ln>
+          <a:effectLst/>
+        </p:spPr>
+        <p:txBody>
+          <a:bodyPr rtlCol="0" anchor="ctr"/>
+          <a:lstStyle/>
+          <a:p>
+            <a:pPr algn="ctr"/>
+            <a:endParaRPr lang="de-DE"/>
+          </a:p>
+        </p:txBody>
+      </p:sp>
+      <p:sp>
+        <p:nvSpPr>
+          <p:cNvPr id="26" name="Bogen 25">
+            <a:extLst>
+              <a:ext uri="{FF2B5EF4-FFF2-40B4-BE49-F238E27FC236}">
+                <a16:creationId xmlns:a16="http://schemas.microsoft.com/office/drawing/2014/main" id="{A82A014B-F295-7FE2-D408-523BF13AFE47}"/>
+              </a:ext>
+            </a:extLst>
+          </p:cNvPr>
+          <p:cNvSpPr/>
+          <p:nvPr/>
+        </p:nvSpPr>
+        <p:spPr>
+          <a:xfrm rot="10800000">
+            <a:off x="5638793" y="1928336"/>
+            <a:ext cx="440717" cy="575447"/>
+          </a:xfrm>
+          <a:prstGeom prst="arc">
+            <a:avLst/>
+          </a:prstGeom>
+          <a:noFill/>
+          <a:ln w="6350" cap="rnd" cmpd="sng" algn="ctr">
+            <a:solidFill>
+              <a:srgbClr val="93D5F6"/>
+            </a:solidFill>
+            <a:prstDash val="solid"/>
+            <a:round/>
+          </a:ln>
+          <a:effectLst/>
+        </p:spPr>
+        <p:txBody>
+          <a:bodyPr rtlCol="0" anchor="ctr"/>
+          <a:lstStyle/>
+          <a:p>
+            <a:pPr algn="ctr"/>
+            <a:endParaRPr lang="de-DE"/>
+          </a:p>
+        </p:txBody>
+      </p:sp>
+      <p:cxnSp>
+        <p:nvCxnSpPr>
+          <p:cNvPr id="29" name="Gerader Verbinder 28">
+            <a:extLst>
+              <a:ext uri="{FF2B5EF4-FFF2-40B4-BE49-F238E27FC236}">
+                <a16:creationId xmlns:a16="http://schemas.microsoft.com/office/drawing/2014/main" id="{AB074CDD-4CB4-86DA-9BC1-C92754B66490}"/>
+              </a:ext>
+            </a:extLst>
+          </p:cNvPr>
+          <p:cNvCxnSpPr>
+            <a:cxnSpLocks/>
+          </p:cNvCxnSpPr>
+          <p:nvPr/>
+        </p:nvCxnSpPr>
+        <p:spPr>
+          <a:xfrm flipV="1">
+            <a:off x="5823123" y="3715909"/>
+            <a:ext cx="227942" cy="3471"/>
+          </a:xfrm>
+          <a:prstGeom prst="line">
+            <a:avLst/>
+          </a:prstGeom>
+          <a:noFill/>
+          <a:ln w="6350" cap="rnd" cmpd="sng" algn="ctr">
+            <a:solidFill>
+              <a:srgbClr val="0057B7"/>
+            </a:solidFill>
+            <a:prstDash val="solid"/>
+            <a:round/>
+          </a:ln>
+          <a:effectLst/>
+        </p:spPr>
+      </p:cxnSp>
+      <p:sp>
+        <p:nvSpPr>
+          <p:cNvPr id="41" name="Textfeld 40">
+            <a:extLst>
+              <a:ext uri="{FF2B5EF4-FFF2-40B4-BE49-F238E27FC236}">
+                <a16:creationId xmlns:a16="http://schemas.microsoft.com/office/drawing/2014/main" id="{ED4E30E3-38A3-9441-1BFF-821CEA7613E6}"/>
+              </a:ext>
+            </a:extLst>
+          </p:cNvPr>
+          <p:cNvSpPr txBox="1"/>
+          <p:nvPr/>
+        </p:nvSpPr>
+        <p:spPr>
+          <a:xfrm>
+            <a:off x="932386" y="718461"/>
+            <a:ext cx="1037143" cy="184666"/>
+          </a:xfrm>
+          <a:prstGeom prst="rect">
+            <a:avLst/>
+          </a:prstGeom>
+          <a:noFill/>
+        </p:spPr>
+        <p:txBody>
+          <a:bodyPr wrap="none" lIns="0" tIns="0" rIns="0" bIns="0" rtlCol="0">
+            <a:spAutoFit/>
+          </a:bodyPr>
+          <a:lstStyle/>
+          <a:p>
+            <a:pPr marL="0" marR="0" indent="0" defTabSz="914400" eaLnBrk="1" fontAlgn="base" latinLnBrk="0" hangingPunct="1">
+              <a:lnSpc>
+                <a:spcPct val="100000"/>
+              </a:lnSpc>
+              <a:spcBef>
+                <a:spcPts val="0"/>
+              </a:spcBef>
+              <a:spcAft>
+                <a:spcPct val="0"/>
+              </a:spcAft>
+              <a:buClrTx/>
+              <a:buSzTx/>
+              <a:buFontTx/>
+              <a:buNone/>
+              <a:tabLst/>
+            </a:pPr>
+            <a:r>
+              <a:rPr lang="en-US" altLang="zh-CN" sz="1200" kern="0" dirty="0">
+                <a:solidFill>
+                  <a:srgbClr val="000000"/>
+                </a:solidFill>
+                <a:highlight>
+                  <a:srgbClr val="FFFF00"/>
+                </a:highlight>
+              </a:rPr>
+              <a:t>CST</a:t>
+            </a:r>
+            <a:r>
+              <a:rPr lang="zh-CN" altLang="en-US" sz="1200" kern="0" dirty="0">
+                <a:solidFill>
+                  <a:srgbClr val="000000"/>
+                </a:solidFill>
+                <a:highlight>
+                  <a:srgbClr val="FFFF00"/>
+                </a:highlight>
+              </a:rPr>
+              <a:t>功能未激活</a:t>
+            </a:r>
+            <a:endParaRPr kumimoji="0" lang="de-DE" sz="1200" b="0" i="0" u="none" strike="noStrike" kern="0" cap="none" spc="0" normalizeH="0" baseline="0" noProof="0" dirty="0">
+              <a:ln>
+                <a:noFill/>
+              </a:ln>
+              <a:solidFill>
+                <a:srgbClr val="000000"/>
+              </a:solidFill>
+              <a:effectLst/>
+              <a:highlight>
+                <a:srgbClr val="FFFF00"/>
+              </a:highlight>
+              <a:uLnTx/>
+              <a:uFillTx/>
+            </a:endParaRPr>
+          </a:p>
+        </p:txBody>
+      </p:sp>
+      <p:sp>
+        <p:nvSpPr>
+          <p:cNvPr id="44" name="Textfeld 43">
+            <a:extLst>
+              <a:ext uri="{FF2B5EF4-FFF2-40B4-BE49-F238E27FC236}">
+                <a16:creationId xmlns:a16="http://schemas.microsoft.com/office/drawing/2014/main" id="{DFE2D9C9-3DE7-1FE8-2DE4-8CBF01532B26}"/>
+              </a:ext>
+            </a:extLst>
+          </p:cNvPr>
+          <p:cNvSpPr txBox="1"/>
+          <p:nvPr/>
+        </p:nvSpPr>
+        <p:spPr>
+          <a:xfrm>
+            <a:off x="3566934" y="675354"/>
+            <a:ext cx="883255" cy="184666"/>
+          </a:xfrm>
+          <a:prstGeom prst="rect">
+            <a:avLst/>
+          </a:prstGeom>
+          <a:noFill/>
+        </p:spPr>
+        <p:txBody>
+          <a:bodyPr wrap="none" lIns="0" tIns="0" rIns="0" bIns="0" rtlCol="0">
+            <a:spAutoFit/>
+          </a:bodyPr>
+          <a:lstStyle/>
+          <a:p>
+            <a:pPr marL="0" marR="0" indent="0" defTabSz="914400" eaLnBrk="1" fontAlgn="base" latinLnBrk="0" hangingPunct="1">
+              <a:lnSpc>
+                <a:spcPct val="100000"/>
+              </a:lnSpc>
+              <a:spcBef>
+                <a:spcPts val="0"/>
+              </a:spcBef>
+              <a:spcAft>
+                <a:spcPct val="0"/>
+              </a:spcAft>
+              <a:buClrTx/>
+              <a:buSzTx/>
+              <a:buFontTx/>
+              <a:buNone/>
+              <a:tabLst/>
+            </a:pPr>
+            <a:r>
+              <a:rPr lang="en-US" altLang="zh-CN" sz="1200" kern="0" dirty="0">
+                <a:solidFill>
+                  <a:srgbClr val="000000"/>
+                </a:solidFill>
+                <a:highlight>
+                  <a:srgbClr val="FFFF00"/>
+                </a:highlight>
+              </a:rPr>
+              <a:t>CST</a:t>
+            </a:r>
+            <a:r>
+              <a:rPr lang="zh-CN" altLang="en-US" sz="1200" kern="0" dirty="0">
+                <a:solidFill>
+                  <a:srgbClr val="000000"/>
+                </a:solidFill>
+                <a:highlight>
+                  <a:srgbClr val="FFFF00"/>
+                </a:highlight>
+              </a:rPr>
+              <a:t>功能激活</a:t>
+            </a:r>
+            <a:endParaRPr kumimoji="0" lang="de-DE" sz="1200" b="0" i="0" u="none" strike="noStrike" kern="0" cap="none" spc="0" normalizeH="0" baseline="0" noProof="0" dirty="0">
+              <a:ln>
+                <a:noFill/>
+              </a:ln>
+              <a:solidFill>
+                <a:srgbClr val="000000"/>
+              </a:solidFill>
+              <a:effectLst/>
+              <a:highlight>
+                <a:srgbClr val="FFFF00"/>
+              </a:highlight>
+              <a:uLnTx/>
+              <a:uFillTx/>
+            </a:endParaRPr>
+          </a:p>
+        </p:txBody>
+      </p:sp>
+      <p:sp>
+        <p:nvSpPr>
+          <p:cNvPr id="45" name="Textfeld 44">
+            <a:extLst>
+              <a:ext uri="{FF2B5EF4-FFF2-40B4-BE49-F238E27FC236}">
+                <a16:creationId xmlns:a16="http://schemas.microsoft.com/office/drawing/2014/main" id="{49E96782-5DBB-A3DA-530A-C0C3A95E92FD}"/>
+              </a:ext>
+            </a:extLst>
+          </p:cNvPr>
+          <p:cNvSpPr txBox="1"/>
+          <p:nvPr/>
+        </p:nvSpPr>
+        <p:spPr>
+          <a:xfrm>
+            <a:off x="6047295" y="651304"/>
+            <a:ext cx="923330" cy="184666"/>
+          </a:xfrm>
+          <a:prstGeom prst="rect">
+            <a:avLst/>
+          </a:prstGeom>
+          <a:noFill/>
+        </p:spPr>
+        <p:txBody>
+          <a:bodyPr wrap="none" lIns="0" tIns="0" rIns="0" bIns="0" rtlCol="0">
+            <a:spAutoFit/>
+          </a:bodyPr>
+          <a:lstStyle/>
+          <a:p>
+            <a:pPr marL="0" marR="0" indent="0" defTabSz="914400" eaLnBrk="1" fontAlgn="base" latinLnBrk="0" hangingPunct="1">
+              <a:lnSpc>
+                <a:spcPct val="100000"/>
+              </a:lnSpc>
+              <a:spcBef>
+                <a:spcPts val="0"/>
+              </a:spcBef>
+              <a:spcAft>
+                <a:spcPct val="0"/>
+              </a:spcAft>
+              <a:buClrTx/>
+              <a:buSzTx/>
+              <a:buFontTx/>
+              <a:buNone/>
+              <a:tabLst/>
+            </a:pPr>
+            <a:r>
+              <a:rPr lang="zh-CN" altLang="en-US" sz="1200" kern="0" dirty="0">
+                <a:solidFill>
+                  <a:srgbClr val="000000"/>
+                </a:solidFill>
+                <a:highlight>
+                  <a:srgbClr val="FFFF00"/>
+                </a:highlight>
+              </a:rPr>
+              <a:t>车辆静止停车</a:t>
+            </a:r>
+            <a:endParaRPr kumimoji="0" lang="de-DE" sz="1200" b="0" i="0" u="none" strike="noStrike" kern="0" cap="none" spc="0" normalizeH="0" baseline="0" noProof="0" dirty="0">
+              <a:ln>
+                <a:noFill/>
+              </a:ln>
+              <a:solidFill>
+                <a:srgbClr val="000000"/>
+              </a:solidFill>
+              <a:effectLst/>
+              <a:highlight>
+                <a:srgbClr val="FFFF00"/>
+              </a:highlight>
+              <a:uLnTx/>
+              <a:uFillTx/>
+            </a:endParaRPr>
+          </a:p>
+        </p:txBody>
+      </p:sp>
+      <p:cxnSp>
+        <p:nvCxnSpPr>
+          <p:cNvPr id="8" name="Gerader Verbinder 7">
+            <a:extLst>
+              <a:ext uri="{FF2B5EF4-FFF2-40B4-BE49-F238E27FC236}">
+                <a16:creationId xmlns:a16="http://schemas.microsoft.com/office/drawing/2014/main" id="{30240FED-FF2E-435F-3E72-8253DA242F75}"/>
+              </a:ext>
+            </a:extLst>
+          </p:cNvPr>
+          <p:cNvCxnSpPr>
+            <a:cxnSpLocks/>
+          </p:cNvCxnSpPr>
+          <p:nvPr/>
+        </p:nvCxnSpPr>
+        <p:spPr>
+          <a:xfrm>
+            <a:off x="6047295" y="1064040"/>
+            <a:ext cx="0" cy="3567684"/>
+          </a:xfrm>
+          <a:prstGeom prst="line">
+            <a:avLst/>
+          </a:prstGeom>
+          <a:noFill/>
+          <a:ln w="6350" cap="rnd" cmpd="sng" algn="ctr">
+            <a:solidFill>
+              <a:schemeClr val="bg2"/>
+            </a:solidFill>
+            <a:prstDash val="lgDash"/>
+            <a:round/>
+          </a:ln>
+          <a:effectLst/>
+        </p:spPr>
+      </p:cxnSp>
+      <p:sp>
+        <p:nvSpPr>
+          <p:cNvPr id="49" name="Sprechblase: rechteckig 48">
+            <a:extLst>
+              <a:ext uri="{FF2B5EF4-FFF2-40B4-BE49-F238E27FC236}">
+                <a16:creationId xmlns:a16="http://schemas.microsoft.com/office/drawing/2014/main" id="{60CF9986-7874-5F79-015D-B0A2000939D5}"/>
+              </a:ext>
+            </a:extLst>
+          </p:cNvPr>
+          <p:cNvSpPr/>
+          <p:nvPr/>
+        </p:nvSpPr>
+        <p:spPr>
+          <a:xfrm>
+            <a:off x="6891655" y="1051915"/>
+            <a:ext cx="2168919" cy="1332932"/>
+          </a:xfrm>
+          <a:prstGeom prst="wedgeRectCallout">
+            <a:avLst>
+              <a:gd name="adj1" fmla="val -82015"/>
+              <a:gd name="adj2" fmla="val 40108"/>
+            </a:avLst>
+          </a:prstGeom>
+          <a:solidFill>
+            <a:schemeClr val="bg2"/>
+          </a:solidFill>
+          <a:ln w="12700" cap="flat" cmpd="sng" algn="ctr">
+            <a:noFill/>
+            <a:prstDash val="solid"/>
+          </a:ln>
+          <a:effectLst/>
+        </p:spPr>
+        <p:txBody>
+          <a:bodyPr rot="0" spcFirstLastPara="0" vertOverflow="overflow" horzOverflow="overflow" vert="horz" wrap="square" lIns="90000" tIns="90000" rIns="90000" bIns="90000" numCol="1" spcCol="0" rtlCol="0" fromWordArt="0" anchor="ctr" anchorCtr="0" forceAA="0" compatLnSpc="1">
+            <a:prstTxWarp prst="textNoShape">
+              <a:avLst/>
+            </a:prstTxWarp>
+            <a:noAutofit/>
+          </a:bodyPr>
+          <a:lstStyle/>
+          <a:p>
+            <a:pPr marL="0" marR="0" indent="0" defTabSz="914400" eaLnBrk="1" fontAlgn="base" latinLnBrk="0" hangingPunct="1">
+              <a:lnSpc>
+                <a:spcPct val="100000"/>
+              </a:lnSpc>
+              <a:spcBef>
+                <a:spcPts val="0"/>
+              </a:spcBef>
+              <a:spcAft>
+                <a:spcPct val="0"/>
+              </a:spcAft>
+              <a:buClrTx/>
+              <a:buSzTx/>
+              <a:buFontTx/>
+              <a:buNone/>
+              <a:tabLst/>
+            </a:pPr>
+            <a:r>
+              <a:rPr kumimoji="0" lang="en-US" sz="1200" b="0" i="0" u="none" strike="noStrike" kern="0" cap="none" spc="0" normalizeH="0" baseline="0" noProof="0" dirty="0">
+                <a:ln>
+                  <a:noFill/>
+                </a:ln>
+                <a:effectLst/>
+                <a:uLnTx/>
+                <a:uFillTx/>
+                <a:latin typeface="Tahoma"/>
+                <a:ea typeface="+mn-ea"/>
+                <a:cs typeface="Tahoma" pitchFamily="34" charset="0"/>
+              </a:rPr>
+              <a:t>VMC</a:t>
+            </a:r>
+            <a:r>
+              <a:rPr kumimoji="0" lang="zh-CN" altLang="en-US" sz="1200" b="0" i="0" u="none" strike="noStrike" kern="0" cap="none" spc="0" normalizeH="0" baseline="0" noProof="0" dirty="0">
+                <a:ln>
+                  <a:noFill/>
+                </a:ln>
+                <a:effectLst/>
+                <a:uLnTx/>
+                <a:uFillTx/>
+                <a:latin typeface="Tahoma"/>
+                <a:ea typeface="+mn-ea"/>
+                <a:cs typeface="Tahoma" pitchFamily="34" charset="0"/>
+              </a:rPr>
+              <a:t> </a:t>
+            </a:r>
+            <a:r>
+              <a:rPr kumimoji="0" lang="en-US" altLang="zh-CN" sz="1200" b="0" i="0" u="none" strike="noStrike" kern="0" cap="none" spc="0" normalizeH="0" baseline="0" noProof="0" dirty="0">
+                <a:ln>
+                  <a:noFill/>
+                </a:ln>
+                <a:effectLst/>
+                <a:uLnTx/>
+                <a:uFillTx/>
+                <a:latin typeface="Tahoma"/>
+                <a:ea typeface="+mn-ea"/>
+                <a:cs typeface="Tahoma" pitchFamily="34" charset="0"/>
+              </a:rPr>
+              <a:t>CST</a:t>
+            </a:r>
+            <a:r>
+              <a:rPr lang="zh-CN" altLang="en-US" sz="1200" kern="0" dirty="0">
+                <a:latin typeface="Tahoma"/>
+                <a:cs typeface="Tahoma" pitchFamily="34" charset="0"/>
+              </a:rPr>
+              <a:t>功能负责</a:t>
+            </a:r>
+            <a:r>
+              <a:rPr lang="en-US" altLang="zh-CN" sz="1200" kern="0" dirty="0">
+                <a:latin typeface="Tahoma"/>
+                <a:cs typeface="Tahoma" pitchFamily="34" charset="0"/>
+              </a:rPr>
+              <a:t>ramp up</a:t>
+            </a:r>
+            <a:r>
+              <a:rPr lang="zh-CN" altLang="en-US" sz="1200" kern="0" dirty="0">
+                <a:latin typeface="Tahoma"/>
+                <a:cs typeface="Tahoma" pitchFamily="34" charset="0"/>
+              </a:rPr>
+              <a:t>机械扭矩到驾驶员目标值：</a:t>
+            </a:r>
+            <a:endParaRPr lang="en-US" altLang="zh-CN" sz="1200" kern="0" dirty="0">
+              <a:latin typeface="Tahoma"/>
+              <a:cs typeface="Tahoma" pitchFamily="34" charset="0"/>
+            </a:endParaRPr>
+          </a:p>
+          <a:p>
+            <a:pPr fontAlgn="base">
+              <a:spcAft>
+                <a:spcPct val="0"/>
+              </a:spcAft>
+            </a:pPr>
+            <a:r>
+              <a:rPr lang="en-US" altLang="zh-CN" sz="800" kern="0" dirty="0" err="1">
+                <a:solidFill>
+                  <a:srgbClr val="000000"/>
+                </a:solidFill>
+              </a:rPr>
+              <a:t>VehTargtDecelBrkTorq</a:t>
+            </a:r>
+            <a:r>
+              <a:rPr lang="en-US" altLang="zh-CN" sz="800" kern="0" dirty="0">
+                <a:solidFill>
+                  <a:srgbClr val="000000"/>
+                </a:solidFill>
+              </a:rPr>
+              <a:t>=</a:t>
+            </a:r>
+            <a:r>
+              <a:rPr lang="en-US" altLang="zh-CN" sz="800" kern="0" dirty="0" err="1">
+                <a:solidFill>
+                  <a:srgbClr val="000000"/>
+                </a:solidFill>
+              </a:rPr>
+              <a:t>DrRqdFrntShftBrkTorq</a:t>
+            </a:r>
+            <a:r>
+              <a:rPr lang="en-US" altLang="zh-CN" sz="800" kern="0" dirty="0">
+                <a:solidFill>
+                  <a:srgbClr val="000000"/>
+                </a:solidFill>
+              </a:rPr>
+              <a:t> + </a:t>
+            </a:r>
+            <a:r>
+              <a:rPr lang="en-US" altLang="zh-CN" sz="800" kern="0" dirty="0" err="1">
+                <a:solidFill>
+                  <a:srgbClr val="000000"/>
+                </a:solidFill>
+              </a:rPr>
+              <a:t>DrRqdRearShftBrkTorq</a:t>
+            </a:r>
+            <a:endParaRPr lang="en-US" altLang="zh-CN" sz="800" kern="0" dirty="0">
+              <a:solidFill>
+                <a:srgbClr val="000000"/>
+              </a:solidFill>
+            </a:endParaRPr>
+          </a:p>
+          <a:p>
+            <a:pPr fontAlgn="base">
+              <a:spcAft>
+                <a:spcPct val="0"/>
+              </a:spcAft>
+            </a:pPr>
+            <a:endParaRPr lang="en-US" altLang="zh-CN" sz="800" kern="0" dirty="0">
+              <a:solidFill>
+                <a:srgbClr val="000000"/>
+              </a:solidFill>
+            </a:endParaRPr>
+          </a:p>
+          <a:p>
+            <a:pPr fontAlgn="base">
+              <a:spcAft>
+                <a:spcPct val="0"/>
+              </a:spcAft>
+            </a:pPr>
+            <a:r>
+              <a:rPr lang="en-US" altLang="zh-CN" sz="800" kern="0" dirty="0" err="1">
+                <a:solidFill>
+                  <a:srgbClr val="000000"/>
+                </a:solidFill>
+              </a:rPr>
+              <a:t>VehTargtDecelBrkTorq</a:t>
+            </a:r>
+            <a:r>
+              <a:rPr lang="en-US" altLang="zh-CN" sz="800" kern="0" dirty="0">
+                <a:solidFill>
+                  <a:srgbClr val="000000"/>
+                </a:solidFill>
+              </a:rPr>
+              <a:t> </a:t>
+            </a:r>
+            <a:r>
+              <a:rPr lang="zh-CN" altLang="en-US" sz="800" kern="0" dirty="0">
+                <a:solidFill>
+                  <a:srgbClr val="000000"/>
+                </a:solidFill>
+              </a:rPr>
+              <a:t>这个信号无需新增，会按照</a:t>
+            </a:r>
+            <a:r>
+              <a:rPr lang="en-US" altLang="zh-CN" sz="800" kern="0" dirty="0">
+                <a:solidFill>
+                  <a:srgbClr val="000000"/>
+                </a:solidFill>
+              </a:rPr>
+              <a:t>3500Nm/s </a:t>
+            </a:r>
+            <a:r>
+              <a:rPr lang="zh-CN" altLang="en-US" sz="800" kern="0" dirty="0">
+                <a:solidFill>
+                  <a:srgbClr val="000000"/>
+                </a:solidFill>
+              </a:rPr>
+              <a:t>的斜率发送这个值给制动。</a:t>
+            </a:r>
+            <a:endParaRPr lang="en-US" altLang="zh-CN" sz="800" kern="0" dirty="0">
+              <a:solidFill>
+                <a:srgbClr val="000000"/>
+              </a:solidFill>
+            </a:endParaRPr>
+          </a:p>
+          <a:p>
+            <a:pPr algn="ctr" fontAlgn="base">
+              <a:spcAft>
+                <a:spcPct val="0"/>
+              </a:spcAft>
+            </a:pPr>
+            <a:endParaRPr kumimoji="0" lang="de-DE" sz="1200" b="0" i="0" u="none" strike="noStrike" kern="0" cap="none" spc="0" normalizeH="0" baseline="0" noProof="0" dirty="0">
+              <a:ln>
+                <a:noFill/>
+              </a:ln>
+              <a:effectLst/>
+              <a:uLnTx/>
+              <a:uFillTx/>
+              <a:latin typeface="Tahoma"/>
+              <a:ea typeface="+mn-ea"/>
+              <a:cs typeface="Tahoma" pitchFamily="34" charset="0"/>
+            </a:endParaRPr>
+          </a:p>
+        </p:txBody>
+      </p:sp>
+      <p:cxnSp>
+        <p:nvCxnSpPr>
+          <p:cNvPr id="50" name="Gerader Verbinder 49">
+            <a:extLst>
+              <a:ext uri="{FF2B5EF4-FFF2-40B4-BE49-F238E27FC236}">
+                <a16:creationId xmlns:a16="http://schemas.microsoft.com/office/drawing/2014/main" id="{784F9162-0B12-4FA5-C976-50467F4EE5B0}"/>
+              </a:ext>
+            </a:extLst>
+          </p:cNvPr>
+          <p:cNvCxnSpPr>
+            <a:cxnSpLocks/>
+          </p:cNvCxnSpPr>
+          <p:nvPr/>
+        </p:nvCxnSpPr>
+        <p:spPr>
+          <a:xfrm flipH="1">
+            <a:off x="5823123" y="4324254"/>
+            <a:ext cx="197306" cy="267"/>
+          </a:xfrm>
+          <a:prstGeom prst="line">
+            <a:avLst/>
+          </a:prstGeom>
+          <a:noFill/>
+          <a:ln w="6350" cap="rnd" cmpd="sng" algn="ctr">
+            <a:solidFill>
+              <a:srgbClr val="00B050"/>
+            </a:solidFill>
+            <a:prstDash val="solid"/>
+            <a:round/>
+          </a:ln>
+          <a:effectLst/>
+        </p:spPr>
+      </p:cxnSp>
+      <p:cxnSp>
+        <p:nvCxnSpPr>
+          <p:cNvPr id="59" name="Gerade Verbindung mit Pfeil 58">
+            <a:extLst>
+              <a:ext uri="{FF2B5EF4-FFF2-40B4-BE49-F238E27FC236}">
+                <a16:creationId xmlns:a16="http://schemas.microsoft.com/office/drawing/2014/main" id="{A21FB39A-90CD-1702-2D5F-A6AD759673D8}"/>
+              </a:ext>
+            </a:extLst>
+          </p:cNvPr>
+          <p:cNvCxnSpPr>
+            <a:cxnSpLocks/>
+          </p:cNvCxnSpPr>
+          <p:nvPr/>
+        </p:nvCxnSpPr>
+        <p:spPr>
+          <a:xfrm>
+            <a:off x="2850050" y="909831"/>
+            <a:ext cx="3450209" cy="2074"/>
+          </a:xfrm>
+          <a:prstGeom prst="straightConnector1">
+            <a:avLst/>
+          </a:prstGeom>
+          <a:noFill/>
+          <a:ln w="6350" cap="rnd" cmpd="sng" algn="ctr">
+            <a:solidFill>
+              <a:srgbClr val="FF0000"/>
+            </a:solidFill>
+            <a:prstDash val="solid"/>
+            <a:round/>
+            <a:headEnd type="triangle" w="med" len="med"/>
+            <a:tailEnd type="triangle" w="med" len="med"/>
+          </a:ln>
+          <a:effectLst/>
+        </p:spPr>
+      </p:cxnSp>
+      <p:cxnSp>
+        <p:nvCxnSpPr>
+          <p:cNvPr id="60" name="Gerade Verbindung mit Pfeil 59">
+            <a:extLst>
+              <a:ext uri="{FF2B5EF4-FFF2-40B4-BE49-F238E27FC236}">
+                <a16:creationId xmlns:a16="http://schemas.microsoft.com/office/drawing/2014/main" id="{D4572591-D87C-FA5E-1394-F721900ACEA4}"/>
+              </a:ext>
+            </a:extLst>
+          </p:cNvPr>
+          <p:cNvCxnSpPr>
+            <a:cxnSpLocks/>
+          </p:cNvCxnSpPr>
+          <p:nvPr/>
+        </p:nvCxnSpPr>
+        <p:spPr>
+          <a:xfrm>
+            <a:off x="5854646" y="860020"/>
+            <a:ext cx="2505113" cy="0"/>
+          </a:xfrm>
+          <a:prstGeom prst="straightConnector1">
+            <a:avLst/>
+          </a:prstGeom>
+          <a:noFill/>
+          <a:ln w="6350" cap="rnd" cmpd="sng" algn="ctr">
+            <a:solidFill>
+              <a:schemeClr val="bg2"/>
+            </a:solidFill>
+            <a:prstDash val="solid"/>
+            <a:round/>
+            <a:headEnd type="triangle" w="med" len="med"/>
+            <a:tailEnd type="triangle" w="med" len="med"/>
+          </a:ln>
+          <a:effectLst/>
+        </p:spPr>
+      </p:cxnSp>
+      <p:cxnSp>
+        <p:nvCxnSpPr>
+          <p:cNvPr id="62" name="Gerade Verbindung mit Pfeil 61">
+            <a:extLst>
+              <a:ext uri="{FF2B5EF4-FFF2-40B4-BE49-F238E27FC236}">
+                <a16:creationId xmlns:a16="http://schemas.microsoft.com/office/drawing/2014/main" id="{60E75279-4AF9-6D23-DA44-FD2EE348C507}"/>
+              </a:ext>
+            </a:extLst>
+          </p:cNvPr>
+          <p:cNvCxnSpPr>
+            <a:cxnSpLocks/>
+          </p:cNvCxnSpPr>
+          <p:nvPr/>
+        </p:nvCxnSpPr>
+        <p:spPr>
+          <a:xfrm>
+            <a:off x="597301" y="911905"/>
+            <a:ext cx="2272573" cy="0"/>
+          </a:xfrm>
+          <a:prstGeom prst="straightConnector1">
+            <a:avLst/>
+          </a:prstGeom>
+          <a:noFill/>
+          <a:ln w="6350" cap="rnd" cmpd="sng" algn="ctr">
+            <a:solidFill>
+              <a:schemeClr val="bg2"/>
+            </a:solidFill>
+            <a:prstDash val="solid"/>
+            <a:round/>
+            <a:headEnd type="triangle" w="med" len="med"/>
+            <a:tailEnd type="triangle" w="med" len="med"/>
+          </a:ln>
+          <a:effectLst/>
+        </p:spPr>
+      </p:cxnSp>
+      <p:cxnSp>
+        <p:nvCxnSpPr>
+          <p:cNvPr id="20" name="Gerader Verbinder 49">
+            <a:extLst>
+              <a:ext uri="{FF2B5EF4-FFF2-40B4-BE49-F238E27FC236}">
+                <a16:creationId xmlns:a16="http://schemas.microsoft.com/office/drawing/2014/main" id="{E97F7E7B-55BD-80D9-F41C-96DF39E26FA9}"/>
+              </a:ext>
+            </a:extLst>
+          </p:cNvPr>
+          <p:cNvCxnSpPr>
+            <a:cxnSpLocks/>
+          </p:cNvCxnSpPr>
+          <p:nvPr/>
+        </p:nvCxnSpPr>
+        <p:spPr>
+          <a:xfrm flipH="1" flipV="1">
+            <a:off x="2841059" y="4036558"/>
+            <a:ext cx="2988000" cy="9594"/>
+          </a:xfrm>
+          <a:prstGeom prst="line">
+            <a:avLst/>
+          </a:prstGeom>
+          <a:noFill/>
+          <a:ln w="6350" cap="rnd" cmpd="sng" algn="ctr">
+            <a:solidFill>
+              <a:srgbClr val="00B050"/>
+            </a:solidFill>
+            <a:prstDash val="solid"/>
+            <a:round/>
+          </a:ln>
+          <a:effectLst/>
+        </p:spPr>
+      </p:cxnSp>
+      <p:sp>
+        <p:nvSpPr>
+          <p:cNvPr id="23" name="文本框 22">
+            <a:extLst>
+              <a:ext uri="{FF2B5EF4-FFF2-40B4-BE49-F238E27FC236}">
+                <a16:creationId xmlns:a16="http://schemas.microsoft.com/office/drawing/2014/main" id="{C0336DA8-9BD5-3DBA-0C39-3EA848D87668}"/>
+              </a:ext>
+            </a:extLst>
+          </p:cNvPr>
+          <p:cNvSpPr txBox="1"/>
+          <p:nvPr/>
+        </p:nvSpPr>
+        <p:spPr>
+          <a:xfrm>
+            <a:off x="3134670" y="3836957"/>
+            <a:ext cx="2403981" cy="123111"/>
+          </a:xfrm>
+          <a:prstGeom prst="rect">
+            <a:avLst/>
+          </a:prstGeom>
+          <a:noFill/>
+        </p:spPr>
+        <p:txBody>
+          <a:bodyPr wrap="square" lIns="0" tIns="0" rIns="0" bIns="0" rtlCol="0">
+            <a:spAutoFit/>
+          </a:bodyPr>
+          <a:lstStyle/>
+          <a:p>
+            <a:pPr marL="0" marR="0" indent="0" defTabSz="914400" eaLnBrk="1" fontAlgn="base" latinLnBrk="0" hangingPunct="1">
+              <a:lnSpc>
+                <a:spcPct val="100000"/>
+              </a:lnSpc>
+              <a:spcBef>
+                <a:spcPts val="0"/>
+              </a:spcBef>
+              <a:spcAft>
+                <a:spcPct val="0"/>
+              </a:spcAft>
+              <a:buClrTx/>
+              <a:buSzTx/>
+              <a:buFontTx/>
+              <a:buNone/>
+              <a:tabLst/>
+            </a:pPr>
+            <a:r>
+              <a:rPr kumimoji="0" lang="zh-CN" altLang="en-US" sz="800" b="0" i="0" u="none" strike="noStrike" kern="0" cap="none" spc="0" normalizeH="0" baseline="0" noProof="0" dirty="0">
+                <a:ln>
+                  <a:noFill/>
+                </a:ln>
+                <a:solidFill>
+                  <a:srgbClr val="000000"/>
+                </a:solidFill>
+                <a:effectLst/>
+                <a:uLnTx/>
+                <a:uFillTx/>
+              </a:rPr>
+              <a:t>扭矩控制模式 </a:t>
+            </a:r>
+            <a:r>
+              <a:rPr kumimoji="0" lang="en-US" altLang="zh-CN" sz="800" b="0" i="0" u="none" strike="noStrike" kern="0" cap="none" spc="0" normalizeH="0" baseline="0" noProof="0" dirty="0" err="1">
+                <a:ln>
+                  <a:noFill/>
+                </a:ln>
+                <a:solidFill>
+                  <a:srgbClr val="000000"/>
+                </a:solidFill>
+                <a:effectLst/>
+                <a:uLnTx/>
+                <a:uFillTx/>
+              </a:rPr>
+              <a:t>TarRegTrqCtrlRqst</a:t>
+            </a:r>
+            <a:r>
+              <a:rPr kumimoji="0" lang="en-US" altLang="zh-CN" sz="800" b="0" i="0" u="none" strike="noStrike" kern="0" cap="none" spc="0" normalizeH="0" baseline="0" noProof="0" dirty="0">
+                <a:ln>
+                  <a:noFill/>
+                </a:ln>
+                <a:solidFill>
+                  <a:srgbClr val="000000"/>
+                </a:solidFill>
+                <a:effectLst/>
+                <a:uLnTx/>
+                <a:uFillTx/>
+              </a:rPr>
+              <a:t> = Request</a:t>
+            </a:r>
+            <a:endParaRPr kumimoji="0" lang="zh-CN" altLang="en-US" sz="800" b="0" i="0" u="none" strike="noStrike" kern="0" cap="none" spc="0" normalizeH="0" baseline="0" noProof="0" dirty="0">
+              <a:ln>
+                <a:noFill/>
+              </a:ln>
+              <a:solidFill>
+                <a:srgbClr val="000000"/>
+              </a:solidFill>
+              <a:effectLst/>
+              <a:uLnTx/>
+              <a:uFillTx/>
+            </a:endParaRPr>
+          </a:p>
+        </p:txBody>
+      </p:sp>
+      <p:sp>
+        <p:nvSpPr>
+          <p:cNvPr id="34" name="文本框 33">
+            <a:extLst>
+              <a:ext uri="{FF2B5EF4-FFF2-40B4-BE49-F238E27FC236}">
+                <a16:creationId xmlns:a16="http://schemas.microsoft.com/office/drawing/2014/main" id="{A6FF1DC2-9178-A76A-E278-BE627DCA8692}"/>
+              </a:ext>
+            </a:extLst>
+          </p:cNvPr>
+          <p:cNvSpPr txBox="1"/>
+          <p:nvPr/>
+        </p:nvSpPr>
+        <p:spPr>
+          <a:xfrm>
+            <a:off x="5391895" y="4138842"/>
+            <a:ext cx="2027958" cy="123111"/>
+          </a:xfrm>
+          <a:prstGeom prst="rect">
+            <a:avLst/>
+          </a:prstGeom>
+          <a:noFill/>
+        </p:spPr>
+        <p:txBody>
+          <a:bodyPr wrap="square" lIns="0" tIns="0" rIns="0" bIns="0" rtlCol="0">
+            <a:spAutoFit/>
+          </a:bodyPr>
+          <a:lstStyle/>
+          <a:p>
+            <a:pPr marL="0" marR="0" indent="0" defTabSz="914400" eaLnBrk="1" fontAlgn="base" latinLnBrk="0" hangingPunct="1">
+              <a:lnSpc>
+                <a:spcPct val="100000"/>
+              </a:lnSpc>
+              <a:spcBef>
+                <a:spcPts val="0"/>
+              </a:spcBef>
+              <a:spcAft>
+                <a:spcPct val="0"/>
+              </a:spcAft>
+              <a:buClrTx/>
+              <a:buSzTx/>
+              <a:buFontTx/>
+              <a:buNone/>
+              <a:tabLst/>
+            </a:pPr>
+            <a:r>
+              <a:rPr kumimoji="0" lang="zh-CN" altLang="en-US" sz="800" b="0" i="0" u="none" strike="noStrike" kern="0" cap="none" spc="0" normalizeH="0" baseline="0" noProof="0" dirty="0">
+                <a:ln>
+                  <a:noFill/>
+                </a:ln>
+                <a:solidFill>
+                  <a:srgbClr val="000000"/>
+                </a:solidFill>
+                <a:effectLst/>
+                <a:uLnTx/>
+                <a:uFillTx/>
+              </a:rPr>
+              <a:t>转速控制模式 </a:t>
+            </a:r>
+            <a:r>
+              <a:rPr kumimoji="0" lang="en-US" altLang="zh-CN" sz="800" b="0" i="0" u="none" strike="noStrike" kern="0" cap="none" spc="0" normalizeH="0" baseline="0" noProof="0" dirty="0" err="1">
+                <a:ln>
+                  <a:noFill/>
+                </a:ln>
+                <a:solidFill>
+                  <a:srgbClr val="000000"/>
+                </a:solidFill>
+                <a:effectLst/>
+                <a:uLnTx/>
+                <a:uFillTx/>
+              </a:rPr>
+              <a:t>TarRpmCtrlRqst</a:t>
+            </a:r>
+            <a:r>
+              <a:rPr kumimoji="0" lang="en-US" altLang="zh-CN" sz="800" b="0" i="0" u="none" strike="noStrike" kern="0" cap="none" spc="0" normalizeH="0" baseline="0" noProof="0" dirty="0">
+                <a:ln>
+                  <a:noFill/>
+                </a:ln>
+                <a:solidFill>
+                  <a:srgbClr val="000000"/>
+                </a:solidFill>
+                <a:effectLst/>
+                <a:uLnTx/>
+                <a:uFillTx/>
+              </a:rPr>
+              <a:t> = Request</a:t>
+            </a:r>
+            <a:endParaRPr kumimoji="0" lang="zh-CN" altLang="en-US" sz="800" b="0" i="0" u="none" strike="noStrike" kern="0" cap="none" spc="0" normalizeH="0" baseline="0" noProof="0" dirty="0">
+              <a:ln>
+                <a:noFill/>
+              </a:ln>
+              <a:solidFill>
+                <a:srgbClr val="000000"/>
+              </a:solidFill>
+              <a:effectLst/>
+              <a:uLnTx/>
+              <a:uFillTx/>
+            </a:endParaRPr>
+          </a:p>
+        </p:txBody>
+      </p:sp>
+      <p:cxnSp>
+        <p:nvCxnSpPr>
+          <p:cNvPr id="10" name="Gerader Verbinder 27">
+            <a:extLst>
+              <a:ext uri="{FF2B5EF4-FFF2-40B4-BE49-F238E27FC236}">
+                <a16:creationId xmlns:a16="http://schemas.microsoft.com/office/drawing/2014/main" id="{052B1301-A0E3-CBF6-1543-4F1AEDF98F4C}"/>
+              </a:ext>
+            </a:extLst>
+          </p:cNvPr>
+          <p:cNvCxnSpPr>
+            <a:cxnSpLocks/>
+          </p:cNvCxnSpPr>
+          <p:nvPr/>
+        </p:nvCxnSpPr>
+        <p:spPr>
+          <a:xfrm>
+            <a:off x="2841057" y="2903132"/>
+            <a:ext cx="214426" cy="815540"/>
+          </a:xfrm>
+          <a:prstGeom prst="line">
+            <a:avLst/>
+          </a:prstGeom>
+          <a:noFill/>
+          <a:ln w="6350" cap="rnd" cmpd="sng" algn="ctr">
+            <a:solidFill>
+              <a:srgbClr val="E52330"/>
+            </a:solidFill>
+            <a:prstDash val="solid"/>
+            <a:round/>
+          </a:ln>
+          <a:effectLst/>
+        </p:spPr>
+      </p:cxnSp>
+      <p:cxnSp>
+        <p:nvCxnSpPr>
+          <p:cNvPr id="16" name="Gerader Verbinder 32">
+            <a:extLst>
+              <a:ext uri="{FF2B5EF4-FFF2-40B4-BE49-F238E27FC236}">
+                <a16:creationId xmlns:a16="http://schemas.microsoft.com/office/drawing/2014/main" id="{4A08F896-67A6-5A75-2FF8-718CE9D3669F}"/>
+              </a:ext>
+            </a:extLst>
+          </p:cNvPr>
+          <p:cNvCxnSpPr>
+            <a:cxnSpLocks/>
+          </p:cNvCxnSpPr>
+          <p:nvPr/>
+        </p:nvCxnSpPr>
+        <p:spPr>
+          <a:xfrm>
+            <a:off x="3055483" y="3719380"/>
+            <a:ext cx="2985656" cy="0"/>
+          </a:xfrm>
+          <a:prstGeom prst="line">
+            <a:avLst/>
+          </a:prstGeom>
+          <a:noFill/>
+          <a:ln w="6350" cap="rnd" cmpd="sng" algn="ctr">
+            <a:solidFill>
+              <a:srgbClr val="E52330"/>
+            </a:solidFill>
+            <a:prstDash val="solid"/>
+            <a:round/>
+          </a:ln>
+          <a:effectLst/>
+        </p:spPr>
+      </p:cxnSp>
+      <p:cxnSp>
+        <p:nvCxnSpPr>
+          <p:cNvPr id="21" name="Gerader Verbinder 4">
+            <a:extLst>
+              <a:ext uri="{FF2B5EF4-FFF2-40B4-BE49-F238E27FC236}">
+                <a16:creationId xmlns:a16="http://schemas.microsoft.com/office/drawing/2014/main" id="{322F1A94-8E84-6200-5E2F-2A80DA2E072B}"/>
+              </a:ext>
+            </a:extLst>
+          </p:cNvPr>
+          <p:cNvCxnSpPr>
+            <a:cxnSpLocks/>
+          </p:cNvCxnSpPr>
+          <p:nvPr/>
+        </p:nvCxnSpPr>
+        <p:spPr>
+          <a:xfrm flipV="1">
+            <a:off x="2842881" y="2557448"/>
+            <a:ext cx="224482" cy="1000365"/>
+          </a:xfrm>
+          <a:prstGeom prst="line">
+            <a:avLst/>
+          </a:prstGeom>
+          <a:noFill/>
+          <a:ln w="6350" cap="rnd" cmpd="sng" algn="ctr">
+            <a:solidFill>
+              <a:srgbClr val="0057B7"/>
+            </a:solidFill>
+            <a:prstDash val="solid"/>
+            <a:round/>
+          </a:ln>
+          <a:effectLst/>
+        </p:spPr>
+      </p:cxnSp>
+      <p:cxnSp>
+        <p:nvCxnSpPr>
+          <p:cNvPr id="24" name="Gerader Verbinder 8">
+            <a:extLst>
+              <a:ext uri="{FF2B5EF4-FFF2-40B4-BE49-F238E27FC236}">
+                <a16:creationId xmlns:a16="http://schemas.microsoft.com/office/drawing/2014/main" id="{E14276D0-4BA3-E1C3-A556-36D80B47B4C1}"/>
+              </a:ext>
+            </a:extLst>
+          </p:cNvPr>
+          <p:cNvCxnSpPr>
+            <a:cxnSpLocks/>
+          </p:cNvCxnSpPr>
+          <p:nvPr/>
+        </p:nvCxnSpPr>
+        <p:spPr>
+          <a:xfrm>
+            <a:off x="3067363" y="2560217"/>
+            <a:ext cx="2594919" cy="0"/>
+          </a:xfrm>
+          <a:prstGeom prst="line">
+            <a:avLst/>
+          </a:prstGeom>
+          <a:noFill/>
+          <a:ln w="6350" cap="rnd" cmpd="sng" algn="ctr">
+            <a:solidFill>
+              <a:srgbClr val="0057B7"/>
+            </a:solidFill>
+            <a:prstDash val="solid"/>
+            <a:round/>
+          </a:ln>
+          <a:effectLst/>
+        </p:spPr>
+      </p:cxnSp>
+      <p:cxnSp>
+        <p:nvCxnSpPr>
+          <p:cNvPr id="32" name="Gerader Verbinder 12">
+            <a:extLst>
+              <a:ext uri="{FF2B5EF4-FFF2-40B4-BE49-F238E27FC236}">
+                <a16:creationId xmlns:a16="http://schemas.microsoft.com/office/drawing/2014/main" id="{3F849424-10F0-5089-8EEA-7C43EE771E99}"/>
+              </a:ext>
+            </a:extLst>
+          </p:cNvPr>
+          <p:cNvCxnSpPr>
+            <a:cxnSpLocks/>
+          </p:cNvCxnSpPr>
+          <p:nvPr/>
+        </p:nvCxnSpPr>
+        <p:spPr>
+          <a:xfrm>
+            <a:off x="2842053" y="3300380"/>
+            <a:ext cx="224482" cy="257433"/>
+          </a:xfrm>
+          <a:prstGeom prst="line">
+            <a:avLst/>
+          </a:prstGeom>
+          <a:noFill/>
+          <a:ln w="6350" cap="rnd" cmpd="sng" algn="ctr">
+            <a:solidFill>
+              <a:srgbClr val="2EBEEF"/>
+            </a:solidFill>
+            <a:prstDash val="solid"/>
+            <a:round/>
+          </a:ln>
+          <a:effectLst/>
+        </p:spPr>
+      </p:cxnSp>
+      <p:cxnSp>
+        <p:nvCxnSpPr>
+          <p:cNvPr id="36" name="Gerader Verbinder 18">
+            <a:extLst>
+              <a:ext uri="{FF2B5EF4-FFF2-40B4-BE49-F238E27FC236}">
+                <a16:creationId xmlns:a16="http://schemas.microsoft.com/office/drawing/2014/main" id="{6C228109-745A-56E8-6E30-ADD28A090314}"/>
+              </a:ext>
+            </a:extLst>
+          </p:cNvPr>
+          <p:cNvCxnSpPr>
+            <a:cxnSpLocks/>
+          </p:cNvCxnSpPr>
+          <p:nvPr/>
+        </p:nvCxnSpPr>
+        <p:spPr>
+          <a:xfrm>
+            <a:off x="3077537" y="3557813"/>
+            <a:ext cx="2570205" cy="0"/>
+          </a:xfrm>
+          <a:prstGeom prst="line">
+            <a:avLst/>
+          </a:prstGeom>
+          <a:noFill/>
+          <a:ln w="6350" cap="rnd" cmpd="sng" algn="ctr">
+            <a:solidFill>
+              <a:srgbClr val="2EBEEF"/>
+            </a:solidFill>
+            <a:prstDash val="solid"/>
+            <a:round/>
+          </a:ln>
+          <a:effectLst/>
+        </p:spPr>
+      </p:cxnSp>
+      <p:sp>
+        <p:nvSpPr>
+          <p:cNvPr id="38" name="Bogen 25">
+            <a:extLst>
+              <a:ext uri="{FF2B5EF4-FFF2-40B4-BE49-F238E27FC236}">
+                <a16:creationId xmlns:a16="http://schemas.microsoft.com/office/drawing/2014/main" id="{476B8304-E8EB-F82B-2AAA-65B164095C3D}"/>
+              </a:ext>
+            </a:extLst>
+          </p:cNvPr>
+          <p:cNvSpPr/>
+          <p:nvPr/>
+        </p:nvSpPr>
+        <p:spPr>
+          <a:xfrm rot="10800000">
+            <a:off x="5634288" y="3215523"/>
+            <a:ext cx="440717" cy="498601"/>
+          </a:xfrm>
+          <a:prstGeom prst="arc">
+            <a:avLst>
+              <a:gd name="adj1" fmla="val 16200000"/>
+              <a:gd name="adj2" fmla="val 20101365"/>
+            </a:avLst>
+          </a:prstGeom>
+          <a:noFill/>
+          <a:ln w="6350" cap="rnd" cmpd="sng" algn="ctr">
+            <a:solidFill>
+              <a:srgbClr val="93D5F6"/>
+            </a:solidFill>
+            <a:prstDash val="solid"/>
+            <a:round/>
+          </a:ln>
+          <a:effectLst/>
+        </p:spPr>
+        <p:txBody>
+          <a:bodyPr rtlCol="0" anchor="ctr"/>
+          <a:lstStyle/>
+          <a:p>
+            <a:pPr algn="ctr"/>
+            <a:endParaRPr lang="de-DE"/>
+          </a:p>
+        </p:txBody>
+      </p:sp>
+      <p:sp>
+        <p:nvSpPr>
+          <p:cNvPr id="52" name="Bogen 24">
+            <a:extLst>
+              <a:ext uri="{FF2B5EF4-FFF2-40B4-BE49-F238E27FC236}">
+                <a16:creationId xmlns:a16="http://schemas.microsoft.com/office/drawing/2014/main" id="{E4BD0D70-2EB8-BC0A-882D-A1404277B18E}"/>
+              </a:ext>
+            </a:extLst>
+          </p:cNvPr>
+          <p:cNvSpPr/>
+          <p:nvPr/>
+        </p:nvSpPr>
+        <p:spPr>
+          <a:xfrm rot="10800000">
+            <a:off x="5668514" y="1417868"/>
+            <a:ext cx="327453" cy="2303995"/>
+          </a:xfrm>
+          <a:prstGeom prst="arc">
+            <a:avLst/>
+          </a:prstGeom>
+          <a:noFill/>
+          <a:ln w="6350" cap="rnd" cmpd="sng" algn="ctr">
+            <a:solidFill>
+              <a:srgbClr val="00265F"/>
+            </a:solidFill>
+            <a:prstDash val="solid"/>
+            <a:round/>
+          </a:ln>
+          <a:effectLst/>
+        </p:spPr>
+        <p:txBody>
+          <a:bodyPr rtlCol="0" anchor="ctr"/>
+          <a:lstStyle/>
+          <a:p>
+            <a:pPr algn="ctr"/>
+            <a:endParaRPr lang="de-DE"/>
+          </a:p>
+        </p:txBody>
+      </p:sp>
+      <p:sp>
+        <p:nvSpPr>
+          <p:cNvPr id="54" name="矩形 53">
+            <a:extLst>
+              <a:ext uri="{FF2B5EF4-FFF2-40B4-BE49-F238E27FC236}">
+                <a16:creationId xmlns:a16="http://schemas.microsoft.com/office/drawing/2014/main" id="{009D855D-092B-722D-0DE6-512DB69664FC}"/>
+              </a:ext>
+            </a:extLst>
+          </p:cNvPr>
+          <p:cNvSpPr/>
+          <p:nvPr/>
+        </p:nvSpPr>
+        <p:spPr>
+          <a:xfrm>
+            <a:off x="3999325" y="155500"/>
+            <a:ext cx="513676" cy="200896"/>
+          </a:xfrm>
+          <a:prstGeom prst="rect">
+            <a:avLst/>
+          </a:prstGeom>
+          <a:solidFill>
+            <a:srgbClr val="FF0000">
+              <a:alpha val="34118"/>
+            </a:srgbClr>
+          </a:solidFill>
+          <a:ln w="12700" cap="flat" cmpd="sng" algn="ctr">
+            <a:noFill/>
+            <a:prstDash val="solid"/>
+          </a:ln>
+          <a:effectLst/>
+        </p:spPr>
+        <p:txBody>
+          <a:bodyPr rot="0" spcFirstLastPara="0" vertOverflow="overflow" horzOverflow="overflow" vert="horz" wrap="square" lIns="90000" tIns="90000" rIns="90000" bIns="90000" numCol="1" spcCol="0" rtlCol="0" fromWordArt="0" anchor="ctr" anchorCtr="0" forceAA="0" compatLnSpc="1">
+            <a:prstTxWarp prst="textNoShape">
+              <a:avLst/>
+            </a:prstTxWarp>
+            <a:noAutofit/>
+          </a:bodyPr>
+          <a:lstStyle/>
+          <a:p>
+            <a:pPr marL="0" marR="0" indent="0" algn="ctr" defTabSz="914400" eaLnBrk="1" fontAlgn="base" latinLnBrk="0" hangingPunct="1">
+              <a:lnSpc>
+                <a:spcPct val="100000"/>
+              </a:lnSpc>
+              <a:spcBef>
+                <a:spcPts val="0"/>
+              </a:spcBef>
+              <a:spcAft>
+                <a:spcPct val="0"/>
+              </a:spcAft>
+              <a:buClrTx/>
+              <a:buSzTx/>
+              <a:buFontTx/>
+              <a:buNone/>
+              <a:tabLst/>
+            </a:pPr>
+            <a:endParaRPr kumimoji="0" lang="zh-CN" altLang="en-US" sz="1200" b="0" i="0" u="none" strike="noStrike" kern="0" cap="none" spc="0" normalizeH="0" baseline="0" noProof="0" dirty="0" err="1">
+              <a:ln>
+                <a:noFill/>
+              </a:ln>
+              <a:effectLst/>
+              <a:uLnTx/>
+              <a:uFillTx/>
+              <a:latin typeface="Tahoma"/>
+              <a:ea typeface="+mn-ea"/>
+              <a:cs typeface="Tahoma" pitchFamily="34" charset="0"/>
+            </a:endParaRPr>
+          </a:p>
+        </p:txBody>
+      </p:sp>
+      <p:sp>
+        <p:nvSpPr>
+          <p:cNvPr id="55" name="文本框 54">
+            <a:extLst>
+              <a:ext uri="{FF2B5EF4-FFF2-40B4-BE49-F238E27FC236}">
+                <a16:creationId xmlns:a16="http://schemas.microsoft.com/office/drawing/2014/main" id="{548909BC-44E8-3FA1-3678-C60A08B12344}"/>
+              </a:ext>
+            </a:extLst>
+          </p:cNvPr>
+          <p:cNvSpPr txBox="1"/>
+          <p:nvPr/>
+        </p:nvSpPr>
+        <p:spPr>
+          <a:xfrm>
+            <a:off x="4629582" y="31955"/>
+            <a:ext cx="2009411" cy="538609"/>
+          </a:xfrm>
+          <a:prstGeom prst="rect">
+            <a:avLst/>
+          </a:prstGeom>
+          <a:noFill/>
+        </p:spPr>
+        <p:txBody>
+          <a:bodyPr wrap="square" lIns="0" tIns="0" rIns="0" bIns="0" rtlCol="0">
+            <a:spAutoFit/>
+          </a:bodyPr>
+          <a:lstStyle/>
+          <a:p>
+            <a:pPr marL="0" marR="0" indent="0" defTabSz="914400" eaLnBrk="1" fontAlgn="base" latinLnBrk="0" hangingPunct="1">
+              <a:lnSpc>
+                <a:spcPct val="100000"/>
+              </a:lnSpc>
+              <a:spcBef>
+                <a:spcPts val="0"/>
+              </a:spcBef>
+              <a:spcAft>
+                <a:spcPct val="0"/>
+              </a:spcAft>
+              <a:buClrTx/>
+              <a:buSzTx/>
+              <a:buFontTx/>
+              <a:buNone/>
+              <a:tabLst/>
+            </a:pPr>
+            <a:r>
+              <a:rPr kumimoji="0" lang="zh-CN" altLang="en-US" sz="700" b="0" i="0" u="none" strike="noStrike" kern="0" cap="none" spc="0" normalizeH="0" baseline="0" noProof="0" dirty="0">
+                <a:ln>
+                  <a:noFill/>
+                </a:ln>
+                <a:solidFill>
+                  <a:srgbClr val="000000"/>
+                </a:solidFill>
+                <a:effectLst/>
+                <a:uLnTx/>
+                <a:uFillTx/>
+              </a:rPr>
+              <a:t>驾驶员请求扭矩与实际车辆减速扭矩一致：</a:t>
+            </a:r>
+            <a:endParaRPr kumimoji="0" lang="en-US" altLang="zh-CN" sz="700" b="0" i="0" u="none" strike="noStrike" kern="0" cap="none" spc="0" normalizeH="0" baseline="0" noProof="0" dirty="0">
+              <a:ln>
+                <a:noFill/>
+              </a:ln>
+              <a:solidFill>
+                <a:srgbClr val="000000"/>
+              </a:solidFill>
+              <a:effectLst/>
+              <a:uLnTx/>
+              <a:uFillTx/>
+            </a:endParaRPr>
+          </a:p>
+          <a:p>
+            <a:pPr marL="0" marR="0" indent="0" defTabSz="914400" eaLnBrk="1" fontAlgn="base" latinLnBrk="0" hangingPunct="1">
+              <a:lnSpc>
+                <a:spcPct val="100000"/>
+              </a:lnSpc>
+              <a:spcBef>
+                <a:spcPts val="0"/>
+              </a:spcBef>
+              <a:spcAft>
+                <a:spcPct val="0"/>
+              </a:spcAft>
+              <a:buClrTx/>
+              <a:buSzTx/>
+              <a:buFontTx/>
+              <a:buNone/>
+              <a:tabLst/>
+            </a:pPr>
+            <a:r>
+              <a:rPr kumimoji="0" lang="en-US" altLang="zh-CN" sz="700" b="0" i="0" u="none" strike="noStrike" kern="0" cap="none" spc="0" normalizeH="0" baseline="0" noProof="0" dirty="0" err="1">
+                <a:ln>
+                  <a:noFill/>
+                </a:ln>
+                <a:solidFill>
+                  <a:srgbClr val="000000"/>
+                </a:solidFill>
+                <a:effectLst/>
+                <a:uLnTx/>
+                <a:uFillTx/>
+              </a:rPr>
+              <a:t>DrRqdFrntShftBrkTorq</a:t>
+            </a:r>
+            <a:endParaRPr kumimoji="0" lang="en-US" altLang="zh-CN" sz="700" b="0" i="0" u="none" strike="noStrike" kern="0" cap="none" spc="0" normalizeH="0" baseline="0" noProof="0" dirty="0">
+              <a:ln>
+                <a:noFill/>
+              </a:ln>
+              <a:solidFill>
+                <a:srgbClr val="000000"/>
+              </a:solidFill>
+              <a:effectLst/>
+              <a:uLnTx/>
+              <a:uFillTx/>
+            </a:endParaRPr>
+          </a:p>
+          <a:p>
+            <a:pPr marL="0" marR="0" indent="0" defTabSz="914400" eaLnBrk="1" fontAlgn="base" latinLnBrk="0" hangingPunct="1">
+              <a:lnSpc>
+                <a:spcPct val="100000"/>
+              </a:lnSpc>
+              <a:spcBef>
+                <a:spcPts val="0"/>
+              </a:spcBef>
+              <a:spcAft>
+                <a:spcPct val="0"/>
+              </a:spcAft>
+              <a:buClrTx/>
+              <a:buSzTx/>
+              <a:buFontTx/>
+              <a:buNone/>
+              <a:tabLst/>
+            </a:pPr>
+            <a:r>
+              <a:rPr kumimoji="0" lang="en-US" altLang="zh-CN" sz="700" b="0" i="0" u="none" strike="noStrike" kern="0" cap="none" spc="0" normalizeH="0" baseline="0" noProof="0" dirty="0" err="1">
+                <a:ln>
+                  <a:noFill/>
+                </a:ln>
+                <a:solidFill>
+                  <a:srgbClr val="000000"/>
+                </a:solidFill>
+                <a:effectLst/>
+                <a:uLnTx/>
+                <a:uFillTx/>
+              </a:rPr>
+              <a:t>DrRqdRearShftBrkTorq</a:t>
+            </a:r>
+            <a:endParaRPr kumimoji="0" lang="en-US" altLang="zh-CN" sz="700" b="0" i="0" u="none" strike="noStrike" kern="0" cap="none" spc="0" normalizeH="0" baseline="0" noProof="0" dirty="0">
+              <a:ln>
+                <a:noFill/>
+              </a:ln>
+              <a:solidFill>
+                <a:srgbClr val="000000"/>
+              </a:solidFill>
+              <a:effectLst/>
+              <a:uLnTx/>
+              <a:uFillTx/>
+            </a:endParaRPr>
+          </a:p>
+          <a:p>
+            <a:pPr fontAlgn="base">
+              <a:spcAft>
+                <a:spcPct val="0"/>
+              </a:spcAft>
+            </a:pPr>
+            <a:r>
+              <a:rPr lang="en-US" altLang="zh-CN" sz="700" kern="0" dirty="0" err="1">
+                <a:solidFill>
+                  <a:srgbClr val="000000"/>
+                </a:solidFill>
+              </a:rPr>
+              <a:t>PrDrvShftDrRqstdTorqDff_FD</a:t>
+            </a:r>
+            <a:endParaRPr lang="en-US" altLang="zh-CN" sz="700" kern="0" dirty="0">
+              <a:solidFill>
+                <a:srgbClr val="000000"/>
+              </a:solidFill>
+            </a:endParaRPr>
+          </a:p>
+          <a:p>
+            <a:pPr fontAlgn="base">
+              <a:spcAft>
+                <a:spcPct val="0"/>
+              </a:spcAft>
+            </a:pPr>
+            <a:r>
+              <a:rPr lang="en-US" altLang="zh-CN" sz="700" kern="0" dirty="0" err="1">
+                <a:solidFill>
+                  <a:srgbClr val="000000"/>
+                </a:solidFill>
+              </a:rPr>
+              <a:t>ThScdDrvShftDrRqstdTorqDffHCU_FD</a:t>
+            </a:r>
+            <a:endParaRPr kumimoji="0" lang="zh-CN" altLang="en-US" sz="700" b="0" i="0" u="none" strike="noStrike" kern="0" cap="none" spc="0" normalizeH="0" baseline="0" noProof="0" dirty="0">
+              <a:ln>
+                <a:noFill/>
+              </a:ln>
+              <a:solidFill>
+                <a:srgbClr val="000000"/>
+              </a:solidFill>
+              <a:effectLst/>
+              <a:uLnTx/>
+              <a:uFillTx/>
+            </a:endParaRPr>
+          </a:p>
+        </p:txBody>
+      </p:sp>
+      <p:sp>
+        <p:nvSpPr>
+          <p:cNvPr id="58" name="任意多边形: 形状 57">
+            <a:extLst>
+              <a:ext uri="{FF2B5EF4-FFF2-40B4-BE49-F238E27FC236}">
+                <a16:creationId xmlns:a16="http://schemas.microsoft.com/office/drawing/2014/main" id="{9BE5512C-14B5-CE37-2CFE-6B52606DD1B0}"/>
+              </a:ext>
+            </a:extLst>
+          </p:cNvPr>
+          <p:cNvSpPr/>
+          <p:nvPr/>
+        </p:nvSpPr>
+        <p:spPr>
+          <a:xfrm>
+            <a:off x="5656217" y="1016493"/>
+            <a:ext cx="169817" cy="1491576"/>
+          </a:xfrm>
+          <a:custGeom>
+            <a:avLst/>
+            <a:gdLst>
+              <a:gd name="csX0" fmla="*/ 0 w 169817"/>
+              <a:gd name="csY0" fmla="*/ 0 h 1306286"/>
+              <a:gd name="csX1" fmla="*/ 0 w 169817"/>
+              <a:gd name="csY1" fmla="*/ 1306286 h 1306286"/>
+              <a:gd name="csX2" fmla="*/ 169817 w 169817"/>
+              <a:gd name="csY2" fmla="*/ 1299754 h 1306286"/>
+              <a:gd name="csX3" fmla="*/ 0 w 169817"/>
+              <a:gd name="csY3" fmla="*/ 0 h 1306286"/>
+            </a:gdLst>
+            <a:ahLst/>
+            <a:cxnLst>
+              <a:cxn ang="0">
+                <a:pos x="csX0" y="csY0"/>
+              </a:cxn>
+              <a:cxn ang="0">
+                <a:pos x="csX1" y="csY1"/>
+              </a:cxn>
+              <a:cxn ang="0">
+                <a:pos x="csX2" y="csY2"/>
+              </a:cxn>
+              <a:cxn ang="0">
+                <a:pos x="csX3" y="csY3"/>
+              </a:cxn>
+            </a:cxnLst>
+            <a:rect l="l" t="t" r="r" b="b"/>
+            <a:pathLst>
+              <a:path w="169817" h="1306286">
+                <a:moveTo>
+                  <a:pt x="0" y="0"/>
+                </a:moveTo>
+                <a:lnTo>
+                  <a:pt x="0" y="1306286"/>
+                </a:lnTo>
+                <a:lnTo>
+                  <a:pt x="169817" y="1299754"/>
+                </a:lnTo>
+                <a:lnTo>
+                  <a:pt x="0" y="0"/>
+                </a:lnTo>
+                <a:close/>
+              </a:path>
+            </a:pathLst>
+          </a:custGeom>
+          <a:solidFill>
+            <a:srgbClr val="00B0F0">
+              <a:alpha val="23922"/>
+            </a:srgbClr>
+          </a:solidFill>
+          <a:ln w="12700" cap="flat" cmpd="sng" algn="ctr">
+            <a:noFill/>
+            <a:prstDash val="solid"/>
+          </a:ln>
+          <a:effectLst/>
+        </p:spPr>
+        <p:txBody>
+          <a:bodyPr rot="0" spcFirstLastPara="0" vertOverflow="overflow" horzOverflow="overflow" vert="horz" wrap="square" lIns="90000" tIns="90000" rIns="90000" bIns="90000" numCol="1" spcCol="0" rtlCol="0" fromWordArt="0" anchor="ctr" anchorCtr="0" forceAA="0" compatLnSpc="1">
+            <a:prstTxWarp prst="textNoShape">
+              <a:avLst/>
+            </a:prstTxWarp>
+            <a:noAutofit/>
+          </a:bodyPr>
+          <a:lstStyle/>
+          <a:p>
+            <a:pPr marL="0" marR="0" indent="0" algn="ctr" defTabSz="914400" eaLnBrk="1" fontAlgn="base" latinLnBrk="0" hangingPunct="1">
+              <a:lnSpc>
+                <a:spcPct val="100000"/>
+              </a:lnSpc>
+              <a:spcBef>
+                <a:spcPts val="0"/>
+              </a:spcBef>
+              <a:spcAft>
+                <a:spcPct val="0"/>
+              </a:spcAft>
+              <a:buClrTx/>
+              <a:buSzTx/>
+              <a:buFontTx/>
+              <a:buNone/>
+              <a:tabLst/>
+            </a:pPr>
+            <a:endParaRPr kumimoji="0" lang="zh-CN" altLang="en-US" sz="1200" b="0" i="0" u="none" strike="noStrike" kern="0" cap="none" spc="0" normalizeH="0" baseline="0" noProof="0" dirty="0" err="1">
+              <a:ln>
+                <a:noFill/>
+              </a:ln>
+              <a:effectLst/>
+              <a:uLnTx/>
+              <a:uFillTx/>
+              <a:latin typeface="Tahoma"/>
+              <a:ea typeface="+mn-ea"/>
+              <a:cs typeface="Tahoma" pitchFamily="34" charset="0"/>
+            </a:endParaRPr>
+          </a:p>
+        </p:txBody>
+      </p:sp>
+      <p:sp>
+        <p:nvSpPr>
+          <p:cNvPr id="61" name="矩形 60">
+            <a:extLst>
+              <a:ext uri="{FF2B5EF4-FFF2-40B4-BE49-F238E27FC236}">
+                <a16:creationId xmlns:a16="http://schemas.microsoft.com/office/drawing/2014/main" id="{3E6E3119-F901-4D21-64E6-A3D2D2072A31}"/>
+              </a:ext>
+            </a:extLst>
+          </p:cNvPr>
+          <p:cNvSpPr/>
+          <p:nvPr/>
+        </p:nvSpPr>
+        <p:spPr>
+          <a:xfrm>
+            <a:off x="6462275" y="210531"/>
+            <a:ext cx="513676" cy="200896"/>
+          </a:xfrm>
+          <a:prstGeom prst="rect">
+            <a:avLst/>
+          </a:prstGeom>
+          <a:solidFill>
+            <a:srgbClr val="C2ECFB"/>
+          </a:solidFill>
+          <a:ln w="12700" cap="flat" cmpd="sng" algn="ctr">
+            <a:noFill/>
+            <a:prstDash val="solid"/>
+          </a:ln>
+          <a:effectLst/>
+        </p:spPr>
+        <p:txBody>
+          <a:bodyPr rot="0" spcFirstLastPara="0" vertOverflow="overflow" horzOverflow="overflow" vert="horz" wrap="square" lIns="90000" tIns="90000" rIns="90000" bIns="90000" numCol="1" spcCol="0" rtlCol="0" fromWordArt="0" anchor="ctr" anchorCtr="0" forceAA="0" compatLnSpc="1">
+            <a:prstTxWarp prst="textNoShape">
+              <a:avLst/>
+            </a:prstTxWarp>
+            <a:noAutofit/>
+          </a:bodyPr>
+          <a:lstStyle/>
+          <a:p>
+            <a:pPr marL="0" marR="0" indent="0" algn="ctr" defTabSz="914400" eaLnBrk="1" fontAlgn="base" latinLnBrk="0" hangingPunct="1">
+              <a:lnSpc>
+                <a:spcPct val="100000"/>
+              </a:lnSpc>
+              <a:spcBef>
+                <a:spcPts val="0"/>
+              </a:spcBef>
+              <a:spcAft>
+                <a:spcPct val="0"/>
+              </a:spcAft>
+              <a:buClrTx/>
+              <a:buSzTx/>
+              <a:buFontTx/>
+              <a:buNone/>
+              <a:tabLst/>
+            </a:pPr>
+            <a:endParaRPr kumimoji="0" lang="zh-CN" altLang="en-US" sz="1200" b="0" i="0" u="none" strike="noStrike" kern="0" cap="none" spc="0" normalizeH="0" baseline="0" noProof="0" dirty="0" err="1">
+              <a:ln>
+                <a:noFill/>
+              </a:ln>
+              <a:effectLst/>
+              <a:uLnTx/>
+              <a:uFillTx/>
+              <a:latin typeface="Tahoma"/>
+              <a:ea typeface="+mn-ea"/>
+              <a:cs typeface="Tahoma" pitchFamily="34" charset="0"/>
+            </a:endParaRPr>
+          </a:p>
+        </p:txBody>
+      </p:sp>
+      <p:sp>
+        <p:nvSpPr>
+          <p:cNvPr id="63" name="文本框 62">
+            <a:extLst>
+              <a:ext uri="{FF2B5EF4-FFF2-40B4-BE49-F238E27FC236}">
+                <a16:creationId xmlns:a16="http://schemas.microsoft.com/office/drawing/2014/main" id="{37265984-5D0D-D6D1-913A-1BCCCCFFFE15}"/>
+              </a:ext>
+            </a:extLst>
+          </p:cNvPr>
+          <p:cNvSpPr txBox="1"/>
+          <p:nvPr/>
+        </p:nvSpPr>
+        <p:spPr>
+          <a:xfrm>
+            <a:off x="7036617" y="213551"/>
+            <a:ext cx="2009411" cy="215444"/>
+          </a:xfrm>
+          <a:prstGeom prst="rect">
+            <a:avLst/>
+          </a:prstGeom>
+          <a:noFill/>
+        </p:spPr>
+        <p:txBody>
+          <a:bodyPr wrap="square" lIns="0" tIns="0" rIns="0" bIns="0" rtlCol="0">
+            <a:spAutoFit/>
+          </a:bodyPr>
+          <a:lstStyle/>
+          <a:p>
+            <a:pPr marL="0" marR="0" indent="0" defTabSz="914400" eaLnBrk="1" fontAlgn="base" latinLnBrk="0" hangingPunct="1">
+              <a:lnSpc>
+                <a:spcPct val="100000"/>
+              </a:lnSpc>
+              <a:spcBef>
+                <a:spcPts val="0"/>
+              </a:spcBef>
+              <a:spcAft>
+                <a:spcPct val="0"/>
+              </a:spcAft>
+              <a:buClrTx/>
+              <a:buSzTx/>
+              <a:buFontTx/>
+              <a:buNone/>
+              <a:tabLst/>
+            </a:pPr>
+            <a:r>
+              <a:rPr kumimoji="0" lang="zh-CN" altLang="en-US" sz="700" b="0" i="0" u="none" strike="noStrike" kern="0" cap="none" spc="0" normalizeH="0" baseline="0" noProof="0" dirty="0">
+                <a:ln>
+                  <a:noFill/>
+                </a:ln>
+                <a:solidFill>
+                  <a:srgbClr val="000000"/>
+                </a:solidFill>
+                <a:effectLst/>
+                <a:uLnTx/>
+                <a:uFillTx/>
+              </a:rPr>
+              <a:t>此时</a:t>
+            </a:r>
+            <a:r>
+              <a:rPr kumimoji="0" lang="en-US" altLang="zh-CN" sz="700" b="0" i="0" u="none" strike="noStrike" kern="0" cap="none" spc="0" normalizeH="0" baseline="0" noProof="0" dirty="0">
+                <a:ln>
+                  <a:noFill/>
+                </a:ln>
+                <a:solidFill>
+                  <a:srgbClr val="000000"/>
+                </a:solidFill>
+                <a:effectLst/>
+                <a:uLnTx/>
+                <a:uFillTx/>
+              </a:rPr>
+              <a:t>CST</a:t>
+            </a:r>
+            <a:r>
+              <a:rPr kumimoji="0" lang="zh-CN" altLang="en-US" sz="700" b="0" i="0" u="none" strike="noStrike" kern="0" cap="none" spc="0" normalizeH="0" baseline="0" noProof="0" dirty="0">
+                <a:ln>
+                  <a:noFill/>
+                </a:ln>
+                <a:solidFill>
+                  <a:srgbClr val="000000"/>
+                </a:solidFill>
+                <a:effectLst/>
+                <a:uLnTx/>
+                <a:uFillTx/>
+              </a:rPr>
+              <a:t>实际请求的减速扭矩</a:t>
+            </a:r>
+            <a:r>
+              <a:rPr lang="en-US" altLang="zh-CN" sz="700" kern="0" dirty="0">
+                <a:solidFill>
+                  <a:srgbClr val="000000"/>
+                </a:solidFill>
+              </a:rPr>
+              <a:t>&lt;</a:t>
+            </a:r>
+            <a:r>
+              <a:rPr kumimoji="0" lang="zh-CN" altLang="en-US" sz="700" b="0" i="0" u="none" strike="noStrike" kern="0" cap="none" spc="0" normalizeH="0" baseline="0" noProof="0" dirty="0">
+                <a:ln>
+                  <a:noFill/>
+                </a:ln>
+                <a:solidFill>
+                  <a:srgbClr val="000000"/>
+                </a:solidFill>
+                <a:effectLst/>
+                <a:uLnTx/>
+                <a:uFillTx/>
+              </a:rPr>
+              <a:t>驾驶员请求的减速扭矩</a:t>
+            </a:r>
+          </a:p>
+        </p:txBody>
+      </p:sp>
+      <p:cxnSp>
+        <p:nvCxnSpPr>
+          <p:cNvPr id="65" name="Gerader Verbinder 7">
+            <a:extLst>
+              <a:ext uri="{FF2B5EF4-FFF2-40B4-BE49-F238E27FC236}">
+                <a16:creationId xmlns:a16="http://schemas.microsoft.com/office/drawing/2014/main" id="{9897C0C7-2A8D-9F53-21DC-705180BC5293}"/>
+              </a:ext>
+            </a:extLst>
+          </p:cNvPr>
+          <p:cNvCxnSpPr>
+            <a:cxnSpLocks/>
+          </p:cNvCxnSpPr>
+          <p:nvPr/>
+        </p:nvCxnSpPr>
+        <p:spPr>
+          <a:xfrm>
+            <a:off x="6278184" y="624052"/>
+            <a:ext cx="16913" cy="4001491"/>
+          </a:xfrm>
+          <a:prstGeom prst="line">
+            <a:avLst/>
+          </a:prstGeom>
+          <a:noFill/>
+          <a:ln w="6350" cap="rnd" cmpd="sng" algn="ctr">
+            <a:solidFill>
+              <a:schemeClr val="bg2"/>
+            </a:solidFill>
+            <a:prstDash val="lgDash"/>
+            <a:round/>
+          </a:ln>
+          <a:effectLst/>
+        </p:spPr>
+      </p:cxnSp>
+      <p:cxnSp>
+        <p:nvCxnSpPr>
+          <p:cNvPr id="66" name="Gerader Verbinder 30">
+            <a:extLst>
+              <a:ext uri="{FF2B5EF4-FFF2-40B4-BE49-F238E27FC236}">
+                <a16:creationId xmlns:a16="http://schemas.microsoft.com/office/drawing/2014/main" id="{3D3486CD-939E-4139-F9E4-0073D5972DC2}"/>
+              </a:ext>
+            </a:extLst>
+          </p:cNvPr>
+          <p:cNvCxnSpPr>
+            <a:cxnSpLocks/>
+          </p:cNvCxnSpPr>
+          <p:nvPr/>
+        </p:nvCxnSpPr>
+        <p:spPr>
+          <a:xfrm flipH="1">
+            <a:off x="6047295" y="2628766"/>
+            <a:ext cx="230889" cy="1094051"/>
+          </a:xfrm>
+          <a:prstGeom prst="line">
+            <a:avLst/>
+          </a:prstGeom>
+          <a:noFill/>
+          <a:ln w="6350" cap="rnd" cmpd="sng" algn="ctr">
+            <a:solidFill>
+              <a:srgbClr val="E52330"/>
+            </a:solidFill>
+            <a:prstDash val="solid"/>
+            <a:round/>
+          </a:ln>
+          <a:effectLst/>
+        </p:spPr>
+      </p:cxnSp>
+      <p:cxnSp>
+        <p:nvCxnSpPr>
+          <p:cNvPr id="71" name="Gerader Verbinder 26">
+            <a:extLst>
+              <a:ext uri="{FF2B5EF4-FFF2-40B4-BE49-F238E27FC236}">
+                <a16:creationId xmlns:a16="http://schemas.microsoft.com/office/drawing/2014/main" id="{44516934-F0F3-31F2-B7EA-ED303EEEAF0A}"/>
+              </a:ext>
+            </a:extLst>
+          </p:cNvPr>
+          <p:cNvCxnSpPr/>
+          <p:nvPr/>
+        </p:nvCxnSpPr>
+        <p:spPr>
+          <a:xfrm>
+            <a:off x="6295097" y="993934"/>
+            <a:ext cx="2273642" cy="0"/>
+          </a:xfrm>
+          <a:prstGeom prst="line">
+            <a:avLst/>
+          </a:prstGeom>
+          <a:noFill/>
+          <a:ln w="6350" cap="rnd" cmpd="sng" algn="ctr">
+            <a:solidFill>
+              <a:srgbClr val="E52330"/>
+            </a:solidFill>
+            <a:prstDash val="solid"/>
+            <a:round/>
+          </a:ln>
+          <a:effectLst/>
+        </p:spPr>
+      </p:cxnSp>
+      <p:sp>
+        <p:nvSpPr>
+          <p:cNvPr id="57" name="文本框 56">
+            <a:extLst>
+              <a:ext uri="{FF2B5EF4-FFF2-40B4-BE49-F238E27FC236}">
+                <a16:creationId xmlns:a16="http://schemas.microsoft.com/office/drawing/2014/main" id="{287D229E-3701-E755-0109-F8F5B574E105}"/>
+              </a:ext>
+            </a:extLst>
+          </p:cNvPr>
+          <p:cNvSpPr txBox="1"/>
+          <p:nvPr/>
+        </p:nvSpPr>
+        <p:spPr>
+          <a:xfrm>
+            <a:off x="2984897" y="2686946"/>
+            <a:ext cx="2393253" cy="523220"/>
+          </a:xfrm>
+          <a:prstGeom prst="rect">
+            <a:avLst/>
+          </a:prstGeom>
+          <a:noFill/>
+        </p:spPr>
+        <p:txBody>
+          <a:bodyPr wrap="square">
+            <a:spAutoFit/>
+          </a:bodyPr>
+          <a:lstStyle/>
+          <a:p>
+            <a:pPr fontAlgn="base">
+              <a:spcAft>
+                <a:spcPct val="0"/>
+              </a:spcAft>
+            </a:pPr>
+            <a:r>
+              <a:rPr lang="zh-CN" altLang="en-US" sz="700" kern="0" dirty="0">
+                <a:solidFill>
+                  <a:srgbClr val="FF0000"/>
+                </a:solidFill>
+              </a:rPr>
+              <a:t>起始点：</a:t>
+            </a:r>
+            <a:r>
+              <a:rPr lang="en-US" altLang="zh-CN" sz="700" kern="0" dirty="0" err="1">
+                <a:solidFill>
+                  <a:srgbClr val="FF0000"/>
+                </a:solidFill>
+              </a:rPr>
+              <a:t>VehTargtDecelBrkTorq</a:t>
+            </a:r>
+            <a:r>
+              <a:rPr lang="en-US" altLang="zh-CN" sz="700" kern="0" dirty="0">
+                <a:solidFill>
+                  <a:srgbClr val="FF0000"/>
+                </a:solidFill>
+              </a:rPr>
+              <a:t>=</a:t>
+            </a:r>
+            <a:r>
+              <a:rPr lang="en-US" altLang="zh-CN" sz="700" kern="0" dirty="0" err="1">
+                <a:solidFill>
+                  <a:srgbClr val="FF0000"/>
+                </a:solidFill>
+              </a:rPr>
+              <a:t>DrRqdFrntShftBrkTorq</a:t>
+            </a:r>
+            <a:r>
+              <a:rPr lang="en-US" altLang="zh-CN" sz="700" kern="0" dirty="0">
+                <a:solidFill>
+                  <a:srgbClr val="FF0000"/>
+                </a:solidFill>
+              </a:rPr>
+              <a:t> + </a:t>
+            </a:r>
+            <a:r>
+              <a:rPr lang="en-US" altLang="zh-CN" sz="700" kern="0" dirty="0" err="1">
+                <a:solidFill>
+                  <a:srgbClr val="FF0000"/>
+                </a:solidFill>
+              </a:rPr>
+              <a:t>DrRqdRearShftBrkTorq</a:t>
+            </a:r>
+            <a:endParaRPr lang="en-US" altLang="zh-CN" sz="700" kern="0" dirty="0">
+              <a:solidFill>
+                <a:srgbClr val="FF0000"/>
+              </a:solidFill>
+            </a:endParaRPr>
+          </a:p>
+          <a:p>
+            <a:pPr fontAlgn="base">
+              <a:spcAft>
+                <a:spcPct val="0"/>
+              </a:spcAft>
+            </a:pPr>
+            <a:endParaRPr lang="en-US" altLang="zh-CN" sz="700" kern="0" dirty="0">
+              <a:solidFill>
+                <a:srgbClr val="FF0000"/>
+              </a:solidFill>
+            </a:endParaRPr>
+          </a:p>
+          <a:p>
+            <a:pPr fontAlgn="base">
+              <a:spcAft>
+                <a:spcPct val="0"/>
+              </a:spcAft>
+            </a:pPr>
+            <a:r>
+              <a:rPr lang="zh-CN" altLang="en-US" sz="700" kern="0" dirty="0">
+                <a:solidFill>
+                  <a:srgbClr val="FF0000"/>
+                </a:solidFill>
+              </a:rPr>
+              <a:t>斜率按照</a:t>
+            </a:r>
+            <a:r>
+              <a:rPr lang="en-US" altLang="zh-CN" sz="700" kern="0" dirty="0">
+                <a:solidFill>
+                  <a:srgbClr val="FF0000"/>
+                </a:solidFill>
+              </a:rPr>
+              <a:t>3500Nm/s </a:t>
+            </a:r>
+            <a:r>
+              <a:rPr lang="zh-CN" altLang="en-US" sz="700" kern="0" dirty="0">
+                <a:solidFill>
+                  <a:srgbClr val="FF0000"/>
+                </a:solidFill>
+              </a:rPr>
+              <a:t>斜率下降到</a:t>
+            </a:r>
+            <a:r>
+              <a:rPr lang="en-US" altLang="zh-CN" sz="700" kern="0" dirty="0">
+                <a:solidFill>
+                  <a:srgbClr val="FF0000"/>
+                </a:solidFill>
+              </a:rPr>
+              <a:t>0.</a:t>
+            </a:r>
+          </a:p>
+        </p:txBody>
+      </p:sp>
+      <p:sp>
+        <p:nvSpPr>
+          <p:cNvPr id="64" name="文本框 63">
+            <a:extLst>
+              <a:ext uri="{FF2B5EF4-FFF2-40B4-BE49-F238E27FC236}">
+                <a16:creationId xmlns:a16="http://schemas.microsoft.com/office/drawing/2014/main" id="{87D98079-3399-563B-D913-2952B24F5C07}"/>
+              </a:ext>
+            </a:extLst>
+          </p:cNvPr>
+          <p:cNvSpPr txBox="1"/>
+          <p:nvPr/>
+        </p:nvSpPr>
+        <p:spPr>
+          <a:xfrm>
+            <a:off x="6286640" y="2566049"/>
+            <a:ext cx="2393253" cy="846386"/>
+          </a:xfrm>
+          <a:prstGeom prst="rect">
+            <a:avLst/>
+          </a:prstGeom>
+          <a:noFill/>
+        </p:spPr>
+        <p:txBody>
+          <a:bodyPr wrap="square">
+            <a:spAutoFit/>
+          </a:bodyPr>
+          <a:lstStyle/>
+          <a:p>
+            <a:pPr fontAlgn="base">
+              <a:spcAft>
+                <a:spcPct val="0"/>
+              </a:spcAft>
+            </a:pPr>
+            <a:r>
+              <a:rPr lang="zh-CN" altLang="en-US" sz="700" kern="0" dirty="0">
+                <a:solidFill>
+                  <a:srgbClr val="FF0000"/>
+                </a:solidFill>
+              </a:rPr>
+              <a:t>斜率按照</a:t>
+            </a:r>
+            <a:r>
+              <a:rPr lang="en-US" altLang="zh-CN" sz="700" kern="0" dirty="0">
+                <a:solidFill>
+                  <a:srgbClr val="FF0000"/>
+                </a:solidFill>
+              </a:rPr>
+              <a:t>3500Nm/s </a:t>
+            </a:r>
+            <a:r>
+              <a:rPr lang="zh-CN" altLang="en-US" sz="700" kern="0" dirty="0">
+                <a:solidFill>
+                  <a:srgbClr val="FF0000"/>
+                </a:solidFill>
+              </a:rPr>
+              <a:t>斜率从</a:t>
+            </a:r>
+            <a:r>
+              <a:rPr lang="en-US" altLang="zh-CN" sz="700" kern="0" dirty="0">
+                <a:solidFill>
+                  <a:srgbClr val="FF0000"/>
+                </a:solidFill>
+              </a:rPr>
+              <a:t>0</a:t>
+            </a:r>
+            <a:r>
+              <a:rPr lang="zh-CN" altLang="en-US" sz="700" kern="0" dirty="0">
+                <a:solidFill>
+                  <a:srgbClr val="FF0000"/>
+                </a:solidFill>
+              </a:rPr>
+              <a:t>升到目标。</a:t>
+            </a:r>
+            <a:endParaRPr lang="en-US" altLang="zh-CN" sz="700" kern="0" dirty="0">
+              <a:solidFill>
+                <a:srgbClr val="FF0000"/>
+              </a:solidFill>
+            </a:endParaRPr>
+          </a:p>
+          <a:p>
+            <a:pPr fontAlgn="base">
+              <a:spcAft>
+                <a:spcPct val="0"/>
+              </a:spcAft>
+            </a:pPr>
+            <a:r>
+              <a:rPr lang="en-US" altLang="zh-CN" sz="700" kern="0" dirty="0" err="1">
+                <a:solidFill>
+                  <a:srgbClr val="FF0000"/>
+                </a:solidFill>
+              </a:rPr>
+              <a:t>VehTargtDecelBrkTorq</a:t>
+            </a:r>
+            <a:r>
+              <a:rPr lang="en-US" altLang="zh-CN" sz="700" kern="0" dirty="0">
+                <a:solidFill>
+                  <a:srgbClr val="FF0000"/>
+                </a:solidFill>
+              </a:rPr>
+              <a:t>=</a:t>
+            </a:r>
+            <a:r>
+              <a:rPr lang="en-US" altLang="zh-CN" sz="700" kern="0" dirty="0" err="1">
+                <a:solidFill>
+                  <a:srgbClr val="FF0000"/>
+                </a:solidFill>
+              </a:rPr>
+              <a:t>DrRqdFrntShftBrkTorq</a:t>
+            </a:r>
+            <a:r>
+              <a:rPr lang="en-US" altLang="zh-CN" sz="700" kern="0" dirty="0">
+                <a:solidFill>
+                  <a:srgbClr val="FF0000"/>
+                </a:solidFill>
+              </a:rPr>
+              <a:t> + </a:t>
+            </a:r>
+            <a:r>
+              <a:rPr lang="en-US" altLang="zh-CN" sz="700" kern="0" dirty="0" err="1">
+                <a:solidFill>
+                  <a:srgbClr val="FF0000"/>
+                </a:solidFill>
+              </a:rPr>
+              <a:t>DrRqdRearShftBrkTorq</a:t>
+            </a:r>
+            <a:endParaRPr lang="en-US" altLang="zh-CN" sz="700" kern="0" dirty="0">
+              <a:solidFill>
+                <a:srgbClr val="FF0000"/>
+              </a:solidFill>
+            </a:endParaRPr>
+          </a:p>
+          <a:p>
+            <a:pPr fontAlgn="base">
+              <a:spcAft>
+                <a:spcPct val="0"/>
+              </a:spcAft>
+            </a:pPr>
+            <a:endParaRPr lang="en-US" altLang="zh-CN" sz="700" kern="0" dirty="0">
+              <a:solidFill>
+                <a:srgbClr val="FF0000"/>
+              </a:solidFill>
+            </a:endParaRPr>
+          </a:p>
+          <a:p>
+            <a:pPr fontAlgn="base">
+              <a:spcAft>
+                <a:spcPct val="0"/>
+              </a:spcAft>
+            </a:pPr>
+            <a:endParaRPr lang="en-US" altLang="zh-CN" sz="700" kern="0" dirty="0">
+              <a:solidFill>
+                <a:srgbClr val="FF0000"/>
+              </a:solidFill>
+            </a:endParaRPr>
+          </a:p>
+          <a:p>
+            <a:pPr fontAlgn="base">
+              <a:spcAft>
+                <a:spcPct val="0"/>
+              </a:spcAft>
+            </a:pPr>
+            <a:r>
+              <a:rPr lang="zh-CN" altLang="en-US" sz="700" kern="0" dirty="0">
+                <a:solidFill>
+                  <a:srgbClr val="FF0000"/>
+                </a:solidFill>
+              </a:rPr>
+              <a:t>请求达到目标即可退出</a:t>
+            </a:r>
+            <a:r>
+              <a:rPr lang="en-US" altLang="zh-CN" sz="700" kern="0" dirty="0">
+                <a:solidFill>
+                  <a:srgbClr val="FF0000"/>
+                </a:solidFill>
+              </a:rPr>
+              <a:t>CST</a:t>
+            </a:r>
+            <a:r>
+              <a:rPr lang="zh-CN" altLang="en-US" sz="700" kern="0" dirty="0">
+                <a:solidFill>
+                  <a:srgbClr val="FF0000"/>
+                </a:solidFill>
+              </a:rPr>
+              <a:t>功能，无需校验实际制动力是否达标。</a:t>
+            </a:r>
+            <a:endParaRPr lang="en-US" altLang="zh-CN" sz="700" kern="0" dirty="0">
+              <a:solidFill>
+                <a:srgbClr val="FF0000"/>
+              </a:solidFill>
+            </a:endParaRPr>
+          </a:p>
+        </p:txBody>
+      </p:sp>
+    </p:spTree>
+    <p:extLst>
+      <p:ext uri="{BB962C8B-B14F-4D97-AF65-F5344CB8AC3E}">
+        <p14:creationId xmlns:p14="http://schemas.microsoft.com/office/powerpoint/2010/main" val="797498013"/>
       </p:ext>
     </p:extLst>
   </p:cSld>
@@ -19849,28 +27877,8 @@
 </file>
 
 <file path=customXml/item1.xml><?xml version="1.0" encoding="utf-8"?>
-<p:properties xmlns:p="http://schemas.microsoft.com/office/2006/metadata/properties" xmlns:xsi="http://www.w3.org/2001/XMLSchema-instance" xmlns:pc="http://schemas.microsoft.com/office/infopath/2007/PartnerControls">
-  <documentManagement>
-    <TaxCatchAll xmlns="f4ecdb93-bc7f-4438-8c77-236ab96c18a9" xsi:nil="true"/>
-    <lcf76f155ced4ddcb4097134ff3c332f xmlns="455088e1-af34-4927-a3f0-bdce59540293">
-      <Terms xmlns="http://schemas.microsoft.com/office/infopath/2007/PartnerControls"/>
-    </lcf76f155ced4ddcb4097134ff3c332f>
-  </documentManagement>
-</p:properties>
-</file>
-
-<file path=customXml/item2.xml><?xml version="1.0" encoding="utf-8"?>
-<?mso-contentType ?>
-<FormTemplates xmlns="http://schemas.microsoft.com/sharepoint/v3/contenttype/forms">
-  <Display>DocumentLibraryForm</Display>
-  <Edit>DocumentLibraryForm</Edit>
-  <New>DocumentLibraryForm</New>
-</FormTemplates>
-</file>
-
-<file path=customXml/item3.xml><?xml version="1.0" encoding="utf-8"?>
-<ct:contentTypeSchema xmlns:ct="http://schemas.microsoft.com/office/2006/metadata/contentType" xmlns:ma="http://schemas.microsoft.com/office/2006/metadata/properties/metaAttributes" ct:_="" ma:_="" ma:contentTypeName="Document" ma:contentTypeID="0x010100F4ECDE3992A08C4AB27EAAF617A05967" ma:contentTypeVersion="12" ma:contentTypeDescription="Create a new document." ma:contentTypeScope="" ma:versionID="6030d3fe49356aaef09cec4ad8e6441b">
-  <xsd:schema xmlns:xsd="http://www.w3.org/2001/XMLSchema" xmlns:xs="http://www.w3.org/2001/XMLSchema" xmlns:p="http://schemas.microsoft.com/office/2006/metadata/properties" xmlns:ns2="455088e1-af34-4927-a3f0-bdce59540293" xmlns:ns3="f4ecdb93-bc7f-4438-8c77-236ab96c18a9" targetNamespace="http://schemas.microsoft.com/office/2006/metadata/properties" ma:root="true" ma:fieldsID="39cc5a898485895145ac9f4685282a2b" ns2:_="" ns3:_="">
+<ct:contentTypeSchema xmlns:ct="http://schemas.microsoft.com/office/2006/metadata/contentType" xmlns:ma="http://schemas.microsoft.com/office/2006/metadata/properties/metaAttributes" ct:_="" ma:_="" ma:contentTypeName="文档" ma:contentTypeID="0x010100F4ECDE3992A08C4AB27EAAF617A05967" ma:contentTypeVersion="18" ma:contentTypeDescription="新建文档。" ma:contentTypeScope="" ma:versionID="7a1862a2c5bfb592d13551c3fa22cd36">
+  <xsd:schema xmlns:xsd="http://www.w3.org/2001/XMLSchema" xmlns:xs="http://www.w3.org/2001/XMLSchema" xmlns:p="http://schemas.microsoft.com/office/2006/metadata/properties" xmlns:ns2="455088e1-af34-4927-a3f0-bdce59540293" xmlns:ns3="f4ecdb93-bc7f-4438-8c77-236ab96c18a9" targetNamespace="http://schemas.microsoft.com/office/2006/metadata/properties" ma:root="true" ma:fieldsID="0695127d08f6d47f62536280da32b892" ns2:_="" ns3:_="">
     <xsd:import namespace="455088e1-af34-4927-a3f0-bdce59540293"/>
     <xsd:import namespace="f4ecdb93-bc7f-4438-8c77-236ab96c18a9"/>
     <xsd:element name="properties">
@@ -19890,6 +27898,12 @@
                 <xsd:element ref="ns2:MediaServiceOCR" minOccurs="0"/>
                 <xsd:element ref="ns2:MediaServiceLocation" minOccurs="0"/>
                 <xsd:element ref="ns2:MediaLengthInSeconds" minOccurs="0"/>
+                <xsd:element ref="ns2:testStatus" minOccurs="0"/>
+                <xsd:element ref="ns3:PrimeClassificationStatus" minOccurs="0"/>
+                <xsd:element ref="ns3:PrimeClassificationStatusDetails" minOccurs="0"/>
+                <xsd:element ref="ns3:PrimeLastClassified" minOccurs="0"/>
+                <xsd:element ref="ns3:PrimeCorrectedByUser" minOccurs="0"/>
+                <xsd:element ref="ns3:PrimeAutofillMeta" minOccurs="0"/>
               </xsd:all>
             </xsd:complexType>
           </xsd:element>
@@ -19920,7 +27934,7 @@
         <xsd:restriction base="dms:Text"/>
       </xsd:simpleType>
     </xsd:element>
-    <xsd:element name="lcf76f155ced4ddcb4097134ff3c332f" ma:index="13" nillable="true" ma:taxonomy="true" ma:internalName="lcf76f155ced4ddcb4097134ff3c332f" ma:taxonomyFieldName="MediaServiceImageTags" ma:displayName="Image Tags" ma:readOnly="false" ma:fieldId="{5cf76f15-5ced-4ddc-b409-7134ff3c332f}" ma:taxonomyMulti="true" ma:sspId="61535f45-074a-4eaf-b5ce-0ad645dc0277" ma:termSetId="09814cd3-568e-fe90-9814-8d621ff8fb84" ma:anchorId="fba54fb3-c3e1-fe81-a776-ca4b69148c4d" ma:open="true" ma:isKeyword="false">
+    <xsd:element name="lcf76f155ced4ddcb4097134ff3c332f" ma:index="13" nillable="true" ma:taxonomy="true" ma:internalName="lcf76f155ced4ddcb4097134ff3c332f" ma:taxonomyFieldName="MediaServiceImageTags" ma:displayName="图像标记" ma:readOnly="false" ma:fieldId="{5cf76f15-5ced-4ddc-b409-7134ff3c332f}" ma:taxonomyMulti="true" ma:sspId="61535f45-074a-4eaf-b5ce-0ad645dc0277" ma:termSetId="09814cd3-568e-fe90-9814-8d621ff8fb84" ma:anchorId="fba54fb3-c3e1-fe81-a776-ca4b69148c4d" ma:open="true" ma:isKeyword="false">
       <xsd:complexType>
         <xsd:sequence>
           <xsd:element ref="pc:Terms" minOccurs="0" maxOccurs="1"/>
@@ -19954,6 +27968,18 @@
         <xsd:restriction base="dms:Unknown"/>
       </xsd:simpleType>
     </xsd:element>
+    <xsd:element name="testStatus" ma:index="20" nillable="true" ma:displayName="Test status" ma:description="Summarizes overall test outcome so failed or mixed-result files can be found quickly." ma:internalName="testStatus">
+      <xsd:simpleType>
+        <xsd:restriction base="dms:Choice">
+          <xsd:enumeration value="Pass"/>
+          <xsd:enumeration value="Fail"/>
+          <xsd:enumeration value="Error"/>
+          <xsd:enumeration value="Skipped"/>
+          <xsd:enumeration value="Mixed"/>
+          <xsd:enumeration value="Not found"/>
+        </xsd:restriction>
+      </xsd:simpleType>
+    </xsd:element>
   </xsd:schema>
   <xsd:schema xmlns:xsd="http://www.w3.org/2001/XMLSchema" xmlns:xs="http://www.w3.org/2001/XMLSchema" xmlns:dms="http://schemas.microsoft.com/office/2006/documentManagement/types" xmlns:pc="http://schemas.microsoft.com/office/infopath/2007/PartnerControls" targetNamespace="f4ecdb93-bc7f-4438-8c77-236ab96c18a9" elementFormDefault="qualified">
     <xsd:import namespace="http://schemas.microsoft.com/office/2006/documentManagement/types"/>
@@ -19969,6 +27995,33 @@
         </xsd:complexContent>
       </xsd:complexType>
     </xsd:element>
+    <xsd:element name="PrimeClassificationStatus" ma:index="21" nillable="true" ma:displayName="处理状态" ma:internalName="PrimeClassificationStatus">
+      <xsd:simpleType>
+        <xsd:restriction base="dms:Text"/>
+      </xsd:simpleType>
+    </xsd:element>
+    <xsd:element name="PrimeClassificationStatusDetails" ma:index="22" nillable="true" ma:displayName="处理详细信息" ma:internalName="PrimeClassificationStatusDetails">
+      <xsd:simpleType>
+        <xsd:restriction base="dms:Note">
+          <xsd:maxLength value="255"/>
+        </xsd:restriction>
+      </xsd:simpleType>
+    </xsd:element>
+    <xsd:element name="PrimeLastClassified" ma:index="23" nillable="true" ma:displayName="已处理" ma:internalName="PrimeLastClassified">
+      <xsd:simpleType>
+        <xsd:restriction base="dms:DateTime"/>
+      </xsd:simpleType>
+    </xsd:element>
+    <xsd:element name="PrimeCorrectedByUser" ma:index="24" nillable="true" ma:displayName="已更正" ma:internalName="PrimeCorrectedByUser">
+      <xsd:simpleType>
+        <xsd:restriction base="dms:Boolean"/>
+      </xsd:simpleType>
+    </xsd:element>
+    <xsd:element name="PrimeAutofillMeta" ma:index="25" nillable="true" ma:displayName="Autofill Meta" ma:hidden="true" ma:internalName="PrimeAutofillMeta">
+      <xsd:simpleType>
+        <xsd:restriction base="dms:Note"/>
+      </xsd:simpleType>
+    </xsd:element>
   </xsd:schema>
   <xsd:schema xmlns="http://schemas.openxmlformats.org/package/2006/metadata/core-properties" xmlns:xsd="http://www.w3.org/2001/XMLSchema" xmlns:xsi="http://www.w3.org/2001/XMLSchema-instance" xmlns:dc="http://purl.org/dc/elements/1.1/" xmlns:dcterms="http://purl.org/dc/terms/" xmlns:odoc="http://schemas.microsoft.com/internal/obd" targetNamespace="http://schemas.openxmlformats.org/package/2006/metadata/core-properties" elementFormDefault="qualified" attributeFormDefault="unqualified" blockDefault="#all">
     <xsd:import namespace="http://purl.org/dc/elements/1.1/" schemaLocation="http://dublincore.org/schemas/xmls/qdc/2003/04/02/dc.xsd"/>
@@ -19979,8 +28032,8 @@
         <xsd:element ref="dc:creator" minOccurs="0" maxOccurs="1"/>
         <xsd:element ref="dcterms:created" minOccurs="0" maxOccurs="1"/>
         <xsd:element ref="dc:identifier" minOccurs="0" maxOccurs="1"/>
-        <xsd:element name="contentType" minOccurs="0" maxOccurs="1" type="xsd:string" ma:index="0" ma:displayName="Content Type"/>
-        <xsd:element ref="dc:title" minOccurs="0" maxOccurs="1" ma:index="4" ma:displayName="Title"/>
+        <xsd:element name="contentType" minOccurs="0" maxOccurs="1" type="xsd:string" ma:index="0" ma:displayName="内容类型"/>
+        <xsd:element ref="dc:title" minOccurs="0" maxOccurs="1" ma:index="4" ma:displayName="标题"/>
         <xsd:element ref="dc:subject" minOccurs="0" maxOccurs="1"/>
         <xsd:element ref="dc:description" minOccurs="0" maxOccurs="1"/>
         <xsd:element name="keywords" minOccurs="0" maxOccurs="1" type="xsd:string"/>
@@ -20069,7 +28122,37 @@
 </ct:contentTypeSchema>
 </file>
 
+<file path=customXml/item2.xml><?xml version="1.0" encoding="utf-8"?>
+<p:properties xmlns:p="http://schemas.microsoft.com/office/2006/metadata/properties" xmlns:xsi="http://www.w3.org/2001/XMLSchema-instance" xmlns:pc="http://schemas.microsoft.com/office/infopath/2007/PartnerControls">
+  <documentManagement>
+    <TaxCatchAll xmlns="f4ecdb93-bc7f-4438-8c77-236ab96c18a9" xsi:nil="true"/>
+    <lcf76f155ced4ddcb4097134ff3c332f xmlns="455088e1-af34-4927-a3f0-bdce59540293">
+      <Terms xmlns="http://schemas.microsoft.com/office/infopath/2007/PartnerControls"/>
+    </lcf76f155ced4ddcb4097134ff3c332f>
+    <PrimeCorrectedByUser xmlns="f4ecdb93-bc7f-4438-8c77-236ab96c18a9" xsi:nil="true"/>
+    <testStatus xmlns="455088e1-af34-4927-a3f0-bdce59540293">Not found</testStatus>
+    <PrimeClassificationStatusDetails xmlns="f4ecdb93-bc7f-4438-8c77-236ab96c18a9" xsi:nil="true"/>
+    <PrimeClassificationStatus xmlns="f4ecdb93-bc7f-4438-8c77-236ab96c18a9" xsi:nil="true"/>
+    <PrimeLastClassified xmlns="f4ecdb93-bc7f-4438-8c77-236ab96c18a9" xsi:nil="true"/>
+    <PrimeAutofillMeta xmlns="f4ecdb93-bc7f-4438-8c77-236ab96c18a9" xsi:nil="true"/>
+  </documentManagement>
+</p:properties>
+</file>
+
+<file path=customXml/item3.xml><?xml version="1.0" encoding="utf-8"?>
+<?mso-contentType ?>
+<FormTemplates xmlns="http://schemas.microsoft.com/sharepoint/v3/contenttype/forms">
+  <Display>DocumentLibraryForm</Display>
+  <Edit>DocumentLibraryForm</Edit>
+  <New>DocumentLibraryForm</New>
+</FormTemplates>
+</file>
+
 <file path=customXml/itemProps1.xml><?xml version="1.0" encoding="utf-8"?>
+<ds:datastoreItem xmlns:ds="http://schemas.openxmlformats.org/officeDocument/2006/customXml" ds:itemID="{49B2D737-0A0C-4B96-8DF8-B70999A2FA3B}"/>
+</file>
+
+<file path=customXml/itemProps2.xml><?xml version="1.0" encoding="utf-8"?>
 <ds:datastoreItem xmlns:ds="http://schemas.openxmlformats.org/officeDocument/2006/customXml" ds:itemID="{7B35380E-1B53-4838-81C3-2AB9939B6FC6}">
   <ds:schemaRefs>
     <ds:schemaRef ds:uri="http://schemas.microsoft.com/office/2006/metadata/properties"/>
@@ -20080,29 +28163,10 @@
 </ds:datastoreItem>
 </file>
 
-<file path=customXml/itemProps2.xml><?xml version="1.0" encoding="utf-8"?>
+<file path=customXml/itemProps3.xml><?xml version="1.0" encoding="utf-8"?>
 <ds:datastoreItem xmlns:ds="http://schemas.openxmlformats.org/officeDocument/2006/customXml" ds:itemID="{DDA0BA8E-434D-48CF-8C42-C96ADE6F01B2}">
   <ds:schemaRefs>
     <ds:schemaRef ds:uri="http://schemas.microsoft.com/sharepoint/v3/contenttype/forms"/>
   </ds:schemaRefs>
 </ds:datastoreItem>
-</file>
-
-<file path=customXml/itemProps3.xml><?xml version="1.0" encoding="utf-8"?>
-<ds:datastoreItem xmlns:ds="http://schemas.openxmlformats.org/officeDocument/2006/customXml" ds:itemID="{43578DCF-6921-4DC0-9B5C-39F962B101EA}">
-  <ds:schemaRefs>
-    <ds:schemaRef ds:uri="http://schemas.microsoft.com/office/2006/metadata/contentType"/>
-    <ds:schemaRef ds:uri="http://schemas.microsoft.com/office/2006/metadata/properties/metaAttributes"/>
-    <ds:schemaRef ds:uri="http://www.w3.org/2001/XMLSchema"/>
-    <ds:schemaRef ds:uri="http://schemas.microsoft.com/office/2006/metadata/properties"/>
-    <ds:schemaRef ds:uri="455088e1-af34-4927-a3f0-bdce59540293"/>
-    <ds:schemaRef ds:uri="f4ecdb93-bc7f-4438-8c77-236ab96c18a9"/>
-    <ds:schemaRef ds:uri="http://schemas.microsoft.com/office/2006/documentManagement/types"/>
-    <ds:schemaRef ds:uri="http://schemas.microsoft.com/office/infopath/2007/PartnerControls"/>
-    <ds:schemaRef ds:uri="http://schemas.openxmlformats.org/package/2006/metadata/core-properties"/>
-    <ds:schemaRef ds:uri="http://purl.org/dc/elements/1.1/"/>
-    <ds:schemaRef ds:uri="http://purl.org/dc/terms/"/>
-    <ds:schemaRef ds:uri="http://schemas.microsoft.com/internal/obd"/>
-  </ds:schemaRefs>
-</ds:datastoreItem>
 </file>